--- a/reports/2026-08.pptx
+++ b/reports/2026-08.pptx
@@ -16,6 +16,8 @@
     <p:sldId id="264" r:id="rId15"/>
     <p:sldId id="265" r:id="rId16"/>
     <p:sldId id="266" r:id="rId17"/>
+    <p:sldId id="267" r:id="rId18"/>
+    <p:sldId id="268" r:id="rId19"/>
   </p:sldIdLst>
   <p:sldSz cx="12191695" cy="6858000" type="screen4x3"/>
   <p:notesSz cx="6858000" cy="9144000"/>
@@ -134,7 +136,7 @@
                 </a:solidFill>
                 <a:latin typeface="Arial"/>
               </a:rPr>
-              <a:t>2026年上半年重點企業與業務營收成長率 (%)</a:t>
+              <a:t>2026 年上半年光顯與投影企業營收表現（億元人民幣）</a:t>
             </a:r>
           </a:p>
         </c:rich>
@@ -156,7 +158,7 @@
               <c:strCache>
                 <c:ptCount val="1"/>
                 <c:pt idx="0">
-                  <c:v>同比成長率</c:v>
+                  <c:v>上半年總營收</c:v>
                 </c:pt>
               </c:strCache>
             </c:strRef>
@@ -168,47 +170,90 @@
           </c:spPr>
           <c:cat>
             <c:strRef>
-              <c:f>Sheet1!$A$2:$A$6</c:f>
+              <c:f>Sheet1!$A$2:$A$4</c:f>
               <c:strCache>
-                <c:ptCount val="5"/>
+                <c:ptCount val="3"/>
                 <c:pt idx="0">
-                  <c:v>極米海外收入</c:v>
+                  <c:v>安克創新</c:v>
                 </c:pt>
                 <c:pt idx="1">
-                  <c:v>安克創新總營收</c:v>
+                  <c:v>聯合光電</c:v>
                 </c:pt>
                 <c:pt idx="2">
-                  <c:v>安克智慧影音業務</c:v>
-                </c:pt>
-                <c:pt idx="3">
-                  <c:v>中光學總營收</c:v>
-                </c:pt>
-                <c:pt idx="4">
-                  <c:v>中光學投影整機業務</c:v>
+                  <c:v>中光學</c:v>
                 </c:pt>
               </c:strCache>
             </c:strRef>
           </c:cat>
           <c:val>
             <c:numRef>
-              <c:f>Sheet1!$B$2:$B$6</c:f>
+              <c:f>Sheet1!$B$2:$B$4</c:f>
               <c:numCache>
                 <c:formatCode>General</c:formatCode>
-                <c:ptCount val="5"/>
+                <c:ptCount val="3"/>
                 <c:pt idx="0">
-                  <c:v>87.63</c:v>
+                  <c:v>166.05</c:v>
                 </c:pt>
                 <c:pt idx="1">
-                  <c:v>29.05</c:v>
+                  <c:v>10.49</c:v>
                 </c:pt>
                 <c:pt idx="2">
-                  <c:v>24.53</c:v>
+                  <c:v>7.25</c:v>
                 </c:pt>
-                <c:pt idx="3">
-                  <c:v>6.71</c:v>
+              </c:numCache>
+            </c:numRef>
+          </c:val>
+        </c:ser>
+        <c:ser>
+          <c:idx val="1"/>
+          <c:order val="1"/>
+          <c:tx>
+            <c:strRef>
+              <c:f>Sheet1!$C$1</c:f>
+              <c:strCache>
+                <c:ptCount val="1"/>
+                <c:pt idx="0">
+                  <c:v>智慧影音與投影業務營收</c:v>
                 </c:pt>
-                <c:pt idx="4">
-                  <c:v>-5.72</c:v>
+              </c:strCache>
+            </c:strRef>
+          </c:tx>
+          <c:spPr>
+            <a:solidFill>
+              <a:srgbClr val="FFB454"/>
+            </a:solidFill>
+          </c:spPr>
+          <c:cat>
+            <c:strRef>
+              <c:f>Sheet1!$A$2:$A$4</c:f>
+              <c:strCache>
+                <c:ptCount val="3"/>
+                <c:pt idx="0">
+                  <c:v>安克創新</c:v>
+                </c:pt>
+                <c:pt idx="1">
+                  <c:v>聯合光電</c:v>
+                </c:pt>
+                <c:pt idx="2">
+                  <c:v>中光學</c:v>
+                </c:pt>
+              </c:strCache>
+            </c:strRef>
+          </c:cat>
+          <c:val>
+            <c:numRef>
+              <c:f>Sheet1!$C$2:$C$4</c:f>
+              <c:numCache>
+                <c:formatCode>General</c:formatCode>
+                <c:ptCount val="3"/>
+                <c:pt idx="0">
+                  <c:v>34.85</c:v>
+                </c:pt>
+                <c:pt idx="1">
+                  <c:v>10.49</c:v>
+                </c:pt>
+                <c:pt idx="2">
+                  <c:v>1.18</c:v>
                 </c:pt>
               </c:numCache>
             </c:numRef>
@@ -320,6 +365,24 @@
         <c:crosses val="autoZero"/>
       </c:valAx>
     </c:plotArea>
+    <c:legend>
+      <c:legendPos val="b"/>
+      <c:overlay val="0"/>
+      <c:txPr>
+        <a:bodyPr/>
+        <a:lstStyle/>
+        <a:p>
+          <a:pPr>
+            <a:defRPr sz="1100">
+              <a:solidFill>
+                <a:srgbClr val="9096A1"/>
+              </a:solidFill>
+              <a:latin typeface="Arial"/>
+            </a:defRPr>
+          </a:pPr>
+        </a:p>
+      </c:txPr>
+    </c:legend>
     <c:dispBlanksAs val="gap"/>
   </c:chart>
   <c:txPr>
@@ -3580,7 +3643,7 @@
                 </a:solidFill>
                 <a:latin typeface="Arial"/>
               </a:rPr>
-              <a:t>10 · SECTION</a:t>
+              <a:t>10 · SECTION　🔧</a:t>
             </a:r>
           </a:p>
         </p:txBody>
@@ -3615,21 +3678,69 @@
                 </a:solidFill>
                 <a:latin typeface="Arial"/>
               </a:rPr>
-              <a:t>附錄：本月參考來源</a:t>
-            </a:r>
-          </a:p>
-        </p:txBody>
-      </p:sp>
-      <p:sp>
-        <p:nvSpPr>
-          <p:cNvPr id="4" name="TextBox 3"/>
-          <p:cNvSpPr txBox="1"/>
-          <p:nvPr/>
-        </p:nvSpPr>
-        <p:spPr>
-          <a:xfrm>
-            <a:off x="548640" y="2194560"/>
-            <a:ext cx="10515600" cy="548640"/>
+              <a:t>五、供應鏈觀察</a:t>
+            </a:r>
+          </a:p>
+        </p:txBody>
+      </p:sp>
+      <p:sp>
+        <p:nvSpPr>
+          <p:cNvPr id="4" name="Rounded Rectangle 3"/>
+          <p:cNvSpPr/>
+          <p:nvPr/>
+        </p:nvSpPr>
+        <p:spPr>
+          <a:xfrm>
+            <a:off x="548640" y="1600200"/>
+            <a:ext cx="3545738" cy="2263140"/>
+          </a:xfrm>
+          <a:prstGeom prst="roundRect">
+            <a:avLst>
+              <a:gd name="adj" fmla="val 6000"/>
+            </a:avLst>
+          </a:prstGeom>
+          <a:solidFill>
+            <a:srgbClr val="23262F"/>
+          </a:solidFill>
+          <a:ln w="12700">
+            <a:solidFill>
+              <a:srgbClr val="4C7EFF"/>
+            </a:solidFill>
+          </a:ln>
+          <a:effectLst/>
+        </p:spPr>
+        <p:style>
+          <a:lnRef idx="1">
+            <a:schemeClr val="accent1"/>
+          </a:lnRef>
+          <a:fillRef idx="3">
+            <a:schemeClr val="accent1"/>
+          </a:fillRef>
+          <a:effectRef idx="2">
+            <a:schemeClr val="accent1"/>
+          </a:effectRef>
+          <a:fontRef idx="minor">
+            <a:schemeClr val="lt1"/>
+          </a:fontRef>
+        </p:style>
+        <p:txBody>
+          <a:bodyPr rtlCol="0" anchor="ctr"/>
+          <a:lstStyle/>
+          <a:p>
+            <a:pPr algn="ctr"/>
+          </a:p>
+        </p:txBody>
+      </p:sp>
+      <p:sp>
+        <p:nvSpPr>
+          <p:cNvPr id="5" name="TextBox 4"/>
+          <p:cNvSpPr txBox="1"/>
+          <p:nvPr/>
+        </p:nvSpPr>
+        <p:spPr>
+          <a:xfrm>
+            <a:off x="749808" y="1764792"/>
+            <a:ext cx="3143402" cy="457200"/>
           </a:xfrm>
           <a:prstGeom prst="rect">
             <a:avLst/>
@@ -3644,27 +3755,114 @@
           <a:p>
             <a:pPr algn="l"/>
             <a:r>
-              <a:rPr sz="2000" b="1">
+              <a:rPr sz="1600" b="1">
+                <a:solidFill>
+                  <a:srgbClr val="4C7EFF"/>
+                </a:solidFill>
+                <a:latin typeface="Arial"/>
+              </a:rPr>
+              <a:t>索尼與台積電合作案（TSMC / Sony）</a:t>
+            </a:r>
+          </a:p>
+        </p:txBody>
+      </p:sp>
+      <p:sp>
+        <p:nvSpPr>
+          <p:cNvPr id="6" name="TextBox 5"/>
+          <p:cNvSpPr txBox="1"/>
+          <p:nvPr/>
+        </p:nvSpPr>
+        <p:spPr>
+          <a:xfrm>
+            <a:off x="749808" y="2258568"/>
+            <a:ext cx="3143402" cy="1440180"/>
+          </a:xfrm>
+          <a:prstGeom prst="rect">
+            <a:avLst/>
+          </a:prstGeom>
+          <a:noFill/>
+        </p:spPr>
+        <p:txBody>
+          <a:bodyPr wrap="square">
+            <a:normAutofit/>
+          </a:bodyPr>
+          <a:lstStyle/>
+          <a:p>
+            <a:pPr>
+              <a:lnSpc>
+                <a:spcPct val="120000"/>
+              </a:lnSpc>
+            </a:pPr>
+            <a:r>
+              <a:rPr sz="1300">
                 <a:solidFill>
                   <a:srgbClr val="F5F3EC"/>
                 </a:solidFill>
                 <a:latin typeface="Arial"/>
               </a:rPr>
-              <a:t>共 161 項</a:t>
-            </a:r>
-          </a:p>
-        </p:txBody>
-      </p:sp>
-      <p:sp>
-        <p:nvSpPr>
-          <p:cNvPr id="5" name="TextBox 4"/>
-          <p:cNvSpPr txBox="1"/>
-          <p:nvPr/>
-        </p:nvSpPr>
-        <p:spPr>
-          <a:xfrm>
-            <a:off x="548640" y="2834640"/>
-            <a:ext cx="10515600" cy="731520"/>
+              <a:t>台積電董事會拍板認購 282 億日圓股份，雙方計畫投資約 63 億美元於日本熊本成立影像感測器合資公司，主要由蘋果龐大需求帶動（DigiTimes）。</a:t>
+            </a:r>
+          </a:p>
+        </p:txBody>
+      </p:sp>
+      <p:sp>
+        <p:nvSpPr>
+          <p:cNvPr id="7" name="Rounded Rectangle 6"/>
+          <p:cNvSpPr/>
+          <p:nvPr/>
+        </p:nvSpPr>
+        <p:spPr>
+          <a:xfrm>
+            <a:off x="4322978" y="1600200"/>
+            <a:ext cx="3545738" cy="2263140"/>
+          </a:xfrm>
+          <a:prstGeom prst="roundRect">
+            <a:avLst>
+              <a:gd name="adj" fmla="val 6000"/>
+            </a:avLst>
+          </a:prstGeom>
+          <a:solidFill>
+            <a:srgbClr val="23262F"/>
+          </a:solidFill>
+          <a:ln w="12700">
+            <a:solidFill>
+              <a:srgbClr val="FFB454"/>
+            </a:solidFill>
+          </a:ln>
+          <a:effectLst/>
+        </p:spPr>
+        <p:style>
+          <a:lnRef idx="1">
+            <a:schemeClr val="accent1"/>
+          </a:lnRef>
+          <a:fillRef idx="3">
+            <a:schemeClr val="accent1"/>
+          </a:fillRef>
+          <a:effectRef idx="2">
+            <a:schemeClr val="accent1"/>
+          </a:effectRef>
+          <a:fontRef idx="minor">
+            <a:schemeClr val="lt1"/>
+          </a:fontRef>
+        </p:style>
+        <p:txBody>
+          <a:bodyPr rtlCol="0" anchor="ctr"/>
+          <a:lstStyle/>
+          <a:p>
+            <a:pPr algn="ctr"/>
+          </a:p>
+        </p:txBody>
+      </p:sp>
+      <p:sp>
+        <p:nvSpPr>
+          <p:cNvPr id="8" name="TextBox 7"/>
+          <p:cNvSpPr txBox="1"/>
+          <p:nvPr/>
+        </p:nvSpPr>
+        <p:spPr>
+          <a:xfrm>
+            <a:off x="4524146" y="1764792"/>
+            <a:ext cx="3143402" cy="457200"/>
           </a:xfrm>
           <a:prstGeom prst="rect">
             <a:avLst/>
@@ -3679,20 +3877,390 @@
           <a:p>
             <a:pPr algn="l"/>
             <a:r>
-              <a:rPr sz="1400" b="0">
-                <a:solidFill>
-                  <a:srgbClr val="9096A1"/>
-                </a:solidFill>
-                <a:latin typeface="Arial"/>
-              </a:rPr>
-              <a:t>完整清單與連結請見網站上的文字版報告</a:t>
-            </a:r>
-          </a:p>
-        </p:txBody>
-      </p:sp>
-      <p:sp>
-        <p:nvSpPr>
-          <p:cNvPr id="6" name="TextBox 5"/>
+              <a:rPr sz="1600" b="1">
+                <a:solidFill>
+                  <a:srgbClr val="FFB454"/>
+                </a:solidFill>
+                <a:latin typeface="Arial"/>
+              </a:rPr>
+              <a:t>光電核心元件投資（唯捷光電）</a:t>
+            </a:r>
+          </a:p>
+        </p:txBody>
+      </p:sp>
+      <p:sp>
+        <p:nvSpPr>
+          <p:cNvPr id="9" name="TextBox 8"/>
+          <p:cNvSpPr txBox="1"/>
+          <p:nvPr/>
+        </p:nvSpPr>
+        <p:spPr>
+          <a:xfrm>
+            <a:off x="4524146" y="2258568"/>
+            <a:ext cx="3143402" cy="1440180"/>
+          </a:xfrm>
+          <a:prstGeom prst="rect">
+            <a:avLst/>
+          </a:prstGeom>
+          <a:noFill/>
+        </p:spPr>
+        <p:txBody>
+          <a:bodyPr wrap="square">
+            <a:normAutofit/>
+          </a:bodyPr>
+          <a:lstStyle/>
+          <a:p>
+            <a:pPr>
+              <a:lnSpc>
+                <a:spcPct val="120000"/>
+              </a:lnSpc>
+            </a:pPr>
+            <a:r>
+              <a:rPr sz="1300">
+                <a:solidFill>
+                  <a:srgbClr val="F5F3EC"/>
+                </a:solidFill>
+                <a:latin typeface="Arial"/>
+              </a:rPr>
+              <a:t>投資 7.41 億美元於常州建立生產基地，業務從 VCSEL 拓展至高階磷化銦（InP）雷射晶片，鎖定 AI 光互連市場（DigiTimes）。</a:t>
+            </a:r>
+          </a:p>
+        </p:txBody>
+      </p:sp>
+      <p:sp>
+        <p:nvSpPr>
+          <p:cNvPr id="10" name="Rounded Rectangle 9"/>
+          <p:cNvSpPr/>
+          <p:nvPr/>
+        </p:nvSpPr>
+        <p:spPr>
+          <a:xfrm>
+            <a:off x="8097316" y="1600200"/>
+            <a:ext cx="3545738" cy="2263140"/>
+          </a:xfrm>
+          <a:prstGeom prst="roundRect">
+            <a:avLst>
+              <a:gd name="adj" fmla="val 6000"/>
+            </a:avLst>
+          </a:prstGeom>
+          <a:solidFill>
+            <a:srgbClr val="23262F"/>
+          </a:solidFill>
+          <a:ln w="12700">
+            <a:solidFill>
+              <a:srgbClr val="8B7FD6"/>
+            </a:solidFill>
+          </a:ln>
+          <a:effectLst/>
+        </p:spPr>
+        <p:style>
+          <a:lnRef idx="1">
+            <a:schemeClr val="accent1"/>
+          </a:lnRef>
+          <a:fillRef idx="3">
+            <a:schemeClr val="accent1"/>
+          </a:fillRef>
+          <a:effectRef idx="2">
+            <a:schemeClr val="accent1"/>
+          </a:effectRef>
+          <a:fontRef idx="minor">
+            <a:schemeClr val="lt1"/>
+          </a:fontRef>
+        </p:style>
+        <p:txBody>
+          <a:bodyPr rtlCol="0" anchor="ctr"/>
+          <a:lstStyle/>
+          <a:p>
+            <a:pPr algn="ctr"/>
+          </a:p>
+        </p:txBody>
+      </p:sp>
+      <p:sp>
+        <p:nvSpPr>
+          <p:cNvPr id="11" name="TextBox 10"/>
+          <p:cNvSpPr txBox="1"/>
+          <p:nvPr/>
+        </p:nvSpPr>
+        <p:spPr>
+          <a:xfrm>
+            <a:off x="8298484" y="1801368"/>
+            <a:ext cx="3143402" cy="1897380"/>
+          </a:xfrm>
+          <a:prstGeom prst="rect">
+            <a:avLst/>
+          </a:prstGeom>
+          <a:noFill/>
+        </p:spPr>
+        <p:txBody>
+          <a:bodyPr wrap="square">
+            <a:normAutofit/>
+          </a:bodyPr>
+          <a:lstStyle/>
+          <a:p>
+            <a:pPr>
+              <a:lnSpc>
+                <a:spcPct val="120000"/>
+              </a:lnSpc>
+            </a:pPr>
+            <a:r>
+              <a:rPr sz="1300">
+                <a:solidFill>
+                  <a:srgbClr val="F5F3EC"/>
+                </a:solidFill>
+                <a:latin typeface="Arial"/>
+              </a:rPr>
+              <a:t>AI資料中心雷射模組（環鴻科技 / EugenLight）：推出超高功率外部雷射光源可插拔模組（ELSFP），針對次世代 AI 運算叢集的高速光互連需求，預計 2027 年第一季量產（DigiTimes）。</a:t>
+            </a:r>
+          </a:p>
+        </p:txBody>
+      </p:sp>
+      <p:sp>
+        <p:nvSpPr>
+          <p:cNvPr id="12" name="Rounded Rectangle 11"/>
+          <p:cNvSpPr/>
+          <p:nvPr/>
+        </p:nvSpPr>
+        <p:spPr>
+          <a:xfrm>
+            <a:off x="548640" y="4091939"/>
+            <a:ext cx="3545738" cy="2263140"/>
+          </a:xfrm>
+          <a:prstGeom prst="roundRect">
+            <a:avLst>
+              <a:gd name="adj" fmla="val 6000"/>
+            </a:avLst>
+          </a:prstGeom>
+          <a:solidFill>
+            <a:srgbClr val="23262F"/>
+          </a:solidFill>
+          <a:ln w="12700">
+            <a:solidFill>
+              <a:srgbClr val="6FCF97"/>
+            </a:solidFill>
+          </a:ln>
+          <a:effectLst/>
+        </p:spPr>
+        <p:style>
+          <a:lnRef idx="1">
+            <a:schemeClr val="accent1"/>
+          </a:lnRef>
+          <a:fillRef idx="3">
+            <a:schemeClr val="accent1"/>
+          </a:fillRef>
+          <a:effectRef idx="2">
+            <a:schemeClr val="accent1"/>
+          </a:effectRef>
+          <a:fontRef idx="minor">
+            <a:schemeClr val="lt1"/>
+          </a:fontRef>
+        </p:style>
+        <p:txBody>
+          <a:bodyPr rtlCol="0" anchor="ctr"/>
+          <a:lstStyle/>
+          <a:p>
+            <a:pPr algn="ctr"/>
+          </a:p>
+        </p:txBody>
+      </p:sp>
+      <p:sp>
+        <p:nvSpPr>
+          <p:cNvPr id="13" name="TextBox 12"/>
+          <p:cNvSpPr txBox="1"/>
+          <p:nvPr/>
+        </p:nvSpPr>
+        <p:spPr>
+          <a:xfrm>
+            <a:off x="749808" y="4256531"/>
+            <a:ext cx="3143402" cy="457200"/>
+          </a:xfrm>
+          <a:prstGeom prst="rect">
+            <a:avLst/>
+          </a:prstGeom>
+          <a:noFill/>
+        </p:spPr>
+        <p:txBody>
+          <a:bodyPr wrap="square" anchor="t">
+            <a:spAutoFit/>
+          </a:bodyPr>
+          <a:lstStyle/>
+          <a:p>
+            <a:pPr algn="l"/>
+            <a:r>
+              <a:rPr sz="1600" b="1">
+                <a:solidFill>
+                  <a:srgbClr val="6FCF97"/>
+                </a:solidFill>
+                <a:latin typeface="Arial"/>
+              </a:rPr>
+              <a:t>光學鏡頭與產業投資（聯合光電）</a:t>
+            </a:r>
+          </a:p>
+        </p:txBody>
+      </p:sp>
+      <p:sp>
+        <p:nvSpPr>
+          <p:cNvPr id="14" name="TextBox 13"/>
+          <p:cNvSpPr txBox="1"/>
+          <p:nvPr/>
+        </p:nvSpPr>
+        <p:spPr>
+          <a:xfrm>
+            <a:off x="749808" y="4750307"/>
+            <a:ext cx="3143402" cy="1440180"/>
+          </a:xfrm>
+          <a:prstGeom prst="rect">
+            <a:avLst/>
+          </a:prstGeom>
+          <a:noFill/>
+        </p:spPr>
+        <p:txBody>
+          <a:bodyPr wrap="square">
+            <a:normAutofit/>
+          </a:bodyPr>
+          <a:lstStyle/>
+          <a:p>
+            <a:pPr>
+              <a:lnSpc>
+                <a:spcPct val="120000"/>
+              </a:lnSpc>
+            </a:pPr>
+            <a:r>
+              <a:rPr sz="1300">
+                <a:solidFill>
+                  <a:srgbClr val="F5F3EC"/>
+                </a:solidFill>
+                <a:latin typeface="Arial"/>
+              </a:rPr>
+              <a:t>2026 上半年實現扭虧為盈，完成超短焦及短焦新光機設計，並取得火樂科技（堅果）約 13.62% 股權以深耕智慧顯示布局（投影時代）。</a:t>
+            </a:r>
+          </a:p>
+        </p:txBody>
+      </p:sp>
+      <p:sp>
+        <p:nvSpPr>
+          <p:cNvPr id="15" name="Rounded Rectangle 14"/>
+          <p:cNvSpPr/>
+          <p:nvPr/>
+        </p:nvSpPr>
+        <p:spPr>
+          <a:xfrm>
+            <a:off x="4322978" y="4091939"/>
+            <a:ext cx="3545738" cy="2263140"/>
+          </a:xfrm>
+          <a:prstGeom prst="roundRect">
+            <a:avLst>
+              <a:gd name="adj" fmla="val 6000"/>
+            </a:avLst>
+          </a:prstGeom>
+          <a:solidFill>
+            <a:srgbClr val="23262F"/>
+          </a:solidFill>
+          <a:ln w="12700">
+            <a:solidFill>
+              <a:srgbClr val="4C7EFF"/>
+            </a:solidFill>
+          </a:ln>
+          <a:effectLst/>
+        </p:spPr>
+        <p:style>
+          <a:lnRef idx="1">
+            <a:schemeClr val="accent1"/>
+          </a:lnRef>
+          <a:fillRef idx="3">
+            <a:schemeClr val="accent1"/>
+          </a:fillRef>
+          <a:effectRef idx="2">
+            <a:schemeClr val="accent1"/>
+          </a:effectRef>
+          <a:fontRef idx="minor">
+            <a:schemeClr val="lt1"/>
+          </a:fontRef>
+        </p:style>
+        <p:txBody>
+          <a:bodyPr rtlCol="0" anchor="ctr"/>
+          <a:lstStyle/>
+          <a:p>
+            <a:pPr algn="ctr"/>
+          </a:p>
+        </p:txBody>
+      </p:sp>
+      <p:sp>
+        <p:nvSpPr>
+          <p:cNvPr id="16" name="TextBox 15"/>
+          <p:cNvSpPr txBox="1"/>
+          <p:nvPr/>
+        </p:nvSpPr>
+        <p:spPr>
+          <a:xfrm>
+            <a:off x="4524146" y="4256531"/>
+            <a:ext cx="3143402" cy="457200"/>
+          </a:xfrm>
+          <a:prstGeom prst="rect">
+            <a:avLst/>
+          </a:prstGeom>
+          <a:noFill/>
+        </p:spPr>
+        <p:txBody>
+          <a:bodyPr wrap="square" anchor="t">
+            <a:spAutoFit/>
+          </a:bodyPr>
+          <a:lstStyle/>
+          <a:p>
+            <a:pPr algn="l"/>
+            <a:r>
+              <a:rPr sz="1600" b="1">
+                <a:solidFill>
+                  <a:srgbClr val="4C7EFF"/>
+                </a:solidFill>
+                <a:latin typeface="Arial"/>
+              </a:rPr>
+              <a:t>智慧家庭生態合作（中國移動 / 當貝）</a:t>
+            </a:r>
+          </a:p>
+        </p:txBody>
+      </p:sp>
+      <p:sp>
+        <p:nvSpPr>
+          <p:cNvPr id="17" name="TextBox 16"/>
+          <p:cNvSpPr txBox="1"/>
+          <p:nvPr/>
+        </p:nvSpPr>
+        <p:spPr>
+          <a:xfrm>
+            <a:off x="4524146" y="4750307"/>
+            <a:ext cx="3143402" cy="1440180"/>
+          </a:xfrm>
+          <a:prstGeom prst="rect">
+            <a:avLst/>
+          </a:prstGeom>
+          <a:noFill/>
+        </p:spPr>
+        <p:txBody>
+          <a:bodyPr wrap="square">
+            <a:normAutofit/>
+          </a:bodyPr>
+          <a:lstStyle/>
+          <a:p>
+            <a:pPr>
+              <a:lnSpc>
+                <a:spcPct val="120000"/>
+              </a:lnSpc>
+            </a:pPr>
+            <a:r>
+              <a:rPr sz="1300">
+                <a:solidFill>
+                  <a:srgbClr val="F5F3EC"/>
+                </a:solidFill>
+                <a:latin typeface="Arial"/>
+              </a:rPr>
+              <a:t>雙方達成戰略合作，結合 5G 超高清、AI 與物聯網技術，共同推動智慧家庭大屏生態（ZNDS投影頻道）。</a:t>
+            </a:r>
+          </a:p>
+        </p:txBody>
+      </p:sp>
+      <p:sp>
+        <p:nvSpPr>
+          <p:cNvPr id="18" name="TextBox 17"/>
           <p:cNvSpPr txBox="1"/>
           <p:nvPr/>
         </p:nvSpPr>
@@ -3753,25 +4321,97 @@
       <p:grpSpPr/>
       <p:sp>
         <p:nvSpPr>
-          <p:cNvPr id="2" name="Oval 1"/>
+          <p:cNvPr id="2" name="TextBox 1"/>
+          <p:cNvSpPr txBox="1"/>
+          <p:nvPr/>
+        </p:nvSpPr>
+        <p:spPr>
+          <a:xfrm>
+            <a:off x="548640" y="384048"/>
+            <a:ext cx="7315200" cy="320040"/>
+          </a:xfrm>
+          <a:prstGeom prst="rect">
+            <a:avLst/>
+          </a:prstGeom>
+          <a:noFill/>
+        </p:spPr>
+        <p:txBody>
+          <a:bodyPr wrap="square" anchor="t">
+            <a:spAutoFit/>
+          </a:bodyPr>
+          <a:lstStyle/>
+          <a:p>
+            <a:pPr algn="l"/>
+            <a:r>
+              <a:rPr sz="1100" b="1">
+                <a:solidFill>
+                  <a:srgbClr val="FFB454"/>
+                </a:solidFill>
+                <a:latin typeface="Arial"/>
+              </a:rPr>
+              <a:t>11 · SECTION　✨</a:t>
+            </a:r>
+          </a:p>
+        </p:txBody>
+      </p:sp>
+      <p:sp>
+        <p:nvSpPr>
+          <p:cNvPr id="3" name="TextBox 2"/>
+          <p:cNvSpPr txBox="1"/>
+          <p:nvPr/>
+        </p:nvSpPr>
+        <p:spPr>
+          <a:xfrm>
+            <a:off x="548640" y="713232"/>
+            <a:ext cx="10972800" cy="685800"/>
+          </a:xfrm>
+          <a:prstGeom prst="rect">
+            <a:avLst/>
+          </a:prstGeom>
+          <a:noFill/>
+        </p:spPr>
+        <p:txBody>
+          <a:bodyPr wrap="square" anchor="t">
+            <a:spAutoFit/>
+          </a:bodyPr>
+          <a:lstStyle/>
+          <a:p>
+            <a:pPr algn="l"/>
+            <a:r>
+              <a:rPr sz="2600" b="1">
+                <a:solidFill>
+                  <a:srgbClr val="F5F3EC"/>
+                </a:solidFill>
+                <a:latin typeface="Arial"/>
+              </a:rPr>
+              <a:t>六、本月關注品牌／技術關鍵字</a:t>
+            </a:r>
+          </a:p>
+        </p:txBody>
+      </p:sp>
+      <p:sp>
+        <p:nvSpPr>
+          <p:cNvPr id="4" name="Rounded Rectangle 3"/>
           <p:cNvSpPr/>
           <p:nvPr/>
         </p:nvSpPr>
         <p:spPr>
           <a:xfrm>
-            <a:off x="8961120" y="3200400"/>
-            <a:ext cx="5486400" cy="5486400"/>
-          </a:xfrm>
-          <a:prstGeom prst="ellipse">
-            <a:avLst/>
+            <a:off x="548640" y="1600200"/>
+            <a:ext cx="5432907" cy="4754880"/>
+          </a:xfrm>
+          <a:prstGeom prst="roundRect">
+            <a:avLst>
+              <a:gd name="adj" fmla="val 6000"/>
+            </a:avLst>
           </a:prstGeom>
           <a:solidFill>
-            <a:srgbClr val="4C7EFF">
-              <a:alpha val="10000"/>
-            </a:srgbClr>
+            <a:srgbClr val="23262F"/>
           </a:solidFill>
-          <a:ln>
-            <a:noFill/>
+          <a:ln w="12700">
+            <a:solidFill>
+              <a:srgbClr val="4C7EFF"/>
+            </a:solidFill>
           </a:ln>
           <a:effectLst/>
         </p:spPr>
@@ -3799,6 +4439,510 @@
       </p:sp>
       <p:sp>
         <p:nvSpPr>
+          <p:cNvPr id="5" name="TextBox 4"/>
+          <p:cNvSpPr txBox="1"/>
+          <p:nvPr/>
+        </p:nvSpPr>
+        <p:spPr>
+          <a:xfrm>
+            <a:off x="749808" y="1764792"/>
+            <a:ext cx="5030571" cy="457200"/>
+          </a:xfrm>
+          <a:prstGeom prst="rect">
+            <a:avLst/>
+          </a:prstGeom>
+          <a:noFill/>
+        </p:spPr>
+        <p:txBody>
+          <a:bodyPr wrap="square" anchor="t">
+            <a:spAutoFit/>
+          </a:bodyPr>
+          <a:lstStyle/>
+          <a:p>
+            <a:pPr algn="l"/>
+            <a:r>
+              <a:rPr sz="2000" b="1">
+                <a:solidFill>
+                  <a:srgbClr val="4C7EFF"/>
+                </a:solidFill>
+                <a:latin typeface="Arial"/>
+              </a:rPr>
+              <a:t>重點品牌</a:t>
+            </a:r>
+          </a:p>
+        </p:txBody>
+      </p:sp>
+      <p:sp>
+        <p:nvSpPr>
+          <p:cNvPr id="6" name="TextBox 5"/>
+          <p:cNvSpPr txBox="1"/>
+          <p:nvPr/>
+        </p:nvSpPr>
+        <p:spPr>
+          <a:xfrm>
+            <a:off x="749808" y="2258568"/>
+            <a:ext cx="5030571" cy="3931920"/>
+          </a:xfrm>
+          <a:prstGeom prst="rect">
+            <a:avLst/>
+          </a:prstGeom>
+          <a:noFill/>
+        </p:spPr>
+        <p:txBody>
+          <a:bodyPr wrap="square">
+            <a:normAutofit/>
+          </a:bodyPr>
+          <a:lstStyle/>
+          <a:p>
+            <a:pPr>
+              <a:lnSpc>
+                <a:spcPct val="120000"/>
+              </a:lnSpc>
+            </a:pPr>
+            <a:r>
+              <a:rPr sz="1550">
+                <a:solidFill>
+                  <a:srgbClr val="F5F3EC"/>
+                </a:solidFill>
+                <a:latin typeface="Arial"/>
+              </a:rPr>
+              <a:t>巴可 (Barco)、極米 (XGIMI)、當貝 (Dangbei)、明基 (BenQ)、愛普生 (Epson)、索尼 (Sony)、台積電 (TSMC)、Nebula (Anker)、海信 (Hisense)、JVC</a:t>
+            </a:r>
+          </a:p>
+        </p:txBody>
+      </p:sp>
+      <p:sp>
+        <p:nvSpPr>
+          <p:cNvPr id="7" name="Rounded Rectangle 6"/>
+          <p:cNvSpPr/>
+          <p:nvPr/>
+        </p:nvSpPr>
+        <p:spPr>
+          <a:xfrm>
+            <a:off x="6210147" y="1600200"/>
+            <a:ext cx="5432907" cy="4754880"/>
+          </a:xfrm>
+          <a:prstGeom prst="roundRect">
+            <a:avLst>
+              <a:gd name="adj" fmla="val 6000"/>
+            </a:avLst>
+          </a:prstGeom>
+          <a:solidFill>
+            <a:srgbClr val="23262F"/>
+          </a:solidFill>
+          <a:ln w="12700">
+            <a:solidFill>
+              <a:srgbClr val="FFB454"/>
+            </a:solidFill>
+          </a:ln>
+          <a:effectLst/>
+        </p:spPr>
+        <p:style>
+          <a:lnRef idx="1">
+            <a:schemeClr val="accent1"/>
+          </a:lnRef>
+          <a:fillRef idx="3">
+            <a:schemeClr val="accent1"/>
+          </a:fillRef>
+          <a:effectRef idx="2">
+            <a:schemeClr val="accent1"/>
+          </a:effectRef>
+          <a:fontRef idx="minor">
+            <a:schemeClr val="lt1"/>
+          </a:fontRef>
+        </p:style>
+        <p:txBody>
+          <a:bodyPr rtlCol="0" anchor="ctr"/>
+          <a:lstStyle/>
+          <a:p>
+            <a:pPr algn="ctr"/>
+          </a:p>
+        </p:txBody>
+      </p:sp>
+      <p:sp>
+        <p:nvSpPr>
+          <p:cNvPr id="8" name="TextBox 7"/>
+          <p:cNvSpPr txBox="1"/>
+          <p:nvPr/>
+        </p:nvSpPr>
+        <p:spPr>
+          <a:xfrm>
+            <a:off x="6411315" y="1764792"/>
+            <a:ext cx="5030571" cy="457200"/>
+          </a:xfrm>
+          <a:prstGeom prst="rect">
+            <a:avLst/>
+          </a:prstGeom>
+          <a:noFill/>
+        </p:spPr>
+        <p:txBody>
+          <a:bodyPr wrap="square" anchor="t">
+            <a:spAutoFit/>
+          </a:bodyPr>
+          <a:lstStyle/>
+          <a:p>
+            <a:pPr algn="l"/>
+            <a:r>
+              <a:rPr sz="2000" b="1">
+                <a:solidFill>
+                  <a:srgbClr val="FFB454"/>
+                </a:solidFill>
+                <a:latin typeface="Arial"/>
+              </a:rPr>
+              <a:t>核心技術與趨勢</a:t>
+            </a:r>
+          </a:p>
+        </p:txBody>
+      </p:sp>
+      <p:sp>
+        <p:nvSpPr>
+          <p:cNvPr id="9" name="TextBox 8"/>
+          <p:cNvSpPr txBox="1"/>
+          <p:nvPr/>
+        </p:nvSpPr>
+        <p:spPr>
+          <a:xfrm>
+            <a:off x="6411315" y="2258568"/>
+            <a:ext cx="5030571" cy="3931920"/>
+          </a:xfrm>
+          <a:prstGeom prst="rect">
+            <a:avLst/>
+          </a:prstGeom>
+          <a:noFill/>
+        </p:spPr>
+        <p:txBody>
+          <a:bodyPr wrap="square">
+            <a:normAutofit/>
+          </a:bodyPr>
+          <a:lstStyle/>
+          <a:p>
+            <a:pPr>
+              <a:lnSpc>
+                <a:spcPct val="120000"/>
+              </a:lnSpc>
+            </a:pPr>
+            <a:r>
+              <a:rPr sz="1550">
+                <a:solidFill>
+                  <a:srgbClr val="F5F3EC"/>
+                </a:solidFill>
+                <a:latin typeface="Arial"/>
+              </a:rPr>
+              <a:t>三色雷射 (Tri-Chroma Laser)、RGB純雷射、4K/8K 3DLP、一體式雲台、AI光互連/磷化銦(InP)晶片、ELSFP雷射模組、海外市場轉型 (Outbound Expansion)</a:t>
+            </a:r>
+          </a:p>
+        </p:txBody>
+      </p:sp>
+      <p:sp>
+        <p:nvSpPr>
+          <p:cNvPr id="10" name="TextBox 9"/>
+          <p:cNvSpPr txBox="1"/>
+          <p:nvPr/>
+        </p:nvSpPr>
+        <p:spPr>
+          <a:xfrm>
+            <a:off x="11430000" y="6446520"/>
+            <a:ext cx="548640" cy="274320"/>
+          </a:xfrm>
+          <a:prstGeom prst="rect">
+            <a:avLst/>
+          </a:prstGeom>
+          <a:noFill/>
+        </p:spPr>
+        <p:txBody>
+          <a:bodyPr wrap="square" anchor="t">
+            <a:spAutoFit/>
+          </a:bodyPr>
+          <a:lstStyle/>
+          <a:p>
+            <a:pPr algn="r"/>
+            <a:r>
+              <a:rPr sz="1000" b="0">
+                <a:solidFill>
+                  <a:srgbClr val="9096A1"/>
+                </a:solidFill>
+                <a:latin typeface="Arial"/>
+              </a:rPr>
+              <a:t>11</a:t>
+            </a:r>
+          </a:p>
+        </p:txBody>
+      </p:sp>
+    </p:spTree>
+  </p:cSld>
+  <p:clrMapOvr>
+    <a:masterClrMapping/>
+  </p:clrMapOvr>
+</p:sld>
+</file>
+
+<file path=ppt/slides/slide12.xml><?xml version="1.0" encoding="utf-8"?>
+<p:sld xmlns:a="http://schemas.openxmlformats.org/drawingml/2006/main" xmlns:p="http://schemas.openxmlformats.org/presentationml/2006/main" xmlns:r="http://schemas.openxmlformats.org/officeDocument/2006/relationships">
+  <p:cSld>
+    <p:bg>
+      <p:bgPr>
+        <a:solidFill>
+          <a:srgbClr val="14161A"/>
+        </a:solidFill>
+        <a:effectLst/>
+      </p:bgPr>
+    </p:bg>
+    <p:spTree>
+      <p:nvGrpSpPr>
+        <p:cNvPr id="1" name=""/>
+        <p:cNvGrpSpPr/>
+        <p:nvPr/>
+      </p:nvGrpSpPr>
+      <p:grpSpPr/>
+      <p:sp>
+        <p:nvSpPr>
+          <p:cNvPr id="2" name="TextBox 1"/>
+          <p:cNvSpPr txBox="1"/>
+          <p:nvPr/>
+        </p:nvSpPr>
+        <p:spPr>
+          <a:xfrm>
+            <a:off x="548640" y="384048"/>
+            <a:ext cx="7315200" cy="320040"/>
+          </a:xfrm>
+          <a:prstGeom prst="rect">
+            <a:avLst/>
+          </a:prstGeom>
+          <a:noFill/>
+        </p:spPr>
+        <p:txBody>
+          <a:bodyPr wrap="square" anchor="t">
+            <a:spAutoFit/>
+          </a:bodyPr>
+          <a:lstStyle/>
+          <a:p>
+            <a:pPr algn="l"/>
+            <a:r>
+              <a:rPr sz="1100" b="1">
+                <a:solidFill>
+                  <a:srgbClr val="FFB454"/>
+                </a:solidFill>
+                <a:latin typeface="Arial"/>
+              </a:rPr>
+              <a:t>12 · SECTION</a:t>
+            </a:r>
+          </a:p>
+        </p:txBody>
+      </p:sp>
+      <p:sp>
+        <p:nvSpPr>
+          <p:cNvPr id="3" name="TextBox 2"/>
+          <p:cNvSpPr txBox="1"/>
+          <p:nvPr/>
+        </p:nvSpPr>
+        <p:spPr>
+          <a:xfrm>
+            <a:off x="548640" y="713232"/>
+            <a:ext cx="10972800" cy="685800"/>
+          </a:xfrm>
+          <a:prstGeom prst="rect">
+            <a:avLst/>
+          </a:prstGeom>
+          <a:noFill/>
+        </p:spPr>
+        <p:txBody>
+          <a:bodyPr wrap="square" anchor="t">
+            <a:spAutoFit/>
+          </a:bodyPr>
+          <a:lstStyle/>
+          <a:p>
+            <a:pPr algn="l"/>
+            <a:r>
+              <a:rPr sz="2600" b="1">
+                <a:solidFill>
+                  <a:srgbClr val="F5F3EC"/>
+                </a:solidFill>
+                <a:latin typeface="Arial"/>
+              </a:rPr>
+              <a:t>附錄：本月參考來源</a:t>
+            </a:r>
+          </a:p>
+        </p:txBody>
+      </p:sp>
+      <p:sp>
+        <p:nvSpPr>
+          <p:cNvPr id="4" name="TextBox 3"/>
+          <p:cNvSpPr txBox="1"/>
+          <p:nvPr/>
+        </p:nvSpPr>
+        <p:spPr>
+          <a:xfrm>
+            <a:off x="548640" y="2194560"/>
+            <a:ext cx="10515600" cy="548640"/>
+          </a:xfrm>
+          <a:prstGeom prst="rect">
+            <a:avLst/>
+          </a:prstGeom>
+          <a:noFill/>
+        </p:spPr>
+        <p:txBody>
+          <a:bodyPr wrap="square" anchor="t">
+            <a:spAutoFit/>
+          </a:bodyPr>
+          <a:lstStyle/>
+          <a:p>
+            <a:pPr algn="l"/>
+            <a:r>
+              <a:rPr sz="2000" b="1">
+                <a:solidFill>
+                  <a:srgbClr val="F5F3EC"/>
+                </a:solidFill>
+                <a:latin typeface="Arial"/>
+              </a:rPr>
+              <a:t>共 161 項</a:t>
+            </a:r>
+          </a:p>
+        </p:txBody>
+      </p:sp>
+      <p:sp>
+        <p:nvSpPr>
+          <p:cNvPr id="5" name="TextBox 4"/>
+          <p:cNvSpPr txBox="1"/>
+          <p:nvPr/>
+        </p:nvSpPr>
+        <p:spPr>
+          <a:xfrm>
+            <a:off x="548640" y="2834640"/>
+            <a:ext cx="10515600" cy="731520"/>
+          </a:xfrm>
+          <a:prstGeom prst="rect">
+            <a:avLst/>
+          </a:prstGeom>
+          <a:noFill/>
+        </p:spPr>
+        <p:txBody>
+          <a:bodyPr wrap="square" anchor="t">
+            <a:spAutoFit/>
+          </a:bodyPr>
+          <a:lstStyle/>
+          <a:p>
+            <a:pPr algn="l"/>
+            <a:r>
+              <a:rPr sz="1400" b="0">
+                <a:solidFill>
+                  <a:srgbClr val="9096A1"/>
+                </a:solidFill>
+                <a:latin typeface="Arial"/>
+              </a:rPr>
+              <a:t>完整清單與連結請見網站上的文字版報告</a:t>
+            </a:r>
+          </a:p>
+        </p:txBody>
+      </p:sp>
+      <p:sp>
+        <p:nvSpPr>
+          <p:cNvPr id="6" name="TextBox 5"/>
+          <p:cNvSpPr txBox="1"/>
+          <p:nvPr/>
+        </p:nvSpPr>
+        <p:spPr>
+          <a:xfrm>
+            <a:off x="11430000" y="6446520"/>
+            <a:ext cx="548640" cy="274320"/>
+          </a:xfrm>
+          <a:prstGeom prst="rect">
+            <a:avLst/>
+          </a:prstGeom>
+          <a:noFill/>
+        </p:spPr>
+        <p:txBody>
+          <a:bodyPr wrap="square" anchor="t">
+            <a:spAutoFit/>
+          </a:bodyPr>
+          <a:lstStyle/>
+          <a:p>
+            <a:pPr algn="r"/>
+            <a:r>
+              <a:rPr sz="1000" b="0">
+                <a:solidFill>
+                  <a:srgbClr val="9096A1"/>
+                </a:solidFill>
+                <a:latin typeface="Arial"/>
+              </a:rPr>
+              <a:t>12</a:t>
+            </a:r>
+          </a:p>
+        </p:txBody>
+      </p:sp>
+    </p:spTree>
+  </p:cSld>
+  <p:clrMapOvr>
+    <a:masterClrMapping/>
+  </p:clrMapOvr>
+</p:sld>
+</file>
+
+<file path=ppt/slides/slide13.xml><?xml version="1.0" encoding="utf-8"?>
+<p:sld xmlns:a="http://schemas.openxmlformats.org/drawingml/2006/main" xmlns:p="http://schemas.openxmlformats.org/presentationml/2006/main" xmlns:r="http://schemas.openxmlformats.org/officeDocument/2006/relationships">
+  <p:cSld>
+    <p:bg>
+      <p:bgPr>
+        <a:solidFill>
+          <a:srgbClr val="14161A"/>
+        </a:solidFill>
+        <a:effectLst/>
+      </p:bgPr>
+    </p:bg>
+    <p:spTree>
+      <p:nvGrpSpPr>
+        <p:cNvPr id="1" name=""/>
+        <p:cNvGrpSpPr/>
+        <p:nvPr/>
+      </p:nvGrpSpPr>
+      <p:grpSpPr/>
+      <p:sp>
+        <p:nvSpPr>
+          <p:cNvPr id="2" name="Oval 1"/>
+          <p:cNvSpPr/>
+          <p:nvPr/>
+        </p:nvSpPr>
+        <p:spPr>
+          <a:xfrm>
+            <a:off x="8961120" y="3200400"/>
+            <a:ext cx="5486400" cy="5486400"/>
+          </a:xfrm>
+          <a:prstGeom prst="ellipse">
+            <a:avLst/>
+          </a:prstGeom>
+          <a:solidFill>
+            <a:srgbClr val="4C7EFF">
+              <a:alpha val="10000"/>
+            </a:srgbClr>
+          </a:solidFill>
+          <a:ln>
+            <a:noFill/>
+          </a:ln>
+          <a:effectLst/>
+        </p:spPr>
+        <p:style>
+          <a:lnRef idx="1">
+            <a:schemeClr val="accent1"/>
+          </a:lnRef>
+          <a:fillRef idx="3">
+            <a:schemeClr val="accent1"/>
+          </a:fillRef>
+          <a:effectRef idx="2">
+            <a:schemeClr val="accent1"/>
+          </a:effectRef>
+          <a:fontRef idx="minor">
+            <a:schemeClr val="lt1"/>
+          </a:fontRef>
+        </p:style>
+        <p:txBody>
+          <a:bodyPr rtlCol="0" anchor="ctr"/>
+          <a:lstStyle/>
+          <a:p>
+            <a:pPr algn="ctr"/>
+          </a:p>
+        </p:txBody>
+      </p:sp>
+      <p:sp>
+        <p:nvSpPr>
           <p:cNvPr id="3" name="TextBox 2"/>
           <p:cNvSpPr txBox="1"/>
           <p:nvPr/>
@@ -3897,7 +5041,7 @@
                 </a:solidFill>
                 <a:latin typeface="Arial"/>
               </a:rPr>
-              <a:t>11</a:t>
+              <a:t>13</a:t>
             </a:r>
           </a:p>
         </p:txBody>
@@ -3936,8 +5080,8 @@
         </p:nvSpPr>
         <p:spPr>
           <a:xfrm>
-            <a:off x="548640" y="384048"/>
-            <a:ext cx="7315200" cy="320040"/>
+            <a:off x="731520" y="685800"/>
+            <a:ext cx="9144000" cy="365760"/>
           </a:xfrm>
           <a:prstGeom prst="rect">
             <a:avLst/>
@@ -3952,13 +5096,13 @@
           <a:p>
             <a:pPr algn="l"/>
             <a:r>
-              <a:rPr sz="1100" b="1">
+              <a:rPr sz="1600" b="1">
                 <a:solidFill>
                   <a:srgbClr val="FFB454"/>
                 </a:solidFill>
                 <a:latin typeface="Arial"/>
               </a:rPr>
-              <a:t>02 · SECTION　📝</a:t>
+              <a:t>本期報告總覽</a:t>
             </a:r>
           </a:p>
         </p:txBody>
@@ -3971,8 +5115,8 @@
         </p:nvSpPr>
         <p:spPr>
           <a:xfrm>
-            <a:off x="548640" y="713232"/>
-            <a:ext cx="10972800" cy="685800"/>
+            <a:off x="548640" y="2377440"/>
+            <a:ext cx="1944563" cy="1097280"/>
           </a:xfrm>
           <a:prstGeom prst="rect">
             <a:avLst/>
@@ -3985,60 +5129,51 @@
           </a:bodyPr>
           <a:lstStyle/>
           <a:p>
-            <a:pPr algn="l"/>
-            <a:r>
-              <a:rPr sz="2600" b="1">
+            <a:pPr algn="ctr"/>
+            <a:r>
+              <a:rPr sz="5400" b="1">
                 <a:solidFill>
                   <a:srgbClr val="F5F3EC"/>
                 </a:solidFill>
                 <a:latin typeface="Arial"/>
               </a:rPr>
-              <a:t>一、本月摘要</a:t>
-            </a:r>
-          </a:p>
-        </p:txBody>
-      </p:sp>
-      <p:sp>
-        <p:nvSpPr>
-          <p:cNvPr id="4" name="Oval 3"/>
-          <p:cNvSpPr/>
-          <p:nvPr/>
-        </p:nvSpPr>
-        <p:spPr>
-          <a:xfrm>
-            <a:off x="594360" y="1728216"/>
-            <a:ext cx="100584" cy="100584"/>
-          </a:xfrm>
-          <a:prstGeom prst="ellipse">
-            <a:avLst/>
-          </a:prstGeom>
-          <a:solidFill>
-            <a:srgbClr val="4C7EFF"/>
-          </a:solidFill>
-          <a:ln>
-            <a:noFill/>
-          </a:ln>
-          <a:effectLst/>
-        </p:spPr>
-        <p:style>
-          <a:lnRef idx="1">
-            <a:schemeClr val="accent1"/>
-          </a:lnRef>
-          <a:fillRef idx="3">
-            <a:schemeClr val="accent1"/>
-          </a:fillRef>
-          <a:effectRef idx="2">
-            <a:schemeClr val="accent1"/>
-          </a:effectRef>
-          <a:fontRef idx="minor">
-            <a:schemeClr val="lt1"/>
-          </a:fontRef>
-        </p:style>
-        <p:txBody>
-          <a:bodyPr rtlCol="0" anchor="ctr"/>
+              <a:t>6</a:t>
+            </a:r>
+          </a:p>
+        </p:txBody>
+      </p:sp>
+      <p:sp>
+        <p:nvSpPr>
+          <p:cNvPr id="4" name="TextBox 3"/>
+          <p:cNvSpPr txBox="1"/>
+          <p:nvPr/>
+        </p:nvSpPr>
+        <p:spPr>
+          <a:xfrm>
+            <a:off x="548640" y="3520440"/>
+            <a:ext cx="1944563" cy="457200"/>
+          </a:xfrm>
+          <a:prstGeom prst="rect">
+            <a:avLst/>
+          </a:prstGeom>
+          <a:noFill/>
+        </p:spPr>
+        <p:txBody>
+          <a:bodyPr wrap="square" anchor="t">
+            <a:spAutoFit/>
+          </a:bodyPr>
           <a:lstStyle/>
           <a:p>
             <a:pPr algn="ctr"/>
+            <a:r>
+              <a:rPr sz="1400" b="0">
+                <a:solidFill>
+                  <a:srgbClr val="9096A1"/>
+                </a:solidFill>
+                <a:latin typeface="Arial"/>
+              </a:rPr>
+              <a:t>涵蓋段落</a:t>
+            </a:r>
           </a:p>
         </p:txBody>
       </p:sp>
@@ -4050,33 +5185,29 @@
         </p:nvSpPr>
         <p:spPr>
           <a:xfrm>
-            <a:off x="868680" y="1600200"/>
-            <a:ext cx="10698480" cy="1591056"/>
-          </a:xfrm>
-          <a:prstGeom prst="rect">
-            <a:avLst/>
-          </a:prstGeom>
-          <a:noFill/>
-        </p:spPr>
-        <p:txBody>
-          <a:bodyPr wrap="square">
+            <a:off x="2767523" y="2377440"/>
+            <a:ext cx="1944563" cy="1097280"/>
+          </a:xfrm>
+          <a:prstGeom prst="rect">
+            <a:avLst/>
+          </a:prstGeom>
+          <a:noFill/>
+        </p:spPr>
+        <p:txBody>
+          <a:bodyPr wrap="square" anchor="t">
             <a:spAutoFit/>
           </a:bodyPr>
           <a:lstStyle/>
           <a:p>
-            <a:pPr>
-              <a:lnSpc>
-                <a:spcPct val="115000"/>
-              </a:lnSpc>
-            </a:pPr>
-            <a:r>
-              <a:rPr sz="1450">
+            <a:pPr algn="ctr"/>
+            <a:r>
+              <a:rPr sz="5400" b="1">
                 <a:solidFill>
                   <a:srgbClr val="F5F3EC"/>
                 </a:solidFill>
                 <a:latin typeface="Arial"/>
               </a:rPr>
-              <a:t>2026 年 8 月全球與中國投影機市場呈現「外熱內冷」的分化格局，中國國內市場受政策退潮與價格內卷影響上半年銷量大跌 26%，但海外市場在品牌出海推動下增長強勁，帶動極米海外營收年增達 87.63%（投影時代）。產品與技術層面，三色雷射與雲台設計迅速下沉至兩千元人民幣級入門市場與戶外機種，巴可則發表極致 3DLP RGB 純雷射旗艦震撼高端沉浸式文旅領域（IT之家、ZNDS投影頻道、投影時代）。此外，光學與投影供應鏈業者正加速轉型 AI 資料中心光學互連及車載光學領域，尋求第二成長曲線（DigiTimes、投影時代）。</a:t>
+              <a:t>21</a:t>
             </a:r>
           </a:p>
         </p:txBody>
@@ -4084,6 +5215,251 @@
       <p:sp>
         <p:nvSpPr>
           <p:cNvPr id="6" name="TextBox 5"/>
+          <p:cNvSpPr txBox="1"/>
+          <p:nvPr/>
+        </p:nvSpPr>
+        <p:spPr>
+          <a:xfrm>
+            <a:off x="2767523" y="3520440"/>
+            <a:ext cx="1944563" cy="457200"/>
+          </a:xfrm>
+          <a:prstGeom prst="rect">
+            <a:avLst/>
+          </a:prstGeom>
+          <a:noFill/>
+        </p:spPr>
+        <p:txBody>
+          <a:bodyPr wrap="square" anchor="t">
+            <a:spAutoFit/>
+          </a:bodyPr>
+          <a:lstStyle/>
+          <a:p>
+            <a:pPr algn="ctr"/>
+            <a:r>
+              <a:rPr sz="1400" b="0">
+                <a:solidFill>
+                  <a:srgbClr val="9096A1"/>
+                </a:solidFill>
+                <a:latin typeface="Arial"/>
+              </a:rPr>
+              <a:t>重點項目</a:t>
+            </a:r>
+          </a:p>
+        </p:txBody>
+      </p:sp>
+      <p:sp>
+        <p:nvSpPr>
+          <p:cNvPr id="7" name="TextBox 6"/>
+          <p:cNvSpPr txBox="1"/>
+          <p:nvPr/>
+        </p:nvSpPr>
+        <p:spPr>
+          <a:xfrm>
+            <a:off x="4986406" y="2377440"/>
+            <a:ext cx="1944563" cy="1097280"/>
+          </a:xfrm>
+          <a:prstGeom prst="rect">
+            <a:avLst/>
+          </a:prstGeom>
+          <a:noFill/>
+        </p:spPr>
+        <p:txBody>
+          <a:bodyPr wrap="square" anchor="t">
+            <a:spAutoFit/>
+          </a:bodyPr>
+          <a:lstStyle/>
+          <a:p>
+            <a:pPr algn="ctr"/>
+            <a:r>
+              <a:rPr sz="5400" b="1">
+                <a:solidFill>
+                  <a:srgbClr val="F5F3EC"/>
+                </a:solidFill>
+                <a:latin typeface="Arial"/>
+              </a:rPr>
+              <a:t>161</a:t>
+            </a:r>
+          </a:p>
+        </p:txBody>
+      </p:sp>
+      <p:sp>
+        <p:nvSpPr>
+          <p:cNvPr id="8" name="TextBox 7"/>
+          <p:cNvSpPr txBox="1"/>
+          <p:nvPr/>
+        </p:nvSpPr>
+        <p:spPr>
+          <a:xfrm>
+            <a:off x="4986406" y="3520440"/>
+            <a:ext cx="1944563" cy="457200"/>
+          </a:xfrm>
+          <a:prstGeom prst="rect">
+            <a:avLst/>
+          </a:prstGeom>
+          <a:noFill/>
+        </p:spPr>
+        <p:txBody>
+          <a:bodyPr wrap="square" anchor="t">
+            <a:spAutoFit/>
+          </a:bodyPr>
+          <a:lstStyle/>
+          <a:p>
+            <a:pPr algn="ctr"/>
+            <a:r>
+              <a:rPr sz="1400" b="0">
+                <a:solidFill>
+                  <a:srgbClr val="9096A1"/>
+                </a:solidFill>
+                <a:latin typeface="Arial"/>
+              </a:rPr>
+              <a:t>參考文章</a:t>
+            </a:r>
+          </a:p>
+        </p:txBody>
+      </p:sp>
+      <p:sp>
+        <p:nvSpPr>
+          <p:cNvPr id="9" name="TextBox 8"/>
+          <p:cNvSpPr txBox="1"/>
+          <p:nvPr/>
+        </p:nvSpPr>
+        <p:spPr>
+          <a:xfrm>
+            <a:off x="7205289" y="2377440"/>
+            <a:ext cx="1944563" cy="1097280"/>
+          </a:xfrm>
+          <a:prstGeom prst="rect">
+            <a:avLst/>
+          </a:prstGeom>
+          <a:noFill/>
+        </p:spPr>
+        <p:txBody>
+          <a:bodyPr wrap="square" anchor="t">
+            <a:spAutoFit/>
+          </a:bodyPr>
+          <a:lstStyle/>
+          <a:p>
+            <a:pPr algn="ctr"/>
+            <a:r>
+              <a:rPr sz="5400" b="1">
+                <a:solidFill>
+                  <a:srgbClr val="F5F3EC"/>
+                </a:solidFill>
+                <a:latin typeface="Arial"/>
+              </a:rPr>
+              <a:t>1</a:t>
+            </a:r>
+          </a:p>
+        </p:txBody>
+      </p:sp>
+      <p:sp>
+        <p:nvSpPr>
+          <p:cNvPr id="10" name="TextBox 9"/>
+          <p:cNvSpPr txBox="1"/>
+          <p:nvPr/>
+        </p:nvSpPr>
+        <p:spPr>
+          <a:xfrm>
+            <a:off x="7205289" y="3520440"/>
+            <a:ext cx="1944563" cy="457200"/>
+          </a:xfrm>
+          <a:prstGeom prst="rect">
+            <a:avLst/>
+          </a:prstGeom>
+          <a:noFill/>
+        </p:spPr>
+        <p:txBody>
+          <a:bodyPr wrap="square" anchor="t">
+            <a:spAutoFit/>
+          </a:bodyPr>
+          <a:lstStyle/>
+          <a:p>
+            <a:pPr algn="ctr"/>
+            <a:r>
+              <a:rPr sz="1400" b="0">
+                <a:solidFill>
+                  <a:srgbClr val="9096A1"/>
+                </a:solidFill>
+                <a:latin typeface="Arial"/>
+              </a:rPr>
+              <a:t>數據圖表</a:t>
+            </a:r>
+          </a:p>
+        </p:txBody>
+      </p:sp>
+      <p:sp>
+        <p:nvSpPr>
+          <p:cNvPr id="11" name="TextBox 10"/>
+          <p:cNvSpPr txBox="1"/>
+          <p:nvPr/>
+        </p:nvSpPr>
+        <p:spPr>
+          <a:xfrm>
+            <a:off x="9424172" y="2377440"/>
+            <a:ext cx="1944563" cy="1097280"/>
+          </a:xfrm>
+          <a:prstGeom prst="rect">
+            <a:avLst/>
+          </a:prstGeom>
+          <a:noFill/>
+        </p:spPr>
+        <p:txBody>
+          <a:bodyPr wrap="square" anchor="t">
+            <a:spAutoFit/>
+          </a:bodyPr>
+          <a:lstStyle/>
+          <a:p>
+            <a:pPr algn="ctr"/>
+            <a:r>
+              <a:rPr sz="5400" b="1">
+                <a:solidFill>
+                  <a:srgbClr val="F5F3EC"/>
+                </a:solidFill>
+                <a:latin typeface="Arial"/>
+              </a:rPr>
+              <a:t>1</a:t>
+            </a:r>
+          </a:p>
+        </p:txBody>
+      </p:sp>
+      <p:sp>
+        <p:nvSpPr>
+          <p:cNvPr id="12" name="TextBox 11"/>
+          <p:cNvSpPr txBox="1"/>
+          <p:nvPr/>
+        </p:nvSpPr>
+        <p:spPr>
+          <a:xfrm>
+            <a:off x="9424172" y="3520440"/>
+            <a:ext cx="1944563" cy="457200"/>
+          </a:xfrm>
+          <a:prstGeom prst="rect">
+            <a:avLst/>
+          </a:prstGeom>
+          <a:noFill/>
+        </p:spPr>
+        <p:txBody>
+          <a:bodyPr wrap="square" anchor="t">
+            <a:spAutoFit/>
+          </a:bodyPr>
+          <a:lstStyle/>
+          <a:p>
+            <a:pPr algn="ctr"/>
+            <a:r>
+              <a:rPr sz="1400" b="0">
+                <a:solidFill>
+                  <a:srgbClr val="9096A1"/>
+                </a:solidFill>
+                <a:latin typeface="Arial"/>
+              </a:rPr>
+              <a:t>比較表格</a:t>
+            </a:r>
+          </a:p>
+        </p:txBody>
+      </p:sp>
+      <p:sp>
+        <p:nvSpPr>
+          <p:cNvPr id="13" name="TextBox 12"/>
           <p:cNvSpPr txBox="1"/>
           <p:nvPr/>
         </p:nvSpPr>
@@ -4172,7 +5548,7 @@
                 </a:solidFill>
                 <a:latin typeface="Arial"/>
               </a:rPr>
-              <a:t>03 · SECTION　📊</a:t>
+              <a:t>03 · SECTION　📝</a:t>
             </a:r>
           </a:p>
         </p:txBody>
@@ -4207,32 +5583,97 @@
                 </a:solidFill>
                 <a:latin typeface="Arial"/>
               </a:rPr>
-              <a:t>二、市場數據</a:t>
-            </a:r>
-          </a:p>
-        </p:txBody>
-      </p:sp>
-      <p:graphicFrame>
-        <p:nvGraphicFramePr>
-          <p:cNvPr id="4" name="Chart 3"/>
-          <p:cNvGraphicFramePr>
-            <a:graphicFrameLocks noGrp="1"/>
-          </p:cNvGraphicFramePr>
-          <p:nvPr/>
-        </p:nvGraphicFramePr>
-        <p:xfrm>
-          <a:off x="731520" y="1554480"/>
-          <a:ext cx="10698480" cy="4754880"/>
-        </p:xfrm>
-        <a:graphic>
-          <a:graphicData uri="http://schemas.openxmlformats.org/drawingml/2006/chart">
-            <c:chart xmlns:c="http://schemas.openxmlformats.org/drawingml/2006/chart" r:id="rId2"/>
-          </a:graphicData>
-        </a:graphic>
-      </p:graphicFrame>
+              <a:t>一、本月摘要</a:t>
+            </a:r>
+          </a:p>
+        </p:txBody>
+      </p:sp>
+      <p:sp>
+        <p:nvSpPr>
+          <p:cNvPr id="4" name="Oval 3"/>
+          <p:cNvSpPr/>
+          <p:nvPr/>
+        </p:nvSpPr>
+        <p:spPr>
+          <a:xfrm>
+            <a:off x="594360" y="1728216"/>
+            <a:ext cx="100584" cy="100584"/>
+          </a:xfrm>
+          <a:prstGeom prst="ellipse">
+            <a:avLst/>
+          </a:prstGeom>
+          <a:solidFill>
+            <a:srgbClr val="4C7EFF"/>
+          </a:solidFill>
+          <a:ln>
+            <a:noFill/>
+          </a:ln>
+          <a:effectLst/>
+        </p:spPr>
+        <p:style>
+          <a:lnRef idx="1">
+            <a:schemeClr val="accent1"/>
+          </a:lnRef>
+          <a:fillRef idx="3">
+            <a:schemeClr val="accent1"/>
+          </a:fillRef>
+          <a:effectRef idx="2">
+            <a:schemeClr val="accent1"/>
+          </a:effectRef>
+          <a:fontRef idx="minor">
+            <a:schemeClr val="lt1"/>
+          </a:fontRef>
+        </p:style>
+        <p:txBody>
+          <a:bodyPr rtlCol="0" anchor="ctr"/>
+          <a:lstStyle/>
+          <a:p>
+            <a:pPr algn="ctr"/>
+          </a:p>
+        </p:txBody>
+      </p:sp>
       <p:sp>
         <p:nvSpPr>
           <p:cNvPr id="5" name="TextBox 4"/>
+          <p:cNvSpPr txBox="1"/>
+          <p:nvPr/>
+        </p:nvSpPr>
+        <p:spPr>
+          <a:xfrm>
+            <a:off x="868680" y="1600200"/>
+            <a:ext cx="10698480" cy="1828800"/>
+          </a:xfrm>
+          <a:prstGeom prst="rect">
+            <a:avLst/>
+          </a:prstGeom>
+          <a:noFill/>
+        </p:spPr>
+        <p:txBody>
+          <a:bodyPr wrap="square">
+            <a:spAutoFit/>
+          </a:bodyPr>
+          <a:lstStyle/>
+          <a:p>
+            <a:pPr>
+              <a:lnSpc>
+                <a:spcPct val="115000"/>
+              </a:lnSpc>
+            </a:pPr>
+            <a:r>
+              <a:rPr sz="1450">
+                <a:solidFill>
+                  <a:srgbClr val="F5F3EC"/>
+                </a:solidFill>
+                <a:latin typeface="Arial"/>
+              </a:rPr>
+              <a:t>2026 年上半年全球投影機市場呈現「外熱內冷」的分化格局，中國國內市場受需求飽和與低價內捲影響銷量下滑 26%，促使極米、當貝與光峰等品牌加速拓展海外市場與車載/AI光學應用（投影時代）。供應鏈與核心元件端，台積電與索尼深化日本感測器合資，唯捷光電及環鴻科技亦大幅投資磷化銦（InP）雷射晶片與外部雷射模組，全力佈局 AI 資料中心光互連商機（DigiTimes）。產品技術方面，巴可與海信推動旗艦 4K/8K 3DLP 及三色雷射電視等頂級顯示規格，同時 REDMI 與當貝等品牌則透過雲台設計與輕量化三色雷射機型，加速下沉家用市場（投影時代、IT之家）。</a:t>
+            </a:r>
+          </a:p>
+        </p:txBody>
+      </p:sp>
+      <p:sp>
+        <p:nvSpPr>
+          <p:cNvPr id="6" name="TextBox 5"/>
           <p:cNvSpPr txBox="1"/>
           <p:nvPr/>
         </p:nvSpPr>
@@ -4363,27 +5804,25 @@
       </p:sp>
       <p:sp>
         <p:nvSpPr>
-          <p:cNvPr id="4" name="Rounded Rectangle 3"/>
+          <p:cNvPr id="4" name="Oval 3"/>
           <p:cNvSpPr/>
           <p:nvPr/>
         </p:nvSpPr>
         <p:spPr>
           <a:xfrm>
-            <a:off x="548640" y="1600200"/>
-            <a:ext cx="2602153" cy="4754880"/>
-          </a:xfrm>
-          <a:prstGeom prst="roundRect">
-            <a:avLst>
-              <a:gd name="adj" fmla="val 6000"/>
-            </a:avLst>
+            <a:off x="9418320" y="-1371600"/>
+            <a:ext cx="5486400" cy="5486400"/>
+          </a:xfrm>
+          <a:prstGeom prst="ellipse">
+            <a:avLst/>
           </a:prstGeom>
           <a:solidFill>
-            <a:srgbClr val="23262F"/>
+            <a:srgbClr val="4C7EFF">
+              <a:alpha val="10000"/>
+            </a:srgbClr>
           </a:solidFill>
-          <a:ln w="12700">
-            <a:solidFill>
-              <a:srgbClr val="4C7EFF"/>
-            </a:solidFill>
+          <a:ln>
+            <a:noFill/>
           </a:ln>
           <a:effectLst/>
         </p:spPr>
@@ -4417,8 +5856,8 @@
         </p:nvSpPr>
         <p:spPr>
           <a:xfrm>
-            <a:off x="749808" y="1764792"/>
-            <a:ext cx="2199817" cy="457200"/>
+            <a:off x="548640" y="2286000"/>
+            <a:ext cx="11064240" cy="1828800"/>
           </a:xfrm>
           <a:prstGeom prst="rect">
             <a:avLst/>
@@ -4431,15 +5870,15 @@
           </a:bodyPr>
           <a:lstStyle/>
           <a:p>
-            <a:pPr algn="l"/>
-            <a:r>
-              <a:rPr sz="1700" b="1">
-                <a:solidFill>
-                  <a:srgbClr val="4C7EFF"/>
-                </a:solidFill>
-                <a:latin typeface="Arial"/>
-              </a:rPr>
-              <a:t>全球與中國投影機市場</a:t>
+            <a:pPr algn="ctr"/>
+            <a:r>
+              <a:rPr sz="8800" b="1">
+                <a:solidFill>
+                  <a:srgbClr val="FFB454"/>
+                </a:solidFill>
+                <a:latin typeface="Arial"/>
+              </a:rPr>
+              <a:t>+87.63%</a:t>
             </a:r>
           </a:p>
         </p:txBody>
@@ -4452,95 +5891,8 @@
         </p:nvSpPr>
         <p:spPr>
           <a:xfrm>
-            <a:off x="749808" y="2258568"/>
-            <a:ext cx="2199817" cy="3931920"/>
-          </a:xfrm>
-          <a:prstGeom prst="rect">
-            <a:avLst/>
-          </a:prstGeom>
-          <a:noFill/>
-        </p:spPr>
-        <p:txBody>
-          <a:bodyPr wrap="square">
-            <a:spAutoFit/>
-          </a:bodyPr>
-          <a:lstStyle/>
-          <a:p>
-            <a:pPr>
-              <a:lnSpc>
-                <a:spcPct val="120000"/>
-              </a:lnSpc>
-            </a:pPr>
-            <a:r>
-              <a:rPr sz="1350">
-                <a:solidFill>
-                  <a:srgbClr val="F5F3EC"/>
-                </a:solidFill>
-                <a:latin typeface="Arial"/>
-              </a:rPr>
-              <a:t>2026 上半年中國國內銷量同比大跌 26%，主因政策退潮、需求飽和與低價內卷；海外市場則在極米、當貝與光峰推動下逆勢成長，其中極米海外收入大幅年增 87.63%，帶動整體毛利率提升至 39%（投影時代）。</a:t>
-            </a:r>
-          </a:p>
-        </p:txBody>
-      </p:sp>
-      <p:sp>
-        <p:nvSpPr>
-          <p:cNvPr id="7" name="Rounded Rectangle 6"/>
-          <p:cNvSpPr/>
-          <p:nvPr/>
-        </p:nvSpPr>
-        <p:spPr>
-          <a:xfrm>
-            <a:off x="3379393" y="1600200"/>
-            <a:ext cx="2602153" cy="4754880"/>
-          </a:xfrm>
-          <a:prstGeom prst="roundRect">
-            <a:avLst>
-              <a:gd name="adj" fmla="val 6000"/>
-            </a:avLst>
-          </a:prstGeom>
-          <a:solidFill>
-            <a:srgbClr val="23262F"/>
-          </a:solidFill>
-          <a:ln w="12700">
-            <a:solidFill>
-              <a:srgbClr val="FFB454"/>
-            </a:solidFill>
-          </a:ln>
-          <a:effectLst/>
-        </p:spPr>
-        <p:style>
-          <a:lnRef idx="1">
-            <a:schemeClr val="accent1"/>
-          </a:lnRef>
-          <a:fillRef idx="3">
-            <a:schemeClr val="accent1"/>
-          </a:fillRef>
-          <a:effectRef idx="2">
-            <a:schemeClr val="accent1"/>
-          </a:effectRef>
-          <a:fontRef idx="minor">
-            <a:schemeClr val="lt1"/>
-          </a:fontRef>
-        </p:style>
-        <p:txBody>
-          <a:bodyPr rtlCol="0" anchor="ctr"/>
-          <a:lstStyle/>
-          <a:p>
-            <a:pPr algn="ctr"/>
-          </a:p>
-        </p:txBody>
-      </p:sp>
-      <p:sp>
-        <p:nvSpPr>
-          <p:cNvPr id="8" name="TextBox 7"/>
-          <p:cNvSpPr txBox="1"/>
-          <p:nvPr/>
-        </p:nvSpPr>
-        <p:spPr>
-          <a:xfrm>
-            <a:off x="3580561" y="1764792"/>
-            <a:ext cx="2199817" cy="457200"/>
+            <a:off x="777240" y="4160520"/>
+            <a:ext cx="10607040" cy="548640"/>
           </a:xfrm>
           <a:prstGeom prst="rect">
             <a:avLst/>
@@ -4553,116 +5905,29 @@
           </a:bodyPr>
           <a:lstStyle/>
           <a:p>
-            <a:pPr algn="l"/>
-            <a:r>
-              <a:rPr sz="1700" b="1">
-                <a:solidFill>
-                  <a:srgbClr val="FFB454"/>
-                </a:solidFill>
-                <a:latin typeface="Arial"/>
-              </a:rPr>
-              <a:t>安克創新</a:t>
-            </a:r>
-          </a:p>
-        </p:txBody>
-      </p:sp>
-      <p:sp>
-        <p:nvSpPr>
-          <p:cNvPr id="9" name="TextBox 8"/>
-          <p:cNvSpPr txBox="1"/>
-          <p:nvPr/>
-        </p:nvSpPr>
-        <p:spPr>
-          <a:xfrm>
-            <a:off x="3580561" y="2258568"/>
-            <a:ext cx="2199817" cy="3931920"/>
-          </a:xfrm>
-          <a:prstGeom prst="rect">
-            <a:avLst/>
-          </a:prstGeom>
-          <a:noFill/>
-        </p:spPr>
-        <p:txBody>
-          <a:bodyPr wrap="square">
-            <a:spAutoFit/>
-          </a:bodyPr>
-          <a:lstStyle/>
-          <a:p>
-            <a:pPr>
-              <a:lnSpc>
-                <a:spcPct val="120000"/>
-              </a:lnSpc>
-            </a:pPr>
-            <a:r>
-              <a:rPr sz="1350">
+            <a:pPr algn="ctr"/>
+            <a:r>
+              <a:rPr sz="2200" b="1">
                 <a:solidFill>
                   <a:srgbClr val="F5F3EC"/>
                 </a:solidFill>
                 <a:latin typeface="Arial"/>
               </a:rPr>
-              <a:t>2026 年上半年總營收達 166.05 億元人民幣（年增 29.05%），其中包含 Nebula 投影機的「智能影音」板塊營收達 34.85 億元人民幣（年增 24.53%）（投影時代）。</a:t>
-            </a:r>
-          </a:p>
-        </p:txBody>
-      </p:sp>
-      <p:sp>
-        <p:nvSpPr>
-          <p:cNvPr id="10" name="Rounded Rectangle 9"/>
-          <p:cNvSpPr/>
-          <p:nvPr/>
-        </p:nvSpPr>
-        <p:spPr>
-          <a:xfrm>
-            <a:off x="6210147" y="1600200"/>
-            <a:ext cx="2602153" cy="4754880"/>
-          </a:xfrm>
-          <a:prstGeom prst="roundRect">
-            <a:avLst>
-              <a:gd name="adj" fmla="val 6000"/>
-            </a:avLst>
-          </a:prstGeom>
-          <a:solidFill>
-            <a:srgbClr val="23262F"/>
-          </a:solidFill>
-          <a:ln w="12700">
-            <a:solidFill>
-              <a:srgbClr val="8B7FD6"/>
-            </a:solidFill>
-          </a:ln>
-          <a:effectLst/>
-        </p:spPr>
-        <p:style>
-          <a:lnRef idx="1">
-            <a:schemeClr val="accent1"/>
-          </a:lnRef>
-          <a:fillRef idx="3">
-            <a:schemeClr val="accent1"/>
-          </a:fillRef>
-          <a:effectRef idx="2">
-            <a:schemeClr val="accent1"/>
-          </a:effectRef>
-          <a:fontRef idx="minor">
-            <a:schemeClr val="lt1"/>
-          </a:fontRef>
-        </p:style>
-        <p:txBody>
-          <a:bodyPr rtlCol="0" anchor="ctr"/>
-          <a:lstStyle/>
-          <a:p>
-            <a:pPr algn="ctr"/>
-          </a:p>
-        </p:txBody>
-      </p:sp>
-      <p:sp>
-        <p:nvSpPr>
-          <p:cNvPr id="11" name="TextBox 10"/>
-          <p:cNvSpPr txBox="1"/>
-          <p:nvPr/>
-        </p:nvSpPr>
-        <p:spPr>
-          <a:xfrm>
-            <a:off x="6411315" y="1764792"/>
-            <a:ext cx="2199817" cy="457200"/>
+              <a:t>極米科技 2026 年上半年海外收入年增率</a:t>
+            </a:r>
+          </a:p>
+        </p:txBody>
+      </p:sp>
+      <p:sp>
+        <p:nvSpPr>
+          <p:cNvPr id="7" name="TextBox 6"/>
+          <p:cNvSpPr txBox="1"/>
+          <p:nvPr/>
+        </p:nvSpPr>
+        <p:spPr>
+          <a:xfrm>
+            <a:off x="1371600" y="4800600"/>
+            <a:ext cx="9418320" cy="731520"/>
           </a:xfrm>
           <a:prstGeom prst="rect">
             <a:avLst/>
@@ -4675,183 +5940,22 @@
           </a:bodyPr>
           <a:lstStyle/>
           <a:p>
-            <a:pPr algn="l"/>
-            <a:r>
-              <a:rPr sz="1700" b="1">
-                <a:solidFill>
-                  <a:srgbClr val="8B7FD6"/>
-                </a:solidFill>
-                <a:latin typeface="Arial"/>
-              </a:rPr>
-              <a:t>中光學</a:t>
-            </a:r>
-          </a:p>
-        </p:txBody>
-      </p:sp>
-      <p:sp>
-        <p:nvSpPr>
-          <p:cNvPr id="12" name="TextBox 11"/>
-          <p:cNvSpPr txBox="1"/>
-          <p:nvPr/>
-        </p:nvSpPr>
-        <p:spPr>
-          <a:xfrm>
-            <a:off x="6411315" y="2258568"/>
-            <a:ext cx="2199817" cy="3931920"/>
-          </a:xfrm>
-          <a:prstGeom prst="rect">
-            <a:avLst/>
-          </a:prstGeom>
-          <a:noFill/>
-        </p:spPr>
-        <p:txBody>
-          <a:bodyPr wrap="square">
-            <a:spAutoFit/>
-          </a:bodyPr>
-          <a:lstStyle/>
-          <a:p>
-            <a:pPr>
-              <a:lnSpc>
-                <a:spcPct val="120000"/>
-              </a:lnSpc>
-            </a:pPr>
-            <a:r>
-              <a:rPr sz="1350">
-                <a:solidFill>
-                  <a:srgbClr val="F5F3EC"/>
-                </a:solidFill>
-                <a:latin typeface="Arial"/>
-              </a:rPr>
-              <a:t>2026 年上半年營收 7.25 億元人民幣（年增 6.71%），淨虧損同比縮減 39.95%，其中光學元組件營收成長 19.28% 至 3.39 億元，但投影機整機及配件營收下降 5.72% 至 1.18 億元（投影時代）。</a:t>
-            </a:r>
-          </a:p>
-        </p:txBody>
-      </p:sp>
-      <p:sp>
-        <p:nvSpPr>
-          <p:cNvPr id="13" name="Rounded Rectangle 12"/>
-          <p:cNvSpPr/>
-          <p:nvPr/>
-        </p:nvSpPr>
-        <p:spPr>
-          <a:xfrm>
-            <a:off x="9040901" y="1600200"/>
-            <a:ext cx="2602153" cy="4754880"/>
-          </a:xfrm>
-          <a:prstGeom prst="roundRect">
-            <a:avLst>
-              <a:gd name="adj" fmla="val 6000"/>
-            </a:avLst>
-          </a:prstGeom>
-          <a:solidFill>
-            <a:srgbClr val="23262F"/>
-          </a:solidFill>
-          <a:ln w="12700">
-            <a:solidFill>
-              <a:srgbClr val="6FCF97"/>
-            </a:solidFill>
-          </a:ln>
-          <a:effectLst/>
-        </p:spPr>
-        <p:style>
-          <a:lnRef idx="1">
-            <a:schemeClr val="accent1"/>
-          </a:lnRef>
-          <a:fillRef idx="3">
-            <a:schemeClr val="accent1"/>
-          </a:fillRef>
-          <a:effectRef idx="2">
-            <a:schemeClr val="accent1"/>
-          </a:effectRef>
-          <a:fontRef idx="minor">
-            <a:schemeClr val="lt1"/>
-          </a:fontRef>
-        </p:style>
-        <p:txBody>
-          <a:bodyPr rtlCol="0" anchor="ctr"/>
-          <a:lstStyle/>
-          <a:p>
             <a:pPr algn="ctr"/>
-          </a:p>
-        </p:txBody>
-      </p:sp>
-      <p:sp>
-        <p:nvSpPr>
-          <p:cNvPr id="14" name="TextBox 13"/>
-          <p:cNvSpPr txBox="1"/>
-          <p:nvPr/>
-        </p:nvSpPr>
-        <p:spPr>
-          <a:xfrm>
-            <a:off x="9242069" y="1764792"/>
-            <a:ext cx="2199817" cy="457200"/>
-          </a:xfrm>
-          <a:prstGeom prst="rect">
-            <a:avLst/>
-          </a:prstGeom>
-          <a:noFill/>
-        </p:spPr>
-        <p:txBody>
-          <a:bodyPr wrap="square" anchor="t">
-            <a:spAutoFit/>
-          </a:bodyPr>
-          <a:lstStyle/>
-          <a:p>
-            <a:pPr algn="l"/>
-            <a:r>
-              <a:rPr sz="1700" b="1">
-                <a:solidFill>
-                  <a:srgbClr val="6FCF97"/>
-                </a:solidFill>
-                <a:latin typeface="Arial"/>
-              </a:rPr>
-              <a:t>通路促銷市場</a:t>
-            </a:r>
-          </a:p>
-        </p:txBody>
-      </p:sp>
-      <p:sp>
-        <p:nvSpPr>
-          <p:cNvPr id="15" name="TextBox 14"/>
-          <p:cNvSpPr txBox="1"/>
-          <p:nvPr/>
-        </p:nvSpPr>
-        <p:spPr>
-          <a:xfrm>
-            <a:off x="9242069" y="2258568"/>
-            <a:ext cx="2199817" cy="3931920"/>
-          </a:xfrm>
-          <a:prstGeom prst="rect">
-            <a:avLst/>
-          </a:prstGeom>
-          <a:noFill/>
-        </p:spPr>
-        <p:txBody>
-          <a:bodyPr wrap="square">
-            <a:spAutoFit/>
-          </a:bodyPr>
-          <a:lstStyle/>
-          <a:p>
-            <a:pPr>
-              <a:lnSpc>
-                <a:spcPct val="120000"/>
-              </a:lnSpc>
-            </a:pPr>
-            <a:r>
-              <a:rPr sz="1350">
-                <a:solidFill>
-                  <a:srgbClr val="F5F3EC"/>
-                </a:solidFill>
-                <a:latin typeface="Arial"/>
-              </a:rPr>
-              <a:t>愛普生、明基、松下、索尼、奧圖碼與易仁科技等多個品牌在北京等區域通路展開常規價格促銷，覆蓋千元家用機至幾十萬元級工程投影機（ZOL投影機頻道）。</a:t>
-            </a:r>
-          </a:p>
-        </p:txBody>
-      </p:sp>
-      <p:sp>
-        <p:nvSpPr>
-          <p:cNvPr id="16" name="TextBox 15"/>
+            <a:r>
+              <a:rPr sz="1400" b="0">
+                <a:solidFill>
+                  <a:srgbClr val="9096A1"/>
+                </a:solidFill>
+                <a:latin typeface="Arial"/>
+              </a:rPr>
+              <a:t>帶動整體毛利率升至 39%，有效減緩中國國內需求放緩衝擊</a:t>
+            </a:r>
+          </a:p>
+        </p:txBody>
+      </p:sp>
+      <p:sp>
+        <p:nvSpPr>
+          <p:cNvPr id="8" name="TextBox 7"/>
           <p:cNvSpPr txBox="1"/>
           <p:nvPr/>
         </p:nvSpPr>
@@ -4940,7 +6044,7 @@
                 </a:solidFill>
                 <a:latin typeface="Arial"/>
               </a:rPr>
-              <a:t>05 · SECTION　✨</a:t>
+              <a:t>05 · SECTION　📊</a:t>
             </a:r>
           </a:p>
         </p:txBody>
@@ -4975,746 +6079,32 @@
                 </a:solidFill>
                 <a:latin typeface="Arial"/>
               </a:rPr>
-              <a:t>三、新品與品牌動態（1/2）</a:t>
-            </a:r>
-          </a:p>
-        </p:txBody>
-      </p:sp>
-      <p:sp>
-        <p:nvSpPr>
-          <p:cNvPr id="4" name="Rounded Rectangle 3"/>
-          <p:cNvSpPr/>
-          <p:nvPr/>
-        </p:nvSpPr>
-        <p:spPr>
-          <a:xfrm>
-            <a:off x="548640" y="1600200"/>
-            <a:ext cx="3545738" cy="2263140"/>
-          </a:xfrm>
-          <a:prstGeom prst="roundRect">
-            <a:avLst>
-              <a:gd name="adj" fmla="val 6000"/>
-            </a:avLst>
-          </a:prstGeom>
-          <a:solidFill>
-            <a:srgbClr val="23262F"/>
-          </a:solidFill>
-          <a:ln w="12700">
-            <a:solidFill>
-              <a:srgbClr val="4C7EFF"/>
-            </a:solidFill>
-          </a:ln>
-          <a:effectLst/>
-        </p:spPr>
-        <p:style>
-          <a:lnRef idx="1">
-            <a:schemeClr val="accent1"/>
-          </a:lnRef>
-          <a:fillRef idx="3">
-            <a:schemeClr val="accent1"/>
-          </a:fillRef>
-          <a:effectRef idx="2">
-            <a:schemeClr val="accent1"/>
-          </a:effectRef>
-          <a:fontRef idx="minor">
-            <a:schemeClr val="lt1"/>
-          </a:fontRef>
-        </p:style>
-        <p:txBody>
-          <a:bodyPr rtlCol="0" anchor="ctr"/>
-          <a:lstStyle/>
-          <a:p>
-            <a:pPr algn="ctr"/>
-          </a:p>
-        </p:txBody>
-      </p:sp>
+              <a:t>二、市場數據</a:t>
+            </a:r>
+          </a:p>
+        </p:txBody>
+      </p:sp>
+      <p:graphicFrame>
+        <p:nvGraphicFramePr>
+          <p:cNvPr id="4" name="Chart 3"/>
+          <p:cNvGraphicFramePr>
+            <a:graphicFrameLocks noGrp="1"/>
+          </p:cNvGraphicFramePr>
+          <p:nvPr/>
+        </p:nvGraphicFramePr>
+        <p:xfrm>
+          <a:off x="731520" y="1554480"/>
+          <a:ext cx="10698480" cy="4754880"/>
+        </p:xfrm>
+        <a:graphic>
+          <a:graphicData uri="http://schemas.openxmlformats.org/drawingml/2006/chart">
+            <c:chart xmlns:c="http://schemas.openxmlformats.org/drawingml/2006/chart" r:id="rId2"/>
+          </a:graphicData>
+        </a:graphic>
+      </p:graphicFrame>
       <p:sp>
         <p:nvSpPr>
           <p:cNvPr id="5" name="TextBox 4"/>
-          <p:cNvSpPr txBox="1"/>
-          <p:nvPr/>
-        </p:nvSpPr>
-        <p:spPr>
-          <a:xfrm>
-            <a:off x="749808" y="1764792"/>
-            <a:ext cx="3143402" cy="457200"/>
-          </a:xfrm>
-          <a:prstGeom prst="rect">
-            <a:avLst/>
-          </a:prstGeom>
-          <a:noFill/>
-        </p:spPr>
-        <p:txBody>
-          <a:bodyPr wrap="square" anchor="t">
-            <a:spAutoFit/>
-          </a:bodyPr>
-          <a:lstStyle/>
-          <a:p>
-            <a:pPr algn="l"/>
-            <a:r>
-              <a:rPr sz="1600" b="1">
-                <a:solidFill>
-                  <a:srgbClr val="4C7EFF"/>
-                </a:solidFill>
-                <a:latin typeface="Arial"/>
-              </a:rPr>
-              <a:t>巴可（Barco）</a:t>
-            </a:r>
-          </a:p>
-        </p:txBody>
-      </p:sp>
-      <p:sp>
-        <p:nvSpPr>
-          <p:cNvPr id="6" name="TextBox 5"/>
-          <p:cNvSpPr txBox="1"/>
-          <p:nvPr/>
-        </p:nvSpPr>
-        <p:spPr>
-          <a:xfrm>
-            <a:off x="749808" y="2258568"/>
-            <a:ext cx="3143402" cy="1440180"/>
-          </a:xfrm>
-          <a:prstGeom prst="rect">
-            <a:avLst/>
-          </a:prstGeom>
-          <a:noFill/>
-        </p:spPr>
-        <p:txBody>
-          <a:bodyPr wrap="square">
-            <a:spAutoFit/>
-          </a:bodyPr>
-          <a:lstStyle/>
-          <a:p>
-            <a:pPr>
-              <a:lnSpc>
-                <a:spcPct val="120000"/>
-              </a:lnSpc>
-            </a:pPr>
-            <a:r>
-              <a:rPr sz="1300">
-                <a:solidFill>
-                  <a:srgbClr val="F5F3EC"/>
-                </a:solidFill>
-                <a:latin typeface="Arial"/>
-              </a:rPr>
-              <a:t>發表 QDX-N4K RGB 純激光 3DLP 旗艦工程投影機，搭載 0.98 吋原生 4K DMD，支援 100% Rec.2020 色域與 4K@120Hz 低延遲，專攻主題公園與沉浸式文旅市場（投影時代）。</a:t>
-            </a:r>
-          </a:p>
-        </p:txBody>
-      </p:sp>
-      <p:sp>
-        <p:nvSpPr>
-          <p:cNvPr id="7" name="Rounded Rectangle 6"/>
-          <p:cNvSpPr/>
-          <p:nvPr/>
-        </p:nvSpPr>
-        <p:spPr>
-          <a:xfrm>
-            <a:off x="4322978" y="1600200"/>
-            <a:ext cx="3545738" cy="2263140"/>
-          </a:xfrm>
-          <a:prstGeom prst="roundRect">
-            <a:avLst>
-              <a:gd name="adj" fmla="val 6000"/>
-            </a:avLst>
-          </a:prstGeom>
-          <a:solidFill>
-            <a:srgbClr val="23262F"/>
-          </a:solidFill>
-          <a:ln w="12700">
-            <a:solidFill>
-              <a:srgbClr val="FFB454"/>
-            </a:solidFill>
-          </a:ln>
-          <a:effectLst/>
-        </p:spPr>
-        <p:style>
-          <a:lnRef idx="1">
-            <a:schemeClr val="accent1"/>
-          </a:lnRef>
-          <a:fillRef idx="3">
-            <a:schemeClr val="accent1"/>
-          </a:fillRef>
-          <a:effectRef idx="2">
-            <a:schemeClr val="accent1"/>
-          </a:effectRef>
-          <a:fontRef idx="minor">
-            <a:schemeClr val="lt1"/>
-          </a:fontRef>
-        </p:style>
-        <p:txBody>
-          <a:bodyPr rtlCol="0" anchor="ctr"/>
-          <a:lstStyle/>
-          <a:p>
-            <a:pPr algn="ctr"/>
-          </a:p>
-        </p:txBody>
-      </p:sp>
-      <p:sp>
-        <p:nvSpPr>
-          <p:cNvPr id="8" name="TextBox 7"/>
-          <p:cNvSpPr txBox="1"/>
-          <p:nvPr/>
-        </p:nvSpPr>
-        <p:spPr>
-          <a:xfrm>
-            <a:off x="4524146" y="1764792"/>
-            <a:ext cx="3143402" cy="457200"/>
-          </a:xfrm>
-          <a:prstGeom prst="rect">
-            <a:avLst/>
-          </a:prstGeom>
-          <a:noFill/>
-        </p:spPr>
-        <p:txBody>
-          <a:bodyPr wrap="square" anchor="t">
-            <a:spAutoFit/>
-          </a:bodyPr>
-          <a:lstStyle/>
-          <a:p>
-            <a:pPr algn="l"/>
-            <a:r>
-              <a:rPr sz="1600" b="1">
-                <a:solidFill>
-                  <a:srgbClr val="FFB454"/>
-                </a:solidFill>
-                <a:latin typeface="Arial"/>
-              </a:rPr>
-              <a:t>海信</a:t>
-            </a:r>
-          </a:p>
-        </p:txBody>
-      </p:sp>
-      <p:sp>
-        <p:nvSpPr>
-          <p:cNvPr id="9" name="TextBox 8"/>
-          <p:cNvSpPr txBox="1"/>
-          <p:nvPr/>
-        </p:nvSpPr>
-        <p:spPr>
-          <a:xfrm>
-            <a:off x="4524146" y="2258568"/>
-            <a:ext cx="3143402" cy="1440180"/>
-          </a:xfrm>
-          <a:prstGeom prst="rect">
-            <a:avLst/>
-          </a:prstGeom>
-          <a:noFill/>
-        </p:spPr>
-        <p:txBody>
-          <a:bodyPr wrap="square">
-            <a:spAutoFit/>
-          </a:bodyPr>
-          <a:lstStyle/>
-          <a:p>
-            <a:pPr>
-              <a:lnSpc>
-                <a:spcPct val="120000"/>
-              </a:lnSpc>
-            </a:pPr>
-            <a:r>
-              <a:rPr sz="1300">
-                <a:solidFill>
-                  <a:srgbClr val="F5F3EC"/>
-                </a:solidFill>
-                <a:latin typeface="Arial"/>
-              </a:rPr>
-              <a:t>發布新一代「星光 S2 Pro」雷射電視，提供 80、88 與 100 吋，採用三色雷射光源、菲涅爾無源抗光屏與哈曼卡頓全景聲音響，售價 11,999 元人民幣起（投影時代）。</a:t>
-            </a:r>
-          </a:p>
-        </p:txBody>
-      </p:sp>
-      <p:sp>
-        <p:nvSpPr>
-          <p:cNvPr id="10" name="Rounded Rectangle 9"/>
-          <p:cNvSpPr/>
-          <p:nvPr/>
-        </p:nvSpPr>
-        <p:spPr>
-          <a:xfrm>
-            <a:off x="8097316" y="1600200"/>
-            <a:ext cx="3545738" cy="2263140"/>
-          </a:xfrm>
-          <a:prstGeom prst="roundRect">
-            <a:avLst>
-              <a:gd name="adj" fmla="val 6000"/>
-            </a:avLst>
-          </a:prstGeom>
-          <a:solidFill>
-            <a:srgbClr val="23262F"/>
-          </a:solidFill>
-          <a:ln w="12700">
-            <a:solidFill>
-              <a:srgbClr val="8B7FD6"/>
-            </a:solidFill>
-          </a:ln>
-          <a:effectLst/>
-        </p:spPr>
-        <p:style>
-          <a:lnRef idx="1">
-            <a:schemeClr val="accent1"/>
-          </a:lnRef>
-          <a:fillRef idx="3">
-            <a:schemeClr val="accent1"/>
-          </a:fillRef>
-          <a:effectRef idx="2">
-            <a:schemeClr val="accent1"/>
-          </a:effectRef>
-          <a:fontRef idx="minor">
-            <a:schemeClr val="lt1"/>
-          </a:fontRef>
-        </p:style>
-        <p:txBody>
-          <a:bodyPr rtlCol="0" anchor="ctr"/>
-          <a:lstStyle/>
-          <a:p>
-            <a:pPr algn="ctr"/>
-          </a:p>
-        </p:txBody>
-      </p:sp>
-      <p:sp>
-        <p:nvSpPr>
-          <p:cNvPr id="11" name="TextBox 10"/>
-          <p:cNvSpPr txBox="1"/>
-          <p:nvPr/>
-        </p:nvSpPr>
-        <p:spPr>
-          <a:xfrm>
-            <a:off x="8298484" y="1764792"/>
-            <a:ext cx="3143402" cy="457200"/>
-          </a:xfrm>
-          <a:prstGeom prst="rect">
-            <a:avLst/>
-          </a:prstGeom>
-          <a:noFill/>
-        </p:spPr>
-        <p:txBody>
-          <a:bodyPr wrap="square" anchor="t">
-            <a:spAutoFit/>
-          </a:bodyPr>
-          <a:lstStyle/>
-          <a:p>
-            <a:pPr algn="l"/>
-            <a:r>
-              <a:rPr sz="1600" b="1">
-                <a:solidFill>
-                  <a:srgbClr val="8B7FD6"/>
-                </a:solidFill>
-                <a:latin typeface="Arial"/>
-              </a:rPr>
-              <a:t>當貝</a:t>
-            </a:r>
-          </a:p>
-        </p:txBody>
-      </p:sp>
-      <p:sp>
-        <p:nvSpPr>
-          <p:cNvPr id="12" name="TextBox 11"/>
-          <p:cNvSpPr txBox="1"/>
-          <p:nvPr/>
-        </p:nvSpPr>
-        <p:spPr>
-          <a:xfrm>
-            <a:off x="8298484" y="2258568"/>
-            <a:ext cx="3143402" cy="1440180"/>
-          </a:xfrm>
-          <a:prstGeom prst="rect">
-            <a:avLst/>
-          </a:prstGeom>
-          <a:noFill/>
-        </p:spPr>
-        <p:txBody>
-          <a:bodyPr wrap="square">
-            <a:spAutoFit/>
-          </a:bodyPr>
-          <a:lstStyle/>
-          <a:p>
-            <a:pPr>
-              <a:lnSpc>
-                <a:spcPct val="120000"/>
-              </a:lnSpc>
-            </a:pPr>
-            <a:r>
-              <a:rPr sz="1300">
-                <a:solidFill>
-                  <a:srgbClr val="F5F3EC"/>
-                </a:solidFill>
-                <a:latin typeface="Arial"/>
-              </a:rPr>
-              <a:t>推出雲台雷射機種 RX10（1200 CVIA 流明，售價 5499 元人民幣）與 D7X（將三色雷射下沉至兩千元人民幣級），並同步布局旗艦 X7 Max 與 X7 Ultra，展現全價位普及決心（IT之家、ZNDS投影頻道）。</a:t>
-            </a:r>
-          </a:p>
-        </p:txBody>
-      </p:sp>
-      <p:sp>
-        <p:nvSpPr>
-          <p:cNvPr id="13" name="Rounded Rectangle 12"/>
-          <p:cNvSpPr/>
-          <p:nvPr/>
-        </p:nvSpPr>
-        <p:spPr>
-          <a:xfrm>
-            <a:off x="548640" y="4091939"/>
-            <a:ext cx="3545738" cy="2263140"/>
-          </a:xfrm>
-          <a:prstGeom prst="roundRect">
-            <a:avLst>
-              <a:gd name="adj" fmla="val 6000"/>
-            </a:avLst>
-          </a:prstGeom>
-          <a:solidFill>
-            <a:srgbClr val="23262F"/>
-          </a:solidFill>
-          <a:ln w="12700">
-            <a:solidFill>
-              <a:srgbClr val="6FCF97"/>
-            </a:solidFill>
-          </a:ln>
-          <a:effectLst/>
-        </p:spPr>
-        <p:style>
-          <a:lnRef idx="1">
-            <a:schemeClr val="accent1"/>
-          </a:lnRef>
-          <a:fillRef idx="3">
-            <a:schemeClr val="accent1"/>
-          </a:fillRef>
-          <a:effectRef idx="2">
-            <a:schemeClr val="accent1"/>
-          </a:effectRef>
-          <a:fontRef idx="minor">
-            <a:schemeClr val="lt1"/>
-          </a:fontRef>
-        </p:style>
-        <p:txBody>
-          <a:bodyPr rtlCol="0" anchor="ctr"/>
-          <a:lstStyle/>
-          <a:p>
-            <a:pPr algn="ctr"/>
-          </a:p>
-        </p:txBody>
-      </p:sp>
-      <p:sp>
-        <p:nvSpPr>
-          <p:cNvPr id="14" name="TextBox 13"/>
-          <p:cNvSpPr txBox="1"/>
-          <p:nvPr/>
-        </p:nvSpPr>
-        <p:spPr>
-          <a:xfrm>
-            <a:off x="749808" y="4256531"/>
-            <a:ext cx="3143402" cy="457200"/>
-          </a:xfrm>
-          <a:prstGeom prst="rect">
-            <a:avLst/>
-          </a:prstGeom>
-          <a:noFill/>
-        </p:spPr>
-        <p:txBody>
-          <a:bodyPr wrap="square" anchor="t">
-            <a:spAutoFit/>
-          </a:bodyPr>
-          <a:lstStyle/>
-          <a:p>
-            <a:pPr algn="l"/>
-            <a:r>
-              <a:rPr sz="1600" b="1">
-                <a:solidFill>
-                  <a:srgbClr val="6FCF97"/>
-                </a:solidFill>
-                <a:latin typeface="Arial"/>
-              </a:rPr>
-              <a:t>極米（XGIMI）</a:t>
-            </a:r>
-          </a:p>
-        </p:txBody>
-      </p:sp>
-      <p:sp>
-        <p:nvSpPr>
-          <p:cNvPr id="15" name="TextBox 14"/>
-          <p:cNvSpPr txBox="1"/>
-          <p:nvPr/>
-        </p:nvSpPr>
-        <p:spPr>
-          <a:xfrm>
-            <a:off x="749808" y="4750307"/>
-            <a:ext cx="3143402" cy="1440180"/>
-          </a:xfrm>
-          <a:prstGeom prst="rect">
-            <a:avLst/>
-          </a:prstGeom>
-          <a:noFill/>
-        </p:spPr>
-        <p:txBody>
-          <a:bodyPr wrap="square">
-            <a:spAutoFit/>
-          </a:bodyPr>
-          <a:lstStyle/>
-          <a:p>
-            <a:pPr>
-              <a:lnSpc>
-                <a:spcPct val="120000"/>
-              </a:lnSpc>
-            </a:pPr>
-            <a:r>
-              <a:rPr sz="1300">
-                <a:solidFill>
-                  <a:srgbClr val="F5F3EC"/>
-                </a:solidFill>
-                <a:latin typeface="Arial"/>
-              </a:rPr>
-              <a:t>攜手美國客製化安裝商 AWALL 推出高端品牌「XWALL by XGIMI」，結合光學工程與在地安裝服務切入北美高端影院市場（ProjectorCentral）。</a:t>
-            </a:r>
-          </a:p>
-        </p:txBody>
-      </p:sp>
-      <p:sp>
-        <p:nvSpPr>
-          <p:cNvPr id="16" name="Rounded Rectangle 15"/>
-          <p:cNvSpPr/>
-          <p:nvPr/>
-        </p:nvSpPr>
-        <p:spPr>
-          <a:xfrm>
-            <a:off x="4322978" y="4091939"/>
-            <a:ext cx="3545738" cy="2263140"/>
-          </a:xfrm>
-          <a:prstGeom prst="roundRect">
-            <a:avLst>
-              <a:gd name="adj" fmla="val 6000"/>
-            </a:avLst>
-          </a:prstGeom>
-          <a:solidFill>
-            <a:srgbClr val="23262F"/>
-          </a:solidFill>
-          <a:ln w="12700">
-            <a:solidFill>
-              <a:srgbClr val="4C7EFF"/>
-            </a:solidFill>
-          </a:ln>
-          <a:effectLst/>
-        </p:spPr>
-        <p:style>
-          <a:lnRef idx="1">
-            <a:schemeClr val="accent1"/>
-          </a:lnRef>
-          <a:fillRef idx="3">
-            <a:schemeClr val="accent1"/>
-          </a:fillRef>
-          <a:effectRef idx="2">
-            <a:schemeClr val="accent1"/>
-          </a:effectRef>
-          <a:fontRef idx="minor">
-            <a:schemeClr val="lt1"/>
-          </a:fontRef>
-        </p:style>
-        <p:txBody>
-          <a:bodyPr rtlCol="0" anchor="ctr"/>
-          <a:lstStyle/>
-          <a:p>
-            <a:pPr algn="ctr"/>
-          </a:p>
-        </p:txBody>
-      </p:sp>
-      <p:sp>
-        <p:nvSpPr>
-          <p:cNvPr id="17" name="TextBox 16"/>
-          <p:cNvSpPr txBox="1"/>
-          <p:nvPr/>
-        </p:nvSpPr>
-        <p:spPr>
-          <a:xfrm>
-            <a:off x="4524146" y="4256531"/>
-            <a:ext cx="3143402" cy="457200"/>
-          </a:xfrm>
-          <a:prstGeom prst="rect">
-            <a:avLst/>
-          </a:prstGeom>
-          <a:noFill/>
-        </p:spPr>
-        <p:txBody>
-          <a:bodyPr wrap="square" anchor="t">
-            <a:spAutoFit/>
-          </a:bodyPr>
-          <a:lstStyle/>
-          <a:p>
-            <a:pPr algn="l"/>
-            <a:r>
-              <a:rPr sz="1600" b="1">
-                <a:solidFill>
-                  <a:srgbClr val="4C7EFF"/>
-                </a:solidFill>
-                <a:latin typeface="Arial"/>
-              </a:rPr>
-              <a:t>Nebula（安克）</a:t>
-            </a:r>
-          </a:p>
-        </p:txBody>
-      </p:sp>
-      <p:sp>
-        <p:nvSpPr>
-          <p:cNvPr id="18" name="TextBox 17"/>
-          <p:cNvSpPr txBox="1"/>
-          <p:nvPr/>
-        </p:nvSpPr>
-        <p:spPr>
-          <a:xfrm>
-            <a:off x="4524146" y="4750307"/>
-            <a:ext cx="3143402" cy="1440180"/>
-          </a:xfrm>
-          <a:prstGeom prst="rect">
-            <a:avLst/>
-          </a:prstGeom>
-          <a:noFill/>
-        </p:spPr>
-        <p:txBody>
-          <a:bodyPr wrap="square">
-            <a:spAutoFit/>
-          </a:bodyPr>
-          <a:lstStyle/>
-          <a:p>
-            <a:pPr>
-              <a:lnSpc>
-                <a:spcPct val="120000"/>
-              </a:lnSpc>
-            </a:pPr>
-            <a:r>
-              <a:rPr sz="1300">
-                <a:solidFill>
-                  <a:srgbClr val="F5F3EC"/>
-                </a:solidFill>
-                <a:latin typeface="Arial"/>
-              </a:rPr>
-              <a:t>發表升級版 X1S 戶外 4K 三色雷射投影機，具備 6,000 流明超高亮度，專為戶外大屏觀影設計（ProjectorCentral）。</a:t>
-            </a:r>
-          </a:p>
-        </p:txBody>
-      </p:sp>
-      <p:sp>
-        <p:nvSpPr>
-          <p:cNvPr id="19" name="Rounded Rectangle 18"/>
-          <p:cNvSpPr/>
-          <p:nvPr/>
-        </p:nvSpPr>
-        <p:spPr>
-          <a:xfrm>
-            <a:off x="8097316" y="4091939"/>
-            <a:ext cx="3545738" cy="2263140"/>
-          </a:xfrm>
-          <a:prstGeom prst="roundRect">
-            <a:avLst>
-              <a:gd name="adj" fmla="val 6000"/>
-            </a:avLst>
-          </a:prstGeom>
-          <a:solidFill>
-            <a:srgbClr val="23262F"/>
-          </a:solidFill>
-          <a:ln w="12700">
-            <a:solidFill>
-              <a:srgbClr val="FFB454"/>
-            </a:solidFill>
-          </a:ln>
-          <a:effectLst/>
-        </p:spPr>
-        <p:style>
-          <a:lnRef idx="1">
-            <a:schemeClr val="accent1"/>
-          </a:lnRef>
-          <a:fillRef idx="3">
-            <a:schemeClr val="accent1"/>
-          </a:fillRef>
-          <a:effectRef idx="2">
-            <a:schemeClr val="accent1"/>
-          </a:effectRef>
-          <a:fontRef idx="minor">
-            <a:schemeClr val="lt1"/>
-          </a:fontRef>
-        </p:style>
-        <p:txBody>
-          <a:bodyPr rtlCol="0" anchor="ctr"/>
-          <a:lstStyle/>
-          <a:p>
-            <a:pPr algn="ctr"/>
-          </a:p>
-        </p:txBody>
-      </p:sp>
-      <p:sp>
-        <p:nvSpPr>
-          <p:cNvPr id="20" name="TextBox 19"/>
-          <p:cNvSpPr txBox="1"/>
-          <p:nvPr/>
-        </p:nvSpPr>
-        <p:spPr>
-          <a:xfrm>
-            <a:off x="8298484" y="4256531"/>
-            <a:ext cx="3143402" cy="457200"/>
-          </a:xfrm>
-          <a:prstGeom prst="rect">
-            <a:avLst/>
-          </a:prstGeom>
-          <a:noFill/>
-        </p:spPr>
-        <p:txBody>
-          <a:bodyPr wrap="square" anchor="t">
-            <a:spAutoFit/>
-          </a:bodyPr>
-          <a:lstStyle/>
-          <a:p>
-            <a:pPr algn="l"/>
-            <a:r>
-              <a:rPr sz="1600" b="1">
-                <a:solidFill>
-                  <a:srgbClr val="FFB454"/>
-                </a:solidFill>
-                <a:latin typeface="Arial"/>
-              </a:rPr>
-              <a:t>明基（BenQ）</a:t>
-            </a:r>
-          </a:p>
-        </p:txBody>
-      </p:sp>
-      <p:sp>
-        <p:nvSpPr>
-          <p:cNvPr id="21" name="TextBox 20"/>
-          <p:cNvSpPr txBox="1"/>
-          <p:nvPr/>
-        </p:nvSpPr>
-        <p:spPr>
-          <a:xfrm>
-            <a:off x="8298484" y="4750307"/>
-            <a:ext cx="3143402" cy="1440180"/>
-          </a:xfrm>
-          <a:prstGeom prst="rect">
-            <a:avLst/>
-          </a:prstGeom>
-          <a:noFill/>
-        </p:spPr>
-        <p:txBody>
-          <a:bodyPr wrap="square">
-            <a:spAutoFit/>
-          </a:bodyPr>
-          <a:lstStyle/>
-          <a:p>
-            <a:pPr>
-              <a:lnSpc>
-                <a:spcPct val="120000"/>
-              </a:lnSpc>
-            </a:pPr>
-            <a:r>
-              <a:rPr sz="1300">
-                <a:solidFill>
-                  <a:srgbClr val="F5F3EC"/>
-                </a:solidFill>
-                <a:latin typeface="Arial"/>
-              </a:rPr>
-              <a:t>發表 LH660 雷射商用投影機，具備 4600 流明、1080P 解析度與 IP6X 防塵密封光機，首發價 9,499 元人民幣（IT之家）。</a:t>
-            </a:r>
-          </a:p>
-        </p:txBody>
-      </p:sp>
-      <p:sp>
-        <p:nvSpPr>
-          <p:cNvPr id="22" name="TextBox 21"/>
           <p:cNvSpPr txBox="1"/>
           <p:nvPr/>
         </p:nvSpPr>
@@ -5803,7 +6193,7 @@
                 </a:solidFill>
                 <a:latin typeface="Arial"/>
               </a:rPr>
-              <a:t>06 · SECTION　✨</a:t>
+              <a:t>06 · SECTION　📊</a:t>
             </a:r>
           </a:p>
         </p:txBody>
@@ -5838,7 +6228,7 @@
                 </a:solidFill>
                 <a:latin typeface="Arial"/>
               </a:rPr>
-              <a:t>三、新品與品牌動態（2/2）</a:t>
+              <a:t>二、市場數據</a:t>
             </a:r>
           </a:p>
         </p:txBody>
@@ -5852,7 +6242,7 @@
         <p:spPr>
           <a:xfrm>
             <a:off x="548640" y="1600200"/>
-            <a:ext cx="3545738" cy="4754880"/>
+            <a:ext cx="3545738" cy="2263140"/>
           </a:xfrm>
           <a:prstGeom prst="roundRect">
             <a:avLst>
@@ -5915,13 +6305,13 @@
           <a:p>
             <a:pPr algn="l"/>
             <a:r>
-              <a:rPr sz="1800" b="1">
+              <a:rPr sz="1600" b="1">
                 <a:solidFill>
                   <a:srgbClr val="4C7EFF"/>
                 </a:solidFill>
                 <a:latin typeface="Arial"/>
               </a:rPr>
-              <a:t>REDMI</a:t>
+              <a:t>全球投影機市場</a:t>
             </a:r>
           </a:p>
         </p:txBody>
@@ -5935,7 +6325,7 @@
         <p:spPr>
           <a:xfrm>
             <a:off x="749808" y="2258568"/>
-            <a:ext cx="3143402" cy="3931920"/>
+            <a:ext cx="3143402" cy="1440180"/>
           </a:xfrm>
           <a:prstGeom prst="rect">
             <a:avLst/>
@@ -5944,7 +6334,7 @@
         </p:spPr>
         <p:txBody>
           <a:bodyPr wrap="square">
-            <a:spAutoFit/>
+            <a:normAutofit/>
           </a:bodyPr>
           <a:lstStyle/>
           <a:p>
@@ -5954,13 +6344,13 @@
               </a:lnSpc>
             </a:pPr>
             <a:r>
-              <a:rPr sz="1400">
+              <a:rPr sz="1300">
                 <a:solidFill>
                   <a:srgbClr val="F5F3EC"/>
                 </a:solidFill>
                 <a:latin typeface="Arial"/>
               </a:rPr>
-              <a:t>發布 REDMI 投影機 5，主打一體式金屬雲台與 360 度旋轉全自動校正，預售價 999 元人民幣（ZOL投影機頻道）。</a:t>
+              <a:t>2026 上半年中國國內銷量受政策退潮與需求飽和影響大幅下滑 26%，海外市場則在品牌業者出海帶動下逆勢成長（洛圖科技、投影時代）。</a:t>
             </a:r>
           </a:p>
         </p:txBody>
@@ -5974,7 +6364,7 @@
         <p:spPr>
           <a:xfrm>
             <a:off x="4322978" y="1600200"/>
-            <a:ext cx="3545738" cy="4754880"/>
+            <a:ext cx="3545738" cy="2263140"/>
           </a:xfrm>
           <a:prstGeom prst="roundRect">
             <a:avLst>
@@ -6037,13 +6427,13 @@
           <a:p>
             <a:pPr algn="l"/>
             <a:r>
-              <a:rPr sz="1800" b="1">
+              <a:rPr sz="1600" b="1">
                 <a:solidFill>
                   <a:srgbClr val="FFB454"/>
                 </a:solidFill>
                 <a:latin typeface="Arial"/>
               </a:rPr>
-              <a:t>JVC</a:t>
+              <a:t>極米科技</a:t>
             </a:r>
           </a:p>
         </p:txBody>
@@ -6057,7 +6447,7 @@
         <p:spPr>
           <a:xfrm>
             <a:off x="4524146" y="2258568"/>
-            <a:ext cx="3143402" cy="3931920"/>
+            <a:ext cx="3143402" cy="1440180"/>
           </a:xfrm>
           <a:prstGeom prst="rect">
             <a:avLst/>
@@ -6066,7 +6456,7 @@
         </p:spPr>
         <p:txBody>
           <a:bodyPr wrap="square">
-            <a:spAutoFit/>
+            <a:normAutofit/>
           </a:bodyPr>
           <a:lstStyle/>
           <a:p>
@@ -6076,13 +6466,13 @@
               </a:lnSpc>
             </a:pPr>
             <a:r>
-              <a:rPr sz="1400">
+              <a:rPr sz="1300">
                 <a:solidFill>
                   <a:srgbClr val="F5F3EC"/>
                 </a:solidFill>
                 <a:latin typeface="Arial"/>
               </a:rPr>
-              <a:t>預告於 CEDIA 2026 展示 DLA-NZ900 與 DLA-NZ800 旗艦投影機，主打 8K 家庭劇院與原生 4K/120p 電競高刷新率畫面（ProjectorCentral）。</a:t>
+              <a:t>2026 上半年憑藉海外收入年增 87.63%，拉升整體毛利率至 39%，並積極布局三色雷射商顯與車載光學市場（投影時代）。</a:t>
             </a:r>
           </a:p>
         </p:txBody>
@@ -6096,7 +6486,7 @@
         <p:spPr>
           <a:xfrm>
             <a:off x="8097316" y="1600200"/>
-            <a:ext cx="3545738" cy="4754880"/>
+            <a:ext cx="3545738" cy="2263140"/>
           </a:xfrm>
           <a:prstGeom prst="roundRect">
             <a:avLst>
@@ -6159,13 +6549,13 @@
           <a:p>
             <a:pPr algn="l"/>
             <a:r>
-              <a:rPr sz="1800" b="1">
+              <a:rPr sz="1600" b="1">
                 <a:solidFill>
                   <a:srgbClr val="8B7FD6"/>
                 </a:solidFill>
                 <a:latin typeface="Arial"/>
               </a:rPr>
-              <a:t>愛普生（Epson）</a:t>
+              <a:t>安克創新（Nebula）</a:t>
             </a:r>
           </a:p>
         </p:txBody>
@@ -6179,7 +6569,7 @@
         <p:spPr>
           <a:xfrm>
             <a:off x="8298484" y="2258568"/>
-            <a:ext cx="3143402" cy="3931920"/>
+            <a:ext cx="3143402" cy="1440180"/>
           </a:xfrm>
           <a:prstGeom prst="rect">
             <a:avLst/>
@@ -6188,7 +6578,7 @@
         </p:spPr>
         <p:txBody>
           <a:bodyPr wrap="square">
-            <a:spAutoFit/>
+            <a:normAutofit/>
           </a:bodyPr>
           <a:lstStyle/>
           <a:p>
@@ -6198,20 +6588,264 @@
               </a:lnSpc>
             </a:pPr>
             <a:r>
-              <a:rPr sz="1400">
+              <a:rPr sz="1300">
                 <a:solidFill>
                   <a:srgbClr val="F5F3EC"/>
                 </a:solidFill>
                 <a:latin typeface="Arial"/>
               </a:rPr>
-              <a:t>以 48 台高亮激光工程投影機打造上海《永不消失的黑水城》3400 平方公尺沉浸展，並於年度各展會累計獲得 16 項影音與教育產業大獎（投影時代、Epson官方）。</a:t>
-            </a:r>
-          </a:p>
-        </p:txBody>
-      </p:sp>
-      <p:sp>
-        <p:nvSpPr>
-          <p:cNvPr id="13" name="TextBox 12"/>
+              <a:t>2026 上半年總營收達 166.05 億元人民幣（年增 29.05%），其中包含 Nebula 投影機在內的智慧影音板塊營收達 34.85 億元人民幣（年增 24.53%）（投影時代）。</a:t>
+            </a:r>
+          </a:p>
+        </p:txBody>
+      </p:sp>
+      <p:sp>
+        <p:nvSpPr>
+          <p:cNvPr id="13" name="Rounded Rectangle 12"/>
+          <p:cNvSpPr/>
+          <p:nvPr/>
+        </p:nvSpPr>
+        <p:spPr>
+          <a:xfrm>
+            <a:off x="548640" y="4091939"/>
+            <a:ext cx="3545738" cy="2263140"/>
+          </a:xfrm>
+          <a:prstGeom prst="roundRect">
+            <a:avLst>
+              <a:gd name="adj" fmla="val 6000"/>
+            </a:avLst>
+          </a:prstGeom>
+          <a:solidFill>
+            <a:srgbClr val="23262F"/>
+          </a:solidFill>
+          <a:ln w="12700">
+            <a:solidFill>
+              <a:srgbClr val="6FCF97"/>
+            </a:solidFill>
+          </a:ln>
+          <a:effectLst/>
+        </p:spPr>
+        <p:style>
+          <a:lnRef idx="1">
+            <a:schemeClr val="accent1"/>
+          </a:lnRef>
+          <a:fillRef idx="3">
+            <a:schemeClr val="accent1"/>
+          </a:fillRef>
+          <a:effectRef idx="2">
+            <a:schemeClr val="accent1"/>
+          </a:effectRef>
+          <a:fontRef idx="minor">
+            <a:schemeClr val="lt1"/>
+          </a:fontRef>
+        </p:style>
+        <p:txBody>
+          <a:bodyPr rtlCol="0" anchor="ctr"/>
+          <a:lstStyle/>
+          <a:p>
+            <a:pPr algn="ctr"/>
+          </a:p>
+        </p:txBody>
+      </p:sp>
+      <p:sp>
+        <p:nvSpPr>
+          <p:cNvPr id="14" name="TextBox 13"/>
+          <p:cNvSpPr txBox="1"/>
+          <p:nvPr/>
+        </p:nvSpPr>
+        <p:spPr>
+          <a:xfrm>
+            <a:off x="749808" y="4256531"/>
+            <a:ext cx="3143402" cy="457200"/>
+          </a:xfrm>
+          <a:prstGeom prst="rect">
+            <a:avLst/>
+          </a:prstGeom>
+          <a:noFill/>
+        </p:spPr>
+        <p:txBody>
+          <a:bodyPr wrap="square" anchor="t">
+            <a:spAutoFit/>
+          </a:bodyPr>
+          <a:lstStyle/>
+          <a:p>
+            <a:pPr algn="l"/>
+            <a:r>
+              <a:rPr sz="1600" b="1">
+                <a:solidFill>
+                  <a:srgbClr val="6FCF97"/>
+                </a:solidFill>
+                <a:latin typeface="Arial"/>
+              </a:rPr>
+              <a:t>中光學</a:t>
+            </a:r>
+          </a:p>
+        </p:txBody>
+      </p:sp>
+      <p:sp>
+        <p:nvSpPr>
+          <p:cNvPr id="15" name="TextBox 14"/>
+          <p:cNvSpPr txBox="1"/>
+          <p:nvPr/>
+        </p:nvSpPr>
+        <p:spPr>
+          <a:xfrm>
+            <a:off x="749808" y="4750307"/>
+            <a:ext cx="3143402" cy="1440180"/>
+          </a:xfrm>
+          <a:prstGeom prst="rect">
+            <a:avLst/>
+          </a:prstGeom>
+          <a:noFill/>
+        </p:spPr>
+        <p:txBody>
+          <a:bodyPr wrap="square">
+            <a:normAutofit/>
+          </a:bodyPr>
+          <a:lstStyle/>
+          <a:p>
+            <a:pPr>
+              <a:lnSpc>
+                <a:spcPct val="120000"/>
+              </a:lnSpc>
+            </a:pPr>
+            <a:r>
+              <a:rPr sz="1300">
+                <a:solidFill>
+                  <a:srgbClr val="F5F3EC"/>
+                </a:solidFill>
+                <a:latin typeface="Arial"/>
+              </a:rPr>
+              <a:t>2026 上半年營收達 7.25 億元人民幣（年增 6.71%），淨虧損同比縮減 39.95%，其中投影機整機及配件營收為 1.18 億元人民幣（年減 5.72%）（投影時代）。</a:t>
+            </a:r>
+          </a:p>
+        </p:txBody>
+      </p:sp>
+      <p:sp>
+        <p:nvSpPr>
+          <p:cNvPr id="16" name="Rounded Rectangle 15"/>
+          <p:cNvSpPr/>
+          <p:nvPr/>
+        </p:nvSpPr>
+        <p:spPr>
+          <a:xfrm>
+            <a:off x="4322978" y="4091939"/>
+            <a:ext cx="3545738" cy="2263140"/>
+          </a:xfrm>
+          <a:prstGeom prst="roundRect">
+            <a:avLst>
+              <a:gd name="adj" fmla="val 6000"/>
+            </a:avLst>
+          </a:prstGeom>
+          <a:solidFill>
+            <a:srgbClr val="23262F"/>
+          </a:solidFill>
+          <a:ln w="12700">
+            <a:solidFill>
+              <a:srgbClr val="4C7EFF"/>
+            </a:solidFill>
+          </a:ln>
+          <a:effectLst/>
+        </p:spPr>
+        <p:style>
+          <a:lnRef idx="1">
+            <a:schemeClr val="accent1"/>
+          </a:lnRef>
+          <a:fillRef idx="3">
+            <a:schemeClr val="accent1"/>
+          </a:fillRef>
+          <a:effectRef idx="2">
+            <a:schemeClr val="accent1"/>
+          </a:effectRef>
+          <a:fontRef idx="minor">
+            <a:schemeClr val="lt1"/>
+          </a:fontRef>
+        </p:style>
+        <p:txBody>
+          <a:bodyPr rtlCol="0" anchor="ctr"/>
+          <a:lstStyle/>
+          <a:p>
+            <a:pPr algn="ctr"/>
+          </a:p>
+        </p:txBody>
+      </p:sp>
+      <p:sp>
+        <p:nvSpPr>
+          <p:cNvPr id="17" name="TextBox 16"/>
+          <p:cNvSpPr txBox="1"/>
+          <p:nvPr/>
+        </p:nvSpPr>
+        <p:spPr>
+          <a:xfrm>
+            <a:off x="4524146" y="4256531"/>
+            <a:ext cx="3143402" cy="457200"/>
+          </a:xfrm>
+          <a:prstGeom prst="rect">
+            <a:avLst/>
+          </a:prstGeom>
+          <a:noFill/>
+        </p:spPr>
+        <p:txBody>
+          <a:bodyPr wrap="square" anchor="t">
+            <a:spAutoFit/>
+          </a:bodyPr>
+          <a:lstStyle/>
+          <a:p>
+            <a:pPr algn="l"/>
+            <a:r>
+              <a:rPr sz="1600" b="1">
+                <a:solidFill>
+                  <a:srgbClr val="4C7EFF"/>
+                </a:solidFill>
+                <a:latin typeface="Arial"/>
+              </a:rPr>
+              <a:t>區域通路行情</a:t>
+            </a:r>
+          </a:p>
+        </p:txBody>
+      </p:sp>
+      <p:sp>
+        <p:nvSpPr>
+          <p:cNvPr id="18" name="TextBox 17"/>
+          <p:cNvSpPr txBox="1"/>
+          <p:nvPr/>
+        </p:nvSpPr>
+        <p:spPr>
+          <a:xfrm>
+            <a:off x="4524146" y="4750307"/>
+            <a:ext cx="3143402" cy="1440180"/>
+          </a:xfrm>
+          <a:prstGeom prst="rect">
+            <a:avLst/>
+          </a:prstGeom>
+          <a:noFill/>
+        </p:spPr>
+        <p:txBody>
+          <a:bodyPr wrap="square">
+            <a:normAutofit/>
+          </a:bodyPr>
+          <a:lstStyle/>
+          <a:p>
+            <a:pPr>
+              <a:lnSpc>
+                <a:spcPct val="120000"/>
+              </a:lnSpc>
+            </a:pPr>
+            <a:r>
+              <a:rPr sz="1300">
+                <a:solidFill>
+                  <a:srgbClr val="F5F3EC"/>
+                </a:solidFill>
+                <a:latin typeface="Arial"/>
+              </a:rPr>
+              <a:t>松下、愛普生、明基、索諾克與易仁科技等品牌多款商用及工程投影機種，本月於北京實體經銷通路集中展開特價促銷（ZOL投影機頻道）。</a:t>
+            </a:r>
+          </a:p>
+        </p:txBody>
+      </p:sp>
+      <p:sp>
+        <p:nvSpPr>
+          <p:cNvPr id="19" name="TextBox 18"/>
           <p:cNvSpPr txBox="1"/>
           <p:nvPr/>
         </p:nvSpPr>
@@ -6300,7 +6934,7 @@
                 </a:solidFill>
                 <a:latin typeface="Arial"/>
               </a:rPr>
-              <a:t>07 · SECTION　🔧</a:t>
+              <a:t>07 · SECTION　✨</a:t>
             </a:r>
           </a:p>
         </p:txBody>
@@ -6335,380 +6969,492 @@
                 </a:solidFill>
                 <a:latin typeface="Arial"/>
               </a:rPr>
-              <a:t>四、技術動態</a:t>
-            </a:r>
-          </a:p>
-        </p:txBody>
-      </p:sp>
-      <p:sp>
-        <p:nvSpPr>
-          <p:cNvPr id="4" name="Rounded Rectangle 3"/>
-          <p:cNvSpPr/>
-          <p:nvPr/>
-        </p:nvSpPr>
-        <p:spPr>
-          <a:xfrm>
-            <a:off x="548640" y="1600200"/>
-            <a:ext cx="3545738" cy="4754880"/>
-          </a:xfrm>
-          <a:prstGeom prst="roundRect">
-            <a:avLst>
-              <a:gd name="adj" fmla="val 6000"/>
-            </a:avLst>
-          </a:prstGeom>
-          <a:solidFill>
-            <a:srgbClr val="23262F"/>
-          </a:solidFill>
-          <a:ln w="12700">
-            <a:solidFill>
-              <a:srgbClr val="4C7EFF"/>
-            </a:solidFill>
-          </a:ln>
-          <a:effectLst/>
-        </p:spPr>
-        <p:style>
-          <a:lnRef idx="1">
-            <a:schemeClr val="accent1"/>
-          </a:lnRef>
-          <a:fillRef idx="3">
-            <a:schemeClr val="accent1"/>
-          </a:fillRef>
-          <a:effectRef idx="2">
-            <a:schemeClr val="accent1"/>
-          </a:effectRef>
-          <a:fontRef idx="minor">
-            <a:schemeClr val="lt1"/>
-          </a:fontRef>
-        </p:style>
-        <p:txBody>
-          <a:bodyPr rtlCol="0" anchor="ctr"/>
-          <a:lstStyle/>
-          <a:p>
-            <a:pPr algn="ctr"/>
-          </a:p>
-        </p:txBody>
-      </p:sp>
+              <a:t>三、新品與品牌動態</a:t>
+            </a:r>
+          </a:p>
+        </p:txBody>
+      </p:sp>
+      <p:graphicFrame>
+        <p:nvGraphicFramePr>
+          <p:cNvPr id="4" name="Table 3"/>
+          <p:cNvGraphicFramePr>
+            <a:graphicFrameLocks noGrp="1"/>
+          </p:cNvGraphicFramePr>
+          <p:nvPr/>
+        </p:nvGraphicFramePr>
+        <p:xfrm>
+          <a:off x="548640" y="1691640"/>
+          <a:ext cx="11094415" cy="2514600"/>
+        </p:xfrm>
+        <a:graphic>
+          <a:graphicData uri="http://schemas.openxmlformats.org/drawingml/2006/table">
+            <a:tbl>
+              <a:tblPr bandRow="1">
+                <a:tableStyleId>{5C22544A-7EE6-4342-B048-85BDC9FD1C3A}</a:tableStyleId>
+              </a:tblPr>
+              <a:tblGrid>
+                <a:gridCol w="2773603"/>
+                <a:gridCol w="2773603"/>
+                <a:gridCol w="2773603"/>
+                <a:gridCol w="2773606"/>
+              </a:tblGrid>
+              <a:tr h="502920">
+                <a:tc>
+                  <a:txBody>
+                    <a:bodyPr/>
+                    <a:lstStyle/>
+                    <a:p>
+                      <a:r>
+                        <a:rPr sz="1300" b="1">
+                          <a:solidFill>
+                            <a:srgbClr val="FFB454"/>
+                          </a:solidFill>
+                          <a:latin typeface="Arial"/>
+                        </a:rPr>
+                        <a:t>型號</a:t>
+                      </a:r>
+                    </a:p>
+                  </a:txBody>
+                  <a:tcPr marL="91440" marR="91440" anchor="ctr">
+                    <a:solidFill>
+                      <a:srgbClr val="23262F"/>
+                    </a:solidFill>
+                  </a:tcPr>
+                </a:tc>
+                <a:tc>
+                  <a:txBody>
+                    <a:bodyPr/>
+                    <a:lstStyle/>
+                    <a:p>
+                      <a:r>
+                        <a:rPr sz="1300" b="1">
+                          <a:solidFill>
+                            <a:srgbClr val="FFB454"/>
+                          </a:solidFill>
+                          <a:latin typeface="Arial"/>
+                        </a:rPr>
+                        <a:t>顯示技術與規格</a:t>
+                      </a:r>
+                    </a:p>
+                  </a:txBody>
+                  <a:tcPr marL="91440" marR="91440" anchor="ctr">
+                    <a:solidFill>
+                      <a:srgbClr val="23262F"/>
+                    </a:solidFill>
+                  </a:tcPr>
+                </a:tc>
+                <a:tc>
+                  <a:txBody>
+                    <a:bodyPr/>
+                    <a:lstStyle/>
+                    <a:p>
+                      <a:r>
+                        <a:rPr sz="1300" b="1">
+                          <a:solidFill>
+                            <a:srgbClr val="FFB454"/>
+                          </a:solidFill>
+                          <a:latin typeface="Arial"/>
+                        </a:rPr>
+                        <a:t>亮度與重點特色</a:t>
+                      </a:r>
+                    </a:p>
+                  </a:txBody>
+                  <a:tcPr marL="91440" marR="91440" anchor="ctr">
+                    <a:solidFill>
+                      <a:srgbClr val="23262F"/>
+                    </a:solidFill>
+                  </a:tcPr>
+                </a:tc>
+                <a:tc>
+                  <a:txBody>
+                    <a:bodyPr/>
+                    <a:lstStyle/>
+                    <a:p>
+                      <a:r>
+                        <a:rPr sz="1300" b="1">
+                          <a:solidFill>
+                            <a:srgbClr val="FFB454"/>
+                          </a:solidFill>
+                          <a:latin typeface="Arial"/>
+                        </a:rPr>
+                        <a:t>官方/促銷售價</a:t>
+                      </a:r>
+                    </a:p>
+                  </a:txBody>
+                  <a:tcPr marL="91440" marR="91440" anchor="ctr">
+                    <a:solidFill>
+                      <a:srgbClr val="23262F"/>
+                    </a:solidFill>
+                  </a:tcPr>
+                </a:tc>
+              </a:tr>
+              <a:tr h="502920">
+                <a:tc>
+                  <a:txBody>
+                    <a:bodyPr/>
+                    <a:lstStyle/>
+                    <a:p>
+                      <a:r>
+                        <a:rPr sz="1200" b="0">
+                          <a:solidFill>
+                            <a:srgbClr val="F5F3EC"/>
+                          </a:solidFill>
+                          <a:latin typeface="Arial"/>
+                        </a:rPr>
+                        <a:t>REDMI 投影機 5</a:t>
+                      </a:r>
+                    </a:p>
+                  </a:txBody>
+                  <a:tcPr marL="91440" marR="91440" anchor="ctr">
+                    <a:solidFill>
+                      <a:srgbClr val="1C1F26"/>
+                    </a:solidFill>
+                  </a:tcPr>
+                </a:tc>
+                <a:tc>
+                  <a:txBody>
+                    <a:bodyPr/>
+                    <a:lstStyle/>
+                    <a:p>
+                      <a:r>
+                        <a:rPr sz="1200" b="0">
+                          <a:solidFill>
+                            <a:srgbClr val="F5F3EC"/>
+                          </a:solidFill>
+                          <a:latin typeface="Arial"/>
+                        </a:rPr>
+                        <a:t>1080P/一體式金屬雲台</a:t>
+                      </a:r>
+                    </a:p>
+                  </a:txBody>
+                  <a:tcPr marL="91440" marR="91440" anchor="ctr">
+                    <a:solidFill>
+                      <a:srgbClr val="1C1F26"/>
+                    </a:solidFill>
+                  </a:tcPr>
+                </a:tc>
+                <a:tc>
+                  <a:txBody>
+                    <a:bodyPr/>
+                    <a:lstStyle/>
+                    <a:p>
+                      <a:r>
+                        <a:rPr sz="1200" b="0">
+                          <a:solidFill>
+                            <a:srgbClr val="F5F3EC"/>
+                          </a:solidFill>
+                          <a:latin typeface="Arial"/>
+                        </a:rPr>
+                        <a:t>400 CVIA 流明/360度旋轉</a:t>
+                      </a:r>
+                    </a:p>
+                  </a:txBody>
+                  <a:tcPr marL="91440" marR="91440" anchor="ctr">
+                    <a:solidFill>
+                      <a:srgbClr val="1C1F26"/>
+                    </a:solidFill>
+                  </a:tcPr>
+                </a:tc>
+                <a:tc>
+                  <a:txBody>
+                    <a:bodyPr/>
+                    <a:lstStyle/>
+                    <a:p>
+                      <a:r>
+                        <a:rPr sz="1200" b="0">
+                          <a:solidFill>
+                            <a:srgbClr val="F5F3EC"/>
+                          </a:solidFill>
+                          <a:latin typeface="Arial"/>
+                        </a:rPr>
+                        <a:t>999-1</a:t>
+                      </a:r>
+                    </a:p>
+                  </a:txBody>
+                  <a:tcPr marL="91440" marR="91440" anchor="ctr">
+                    <a:solidFill>
+                      <a:srgbClr val="1C1F26"/>
+                    </a:solidFill>
+                  </a:tcPr>
+                </a:tc>
+              </a:tr>
+              <a:tr h="502920">
+                <a:tc>
+                  <a:txBody>
+                    <a:bodyPr/>
+                    <a:lstStyle/>
+                    <a:p>
+                      <a:r>
+                        <a:rPr sz="1200" b="0">
+                          <a:solidFill>
+                            <a:srgbClr val="F5F3EC"/>
+                          </a:solidFill>
+                          <a:latin typeface="Arial"/>
+                        </a:rPr>
+                        <a:t>當貝 RX10</a:t>
+                      </a:r>
+                    </a:p>
+                  </a:txBody>
+                  <a:tcPr marL="91440" marR="91440" anchor="ctr">
+                    <a:solidFill>
+                      <a:srgbClr val="23262F"/>
+                    </a:solidFill>
+                  </a:tcPr>
+                </a:tc>
+                <a:tc>
+                  <a:txBody>
+                    <a:bodyPr/>
+                    <a:lstStyle/>
+                    <a:p>
+                      <a:r>
+                        <a:rPr sz="1200" b="0">
+                          <a:solidFill>
+                            <a:srgbClr val="F5F3EC"/>
+                          </a:solidFill>
+                          <a:latin typeface="Arial"/>
+                        </a:rPr>
+                        <a:t>0.33吋 DMD/MT9669晶片</a:t>
+                      </a:r>
+                    </a:p>
+                  </a:txBody>
+                  <a:tcPr marL="91440" marR="91440" anchor="ctr">
+                    <a:solidFill>
+                      <a:srgbClr val="23262F"/>
+                    </a:solidFill>
+                  </a:tcPr>
+                </a:tc>
+                <a:tc>
+                  <a:txBody>
+                    <a:bodyPr/>
+                    <a:lstStyle/>
+                    <a:p>
+                      <a:r>
+                        <a:rPr sz="1200" b="0">
+                          <a:solidFill>
+                            <a:srgbClr val="F5F3EC"/>
+                          </a:solidFill>
+                          <a:latin typeface="Arial"/>
+                        </a:rPr>
+                        <a:t>1200 CVIA 流明/225度雲台</a:t>
+                      </a:r>
+                    </a:p>
+                  </a:txBody>
+                  <a:tcPr marL="91440" marR="91440" anchor="ctr">
+                    <a:solidFill>
+                      <a:srgbClr val="23262F"/>
+                    </a:solidFill>
+                  </a:tcPr>
+                </a:tc>
+                <a:tc>
+                  <a:txBody>
+                    <a:bodyPr/>
+                    <a:lstStyle/>
+                    <a:p>
+                      <a:r>
+                        <a:rPr sz="1200" b="0">
+                          <a:solidFill>
+                            <a:srgbClr val="F5F3EC"/>
+                          </a:solidFill>
+                          <a:latin typeface="Arial"/>
+                        </a:rPr>
+                        <a:t>5</a:t>
+                      </a:r>
+                    </a:p>
+                  </a:txBody>
+                  <a:tcPr marL="91440" marR="91440" anchor="ctr">
+                    <a:solidFill>
+                      <a:srgbClr val="23262F"/>
+                    </a:solidFill>
+                  </a:tcPr>
+                </a:tc>
+              </a:tr>
+              <a:tr h="502920">
+                <a:tc>
+                  <a:txBody>
+                    <a:bodyPr/>
+                    <a:lstStyle/>
+                    <a:p>
+                      <a:r>
+                        <a:rPr sz="1200" b="0">
+                          <a:solidFill>
+                            <a:srgbClr val="F5F3EC"/>
+                          </a:solidFill>
+                          <a:latin typeface="Arial"/>
+                        </a:rPr>
+                        <a:t>明基 LH660</a:t>
+                      </a:r>
+                    </a:p>
+                  </a:txBody>
+                  <a:tcPr marL="91440" marR="91440" anchor="ctr">
+                    <a:solidFill>
+                      <a:srgbClr val="1C1F26"/>
+                    </a:solidFill>
+                  </a:tcPr>
+                </a:tc>
+                <a:tc>
+                  <a:txBody>
+                    <a:bodyPr/>
+                    <a:lstStyle/>
+                    <a:p>
+                      <a:r>
+                        <a:rPr sz="1200" b="0">
+                          <a:solidFill>
+                            <a:srgbClr val="F5F3EC"/>
+                          </a:solidFill>
+                          <a:latin typeface="Arial"/>
+                        </a:rPr>
+                        <a:t>0.65吋 DMD/IP6X防塵</a:t>
+                      </a:r>
+                    </a:p>
+                  </a:txBody>
+                  <a:tcPr marL="91440" marR="91440" anchor="ctr">
+                    <a:solidFill>
+                      <a:srgbClr val="1C1F26"/>
+                    </a:solidFill>
+                  </a:tcPr>
+                </a:tc>
+                <a:tc>
+                  <a:txBody>
+                    <a:bodyPr/>
+                    <a:lstStyle/>
+                    <a:p>
+                      <a:r>
+                        <a:rPr sz="1200" b="0">
+                          <a:solidFill>
+                            <a:srgbClr val="F5F3EC"/>
+                          </a:solidFill>
+                          <a:latin typeface="Arial"/>
+                        </a:rPr>
+                        <a:t>4</a:t>
+                      </a:r>
+                    </a:p>
+                  </a:txBody>
+                  <a:tcPr marL="91440" marR="91440" anchor="ctr">
+                    <a:solidFill>
+                      <a:srgbClr val="1C1F26"/>
+                    </a:solidFill>
+                  </a:tcPr>
+                </a:tc>
+                <a:tc>
+                  <a:txBody>
+                    <a:bodyPr/>
+                    <a:lstStyle/>
+                    <a:p>
+                      <a:r>
+                        <a:rPr sz="1200" b="0">
+                          <a:solidFill>
+                            <a:srgbClr val="F5F3EC"/>
+                          </a:solidFill>
+                          <a:latin typeface="Arial"/>
+                        </a:rPr>
+                        <a:t>600 流明/1080P 雷射光源</a:t>
+                      </a:r>
+                    </a:p>
+                  </a:txBody>
+                  <a:tcPr marL="91440" marR="91440" anchor="ctr">
+                    <a:solidFill>
+                      <a:srgbClr val="1C1F26"/>
+                    </a:solidFill>
+                  </a:tcPr>
+                </a:tc>
+              </a:tr>
+              <a:tr h="502920">
+                <a:tc>
+                  <a:txBody>
+                    <a:bodyPr/>
+                    <a:lstStyle/>
+                    <a:p>
+                      <a:r>
+                        <a:rPr sz="1200" b="0">
+                          <a:solidFill>
+                            <a:srgbClr val="F5F3EC"/>
+                          </a:solidFill>
+                          <a:latin typeface="Arial"/>
+                        </a:rPr>
+                        <a:t>海信星光 S2 Pro</a:t>
+                      </a:r>
+                    </a:p>
+                  </a:txBody>
+                  <a:tcPr marL="91440" marR="91440" anchor="ctr">
+                    <a:solidFill>
+                      <a:srgbClr val="23262F"/>
+                    </a:solidFill>
+                  </a:tcPr>
+                </a:tc>
+                <a:tc>
+                  <a:txBody>
+                    <a:bodyPr/>
+                    <a:lstStyle/>
+                    <a:p>
+                      <a:r>
+                        <a:rPr sz="1200" b="0">
+                          <a:solidFill>
+                            <a:srgbClr val="F5F3EC"/>
+                          </a:solidFill>
+                          <a:latin typeface="Arial"/>
+                        </a:rPr>
+                        <a:t>三色雷射/哈曼卡頓音響</a:t>
+                      </a:r>
+                    </a:p>
+                  </a:txBody>
+                  <a:tcPr marL="91440" marR="91440" anchor="ctr">
+                    <a:solidFill>
+                      <a:srgbClr val="23262F"/>
+                    </a:solidFill>
+                  </a:tcPr>
+                </a:tc>
+                <a:tc>
+                  <a:txBody>
+                    <a:bodyPr/>
+                    <a:lstStyle/>
+                    <a:p>
+                      <a:r>
+                        <a:rPr sz="1200" b="0">
+                          <a:solidFill>
+                            <a:srgbClr val="F5F3EC"/>
+                          </a:solidFill>
+                          <a:latin typeface="Arial"/>
+                        </a:rPr>
+                        <a:t>80-100吋/IMAX Enhanced認證</a:t>
+                      </a:r>
+                    </a:p>
+                  </a:txBody>
+                  <a:tcPr marL="91440" marR="91440" anchor="ctr">
+                    <a:solidFill>
+                      <a:srgbClr val="23262F"/>
+                    </a:solidFill>
+                  </a:tcPr>
+                </a:tc>
+                <a:tc>
+                  <a:txBody>
+                    <a:bodyPr/>
+                    <a:lstStyle/>
+                    <a:p>
+                      <a:r>
+                        <a:rPr sz="1200" b="0">
+                          <a:solidFill>
+                            <a:srgbClr val="F5F3EC"/>
+                          </a:solidFill>
+                          <a:latin typeface="Arial"/>
+                        </a:rPr>
+                        <a:t>11</a:t>
+                      </a:r>
+                    </a:p>
+                  </a:txBody>
+                  <a:tcPr marL="91440" marR="91440" anchor="ctr">
+                    <a:solidFill>
+                      <a:srgbClr val="23262F"/>
+                    </a:solidFill>
+                  </a:tcPr>
+                </a:tc>
+              </a:tr>
+            </a:tbl>
+          </a:graphicData>
+        </a:graphic>
+      </p:graphicFrame>
       <p:sp>
         <p:nvSpPr>
           <p:cNvPr id="5" name="TextBox 4"/>
-          <p:cNvSpPr txBox="1"/>
-          <p:nvPr/>
-        </p:nvSpPr>
-        <p:spPr>
-          <a:xfrm>
-            <a:off x="749808" y="1764792"/>
-            <a:ext cx="3143402" cy="457200"/>
-          </a:xfrm>
-          <a:prstGeom prst="rect">
-            <a:avLst/>
-          </a:prstGeom>
-          <a:noFill/>
-        </p:spPr>
-        <p:txBody>
-          <a:bodyPr wrap="square" anchor="t">
-            <a:spAutoFit/>
-          </a:bodyPr>
-          <a:lstStyle/>
-          <a:p>
-            <a:pPr algn="l"/>
-            <a:r>
-              <a:rPr sz="1800" b="1">
-                <a:solidFill>
-                  <a:srgbClr val="4C7EFF"/>
-                </a:solidFill>
-                <a:latin typeface="Arial"/>
-              </a:rPr>
-              <a:t>全光學互連技術突破</a:t>
-            </a:r>
-          </a:p>
-        </p:txBody>
-      </p:sp>
-      <p:sp>
-        <p:nvSpPr>
-          <p:cNvPr id="6" name="TextBox 5"/>
-          <p:cNvSpPr txBox="1"/>
-          <p:nvPr/>
-        </p:nvSpPr>
-        <p:spPr>
-          <a:xfrm>
-            <a:off x="749808" y="2258568"/>
-            <a:ext cx="3143402" cy="3931920"/>
-          </a:xfrm>
-          <a:prstGeom prst="rect">
-            <a:avLst/>
-          </a:prstGeom>
-          <a:noFill/>
-        </p:spPr>
-        <p:txBody>
-          <a:bodyPr wrap="square">
-            <a:spAutoFit/>
-          </a:bodyPr>
-          <a:lstStyle/>
-          <a:p>
-            <a:pPr>
-              <a:lnSpc>
-                <a:spcPct val="120000"/>
-              </a:lnSpc>
-            </a:pPr>
-            <a:r>
-              <a:rPr sz="1400">
-                <a:solidFill>
-                  <a:srgbClr val="F5F3EC"/>
-                </a:solidFill>
-                <a:latin typeface="Arial"/>
-              </a:rPr>
-              <a:t>Lightmatter 針對 AI 資料中心 SerDes 逼近 448G 的傳輸瓶頸，提出全光學互連架構藍圖，加速推動算力網路去銅纜化（DigiTimes）。</a:t>
-            </a:r>
-          </a:p>
-        </p:txBody>
-      </p:sp>
-      <p:sp>
-        <p:nvSpPr>
-          <p:cNvPr id="7" name="Rounded Rectangle 6"/>
-          <p:cNvSpPr/>
-          <p:nvPr/>
-        </p:nvSpPr>
-        <p:spPr>
-          <a:xfrm>
-            <a:off x="4322978" y="1600200"/>
-            <a:ext cx="3545738" cy="4754880"/>
-          </a:xfrm>
-          <a:prstGeom prst="roundRect">
-            <a:avLst>
-              <a:gd name="adj" fmla="val 6000"/>
-            </a:avLst>
-          </a:prstGeom>
-          <a:solidFill>
-            <a:srgbClr val="23262F"/>
-          </a:solidFill>
-          <a:ln w="12700">
-            <a:solidFill>
-              <a:srgbClr val="FFB454"/>
-            </a:solidFill>
-          </a:ln>
-          <a:effectLst/>
-        </p:spPr>
-        <p:style>
-          <a:lnRef idx="1">
-            <a:schemeClr val="accent1"/>
-          </a:lnRef>
-          <a:fillRef idx="3">
-            <a:schemeClr val="accent1"/>
-          </a:fillRef>
-          <a:effectRef idx="2">
-            <a:schemeClr val="accent1"/>
-          </a:effectRef>
-          <a:fontRef idx="minor">
-            <a:schemeClr val="lt1"/>
-          </a:fontRef>
-        </p:style>
-        <p:txBody>
-          <a:bodyPr rtlCol="0" anchor="ctr"/>
-          <a:lstStyle/>
-          <a:p>
-            <a:pPr algn="ctr"/>
-          </a:p>
-        </p:txBody>
-      </p:sp>
-      <p:sp>
-        <p:nvSpPr>
-          <p:cNvPr id="8" name="TextBox 7"/>
-          <p:cNvSpPr txBox="1"/>
-          <p:nvPr/>
-        </p:nvSpPr>
-        <p:spPr>
-          <a:xfrm>
-            <a:off x="4524146" y="1764792"/>
-            <a:ext cx="3143402" cy="457200"/>
-          </a:xfrm>
-          <a:prstGeom prst="rect">
-            <a:avLst/>
-          </a:prstGeom>
-          <a:noFill/>
-        </p:spPr>
-        <p:txBody>
-          <a:bodyPr wrap="square" anchor="t">
-            <a:spAutoFit/>
-          </a:bodyPr>
-          <a:lstStyle/>
-          <a:p>
-            <a:pPr algn="l"/>
-            <a:r>
-              <a:rPr sz="1800" b="1">
-                <a:solidFill>
-                  <a:srgbClr val="FFB454"/>
-                </a:solidFill>
-                <a:latin typeface="Arial"/>
-              </a:rPr>
-              <a:t>三色雷射與雲台結構普及</a:t>
-            </a:r>
-          </a:p>
-        </p:txBody>
-      </p:sp>
-      <p:sp>
-        <p:nvSpPr>
-          <p:cNvPr id="9" name="TextBox 8"/>
-          <p:cNvSpPr txBox="1"/>
-          <p:nvPr/>
-        </p:nvSpPr>
-        <p:spPr>
-          <a:xfrm>
-            <a:off x="4524146" y="2258568"/>
-            <a:ext cx="3143402" cy="3931920"/>
-          </a:xfrm>
-          <a:prstGeom prst="rect">
-            <a:avLst/>
-          </a:prstGeom>
-          <a:noFill/>
-        </p:spPr>
-        <p:txBody>
-          <a:bodyPr wrap="square">
-            <a:spAutoFit/>
-          </a:bodyPr>
-          <a:lstStyle/>
-          <a:p>
-            <a:pPr>
-              <a:lnSpc>
-                <a:spcPct val="120000"/>
-              </a:lnSpc>
-            </a:pPr>
-            <a:r>
-              <a:rPr sz="1400">
-                <a:solidFill>
-                  <a:srgbClr val="F5F3EC"/>
-                </a:solidFill>
-                <a:latin typeface="Arial"/>
-              </a:rPr>
-              <a:t>三色雷射光源加速從高端旗艦滲透至兩千元人民幣級平價機型及 6,000 流明戶外機種，配合 360 度旋轉雲台成為家用與行動投影的主要技術趨勢（ZNDS投影頻道、ProjectorCentral）。</a:t>
-            </a:r>
-          </a:p>
-        </p:txBody>
-      </p:sp>
-      <p:sp>
-        <p:nvSpPr>
-          <p:cNvPr id="10" name="Rounded Rectangle 9"/>
-          <p:cNvSpPr/>
-          <p:nvPr/>
-        </p:nvSpPr>
-        <p:spPr>
-          <a:xfrm>
-            <a:off x="8097316" y="1600200"/>
-            <a:ext cx="3545738" cy="4754880"/>
-          </a:xfrm>
-          <a:prstGeom prst="roundRect">
-            <a:avLst>
-              <a:gd name="adj" fmla="val 6000"/>
-            </a:avLst>
-          </a:prstGeom>
-          <a:solidFill>
-            <a:srgbClr val="23262F"/>
-          </a:solidFill>
-          <a:ln w="12700">
-            <a:solidFill>
-              <a:srgbClr val="8B7FD6"/>
-            </a:solidFill>
-          </a:ln>
-          <a:effectLst/>
-        </p:spPr>
-        <p:style>
-          <a:lnRef idx="1">
-            <a:schemeClr val="accent1"/>
-          </a:lnRef>
-          <a:fillRef idx="3">
-            <a:schemeClr val="accent1"/>
-          </a:fillRef>
-          <a:effectRef idx="2">
-            <a:schemeClr val="accent1"/>
-          </a:effectRef>
-          <a:fontRef idx="minor">
-            <a:schemeClr val="lt1"/>
-          </a:fontRef>
-        </p:style>
-        <p:txBody>
-          <a:bodyPr rtlCol="0" anchor="ctr"/>
-          <a:lstStyle/>
-          <a:p>
-            <a:pPr algn="ctr"/>
-          </a:p>
-        </p:txBody>
-      </p:sp>
-      <p:sp>
-        <p:nvSpPr>
-          <p:cNvPr id="11" name="TextBox 10"/>
-          <p:cNvSpPr txBox="1"/>
-          <p:nvPr/>
-        </p:nvSpPr>
-        <p:spPr>
-          <a:xfrm>
-            <a:off x="8298484" y="1764792"/>
-            <a:ext cx="3143402" cy="457200"/>
-          </a:xfrm>
-          <a:prstGeom prst="rect">
-            <a:avLst/>
-          </a:prstGeom>
-          <a:noFill/>
-        </p:spPr>
-        <p:txBody>
-          <a:bodyPr wrap="square" anchor="t">
-            <a:spAutoFit/>
-          </a:bodyPr>
-          <a:lstStyle/>
-          <a:p>
-            <a:pPr algn="l"/>
-            <a:r>
-              <a:rPr sz="1800" b="1">
-                <a:solidFill>
-                  <a:srgbClr val="8B7FD6"/>
-                </a:solidFill>
-                <a:latin typeface="Arial"/>
-              </a:rPr>
-              <a:t>增強現實與動態投影教育應用</a:t>
-            </a:r>
-          </a:p>
-        </p:txBody>
-      </p:sp>
-      <p:sp>
-        <p:nvSpPr>
-          <p:cNvPr id="12" name="TextBox 11"/>
-          <p:cNvSpPr txBox="1"/>
-          <p:nvPr/>
-        </p:nvSpPr>
-        <p:spPr>
-          <a:xfrm>
-            <a:off x="8298484" y="2258568"/>
-            <a:ext cx="3143402" cy="3931920"/>
-          </a:xfrm>
-          <a:prstGeom prst="rect">
-            <a:avLst/>
-          </a:prstGeom>
-          <a:noFill/>
-        </p:spPr>
-        <p:txBody>
-          <a:bodyPr wrap="square">
-            <a:spAutoFit/>
-          </a:bodyPr>
-          <a:lstStyle/>
-          <a:p>
-            <a:pPr>
-              <a:lnSpc>
-                <a:spcPct val="120000"/>
-              </a:lnSpc>
-            </a:pPr>
-            <a:r>
-              <a:rPr sz="1400">
-                <a:solidFill>
-                  <a:srgbClr val="F5F3EC"/>
-                </a:solidFill>
-                <a:latin typeface="Arial"/>
-              </a:rPr>
-              <a:t>羿飛教育於山東教博會展示結合即時增強現實的地理 AR 沙盤與古戰場動態模擬系統，展現投影技術在智慧教育領域的沉浸式互動應用（投影時代）。</a:t>
-            </a:r>
-          </a:p>
-        </p:txBody>
-      </p:sp>
-      <p:sp>
-        <p:nvSpPr>
-          <p:cNvPr id="13" name="TextBox 12"/>
           <p:cNvSpPr txBox="1"/>
           <p:nvPr/>
         </p:nvSpPr>
@@ -6797,7 +7543,7 @@
                 </a:solidFill>
                 <a:latin typeface="Arial"/>
               </a:rPr>
-              <a:t>08 · SECTION　🔧</a:t>
+              <a:t>08 · SECTION　✨</a:t>
             </a:r>
           </a:p>
         </p:txBody>
@@ -6832,7 +7578,7 @@
                 </a:solidFill>
                 <a:latin typeface="Arial"/>
               </a:rPr>
-              <a:t>五、供應鏈觀察</a:t>
+              <a:t>三、新品與品牌動態</a:t>
             </a:r>
           </a:p>
         </p:txBody>
@@ -6915,7 +7661,7 @@
                 </a:solidFill>
                 <a:latin typeface="Arial"/>
               </a:rPr>
-              <a:t>台積電與索尼</a:t>
+              <a:t>巴可（Barco）</a:t>
             </a:r>
           </a:p>
         </p:txBody>
@@ -6938,7 +7684,7 @@
         </p:spPr>
         <p:txBody>
           <a:bodyPr wrap="square">
-            <a:spAutoFit/>
+            <a:normAutofit/>
           </a:bodyPr>
           <a:lstStyle/>
           <a:p>
@@ -6954,7 +7700,7 @@
                 </a:solidFill>
                 <a:latin typeface="Arial"/>
               </a:rPr>
-              <a:t>正式拍板在日本熊本成立影像感測器合資企業（台積電認購 282 億日圓），計畫投資約 1 兆日圓並於 2029 年商業量產，受蘋果龐大需求主導（DigiTimes）。</a:t>
+              <a:t>發表旗艦 QDX-N4K RGB 純雷射 3DLP 工程投影機，搭載 0.98 吋原生 4K DMD 晶片、100% Rec.2020 色域與 4K@120Hz 低延遲技術，預計 2026 年量產（投影時代）。</a:t>
             </a:r>
           </a:p>
         </p:txBody>
@@ -7037,7 +7783,7 @@
                 </a:solidFill>
                 <a:latin typeface="Arial"/>
               </a:rPr>
-              <a:t>唯捷光電（Vertilite）</a:t>
+              <a:t>極米（XGIMI）</a:t>
             </a:r>
           </a:p>
         </p:txBody>
@@ -7060,7 +7806,7 @@
         </p:spPr>
         <p:txBody>
           <a:bodyPr wrap="square">
-            <a:spAutoFit/>
+            <a:normAutofit/>
           </a:bodyPr>
           <a:lstStyle/>
           <a:p>
@@ -7076,7 +7822,7 @@
                 </a:solidFill>
                 <a:latin typeface="Arial"/>
               </a:rPr>
-              <a:t>投資 7.41 億美元於常州建立基地，業務從 VCSEL 拓展至高階磷化銦（InP）雷射晶片，布局 AI 光互連供應鏈（DigiTimes）。</a:t>
+              <a:t>攜手美國客製化安裝商 AWALL 推出高端品牌「XWALL by XGIMI」，專攻北美高端家庭影院市場並於 CEDIA 展會亮相（ProjectorCentral）。</a:t>
             </a:r>
           </a:p>
         </p:txBody>
@@ -7159,7 +7905,7 @@
                 </a:solidFill>
                 <a:latin typeface="Arial"/>
               </a:rPr>
-              <a:t>環鴻科技（USI/EugenLight）</a:t>
+              <a:t>當貝（Dangbei）</a:t>
             </a:r>
           </a:p>
         </p:txBody>
@@ -7182,7 +7928,7 @@
         </p:spPr>
         <p:txBody>
           <a:bodyPr wrap="square">
-            <a:spAutoFit/>
+            <a:normAutofit/>
           </a:bodyPr>
           <a:lstStyle/>
           <a:p>
@@ -7198,7 +7944,7 @@
                 </a:solidFill>
                 <a:latin typeface="Arial"/>
               </a:rPr>
-              <a:t>推出超高功率外部雷射光源可插拔模組（ELSFP），鎖定次世代 AI 運算叢集與高密度資料中心光互連需求，預計 2027 年第一季量產（DigiTimes）。</a:t>
+              <a:t>發表旗艦 4K 純三色雷射投影機 X7 Max，並推出兩千元人民幣價位的當貝 D7X 與不足 1 公斤的 Smart2 便攜機型，加速三色雷射普及（ZNDS投影頻道）。</a:t>
             </a:r>
           </a:p>
         </p:txBody>
@@ -7281,7 +8027,7 @@
                 </a:solidFill>
                 <a:latin typeface="Arial"/>
               </a:rPr>
-              <a:t>中國移動與當貝</a:t>
+              <a:t>Nebula（安克）</a:t>
             </a:r>
           </a:p>
         </p:txBody>
@@ -7304,7 +8050,7 @@
         </p:spPr>
         <p:txBody>
           <a:bodyPr wrap="square">
-            <a:spAutoFit/>
+            <a:normAutofit/>
           </a:bodyPr>
           <a:lstStyle/>
           <a:p>
@@ -7320,7 +8066,7 @@
                 </a:solidFill>
                 <a:latin typeface="Arial"/>
               </a:rPr>
-              <a:t>達成深度戰略合作，結合 5G 超高清、AI 與物聯網技術，共同擴展智慧家庭與大屏娛樂生態圈（ZNDS投影頻道）。</a:t>
+              <a:t>推出升級版 X1S 戶外 4K 三色雷射投影機，具備 6,000 流明高亮度與簡易設定機能（ProjectorCentral）。</a:t>
             </a:r>
           </a:p>
         </p:txBody>
@@ -7403,7 +8149,7 @@
                 </a:solidFill>
                 <a:latin typeface="Arial"/>
               </a:rPr>
-              <a:t>聯合光電</a:t>
+              <a:t>JVC</a:t>
             </a:r>
           </a:p>
         </p:txBody>
@@ -7426,7 +8172,7 @@
         </p:spPr>
         <p:txBody>
           <a:bodyPr wrap="square">
-            <a:spAutoFit/>
+            <a:normAutofit/>
           </a:bodyPr>
           <a:lstStyle/>
           <a:p>
@@ -7442,14 +8188,136 @@
                 </a:solidFill>
                 <a:latin typeface="Arial"/>
               </a:rPr>
-              <a:t>2026 上半年實現扭虧為盈，持續鞏固超短焦投影鏡頭與光機優勢，並持有火樂科技（堅果）13.62% 股權，深化智慧顯示布局（投影時代）。</a:t>
-            </a:r>
-          </a:p>
-        </p:txBody>
-      </p:sp>
-      <p:sp>
-        <p:nvSpPr>
-          <p:cNvPr id="19" name="TextBox 18"/>
+              <a:t>於 CEDIA 2026 展示 DLA-NZ900 與 DLA-NZ800 旗艦機種，聚焦 8K 家庭劇院與原生 4K/120p 高刷新率電競體驗（ProjectorCentral）。</a:t>
+            </a:r>
+          </a:p>
+        </p:txBody>
+      </p:sp>
+      <p:sp>
+        <p:nvSpPr>
+          <p:cNvPr id="19" name="Rounded Rectangle 18"/>
+          <p:cNvSpPr/>
+          <p:nvPr/>
+        </p:nvSpPr>
+        <p:spPr>
+          <a:xfrm>
+            <a:off x="8097316" y="4091939"/>
+            <a:ext cx="3545738" cy="2263140"/>
+          </a:xfrm>
+          <a:prstGeom prst="roundRect">
+            <a:avLst>
+              <a:gd name="adj" fmla="val 6000"/>
+            </a:avLst>
+          </a:prstGeom>
+          <a:solidFill>
+            <a:srgbClr val="23262F"/>
+          </a:solidFill>
+          <a:ln w="12700">
+            <a:solidFill>
+              <a:srgbClr val="FFB454"/>
+            </a:solidFill>
+          </a:ln>
+          <a:effectLst/>
+        </p:spPr>
+        <p:style>
+          <a:lnRef idx="1">
+            <a:schemeClr val="accent1"/>
+          </a:lnRef>
+          <a:fillRef idx="3">
+            <a:schemeClr val="accent1"/>
+          </a:fillRef>
+          <a:effectRef idx="2">
+            <a:schemeClr val="accent1"/>
+          </a:effectRef>
+          <a:fontRef idx="minor">
+            <a:schemeClr val="lt1"/>
+          </a:fontRef>
+        </p:style>
+        <p:txBody>
+          <a:bodyPr rtlCol="0" anchor="ctr"/>
+          <a:lstStyle/>
+          <a:p>
+            <a:pPr algn="ctr"/>
+          </a:p>
+        </p:txBody>
+      </p:sp>
+      <p:sp>
+        <p:nvSpPr>
+          <p:cNvPr id="20" name="TextBox 19"/>
+          <p:cNvSpPr txBox="1"/>
+          <p:nvPr/>
+        </p:nvSpPr>
+        <p:spPr>
+          <a:xfrm>
+            <a:off x="8298484" y="4256531"/>
+            <a:ext cx="3143402" cy="457200"/>
+          </a:xfrm>
+          <a:prstGeom prst="rect">
+            <a:avLst/>
+          </a:prstGeom>
+          <a:noFill/>
+        </p:spPr>
+        <p:txBody>
+          <a:bodyPr wrap="square" anchor="t">
+            <a:spAutoFit/>
+          </a:bodyPr>
+          <a:lstStyle/>
+          <a:p>
+            <a:pPr algn="l"/>
+            <a:r>
+              <a:rPr sz="1600" b="1">
+                <a:solidFill>
+                  <a:srgbClr val="FFB454"/>
+                </a:solidFill>
+                <a:latin typeface="Arial"/>
+              </a:rPr>
+              <a:t>愛普生（Epson）</a:t>
+            </a:r>
+          </a:p>
+        </p:txBody>
+      </p:sp>
+      <p:sp>
+        <p:nvSpPr>
+          <p:cNvPr id="21" name="TextBox 20"/>
+          <p:cNvSpPr txBox="1"/>
+          <p:nvPr/>
+        </p:nvSpPr>
+        <p:spPr>
+          <a:xfrm>
+            <a:off x="8298484" y="4750307"/>
+            <a:ext cx="3143402" cy="1440180"/>
+          </a:xfrm>
+          <a:prstGeom prst="rect">
+            <a:avLst/>
+          </a:prstGeom>
+          <a:noFill/>
+        </p:spPr>
+        <p:txBody>
+          <a:bodyPr wrap="square">
+            <a:normAutofit/>
+          </a:bodyPr>
+          <a:lstStyle/>
+          <a:p>
+            <a:pPr>
+              <a:lnSpc>
+                <a:spcPct val="120000"/>
+              </a:lnSpc>
+            </a:pPr>
+            <a:r>
+              <a:rPr sz="1300">
+                <a:solidFill>
+                  <a:srgbClr val="F5F3EC"/>
+                </a:solidFill>
+                <a:latin typeface="Arial"/>
+              </a:rPr>
+              <a:t>以 48 台高亮雷射工程投影機打造上海《永不消失的黑水城》沉浸式展覽，並於 InfoComm 與 ISTELive 等展會累計獲得 16 項產業大獎（投影時代、Epson官方）。</a:t>
+            </a:r>
+          </a:p>
+        </p:txBody>
+      </p:sp>
+      <p:sp>
+        <p:nvSpPr>
+          <p:cNvPr id="22" name="TextBox 21"/>
           <p:cNvSpPr txBox="1"/>
           <p:nvPr/>
         </p:nvSpPr>
@@ -7538,7 +8406,7 @@
                 </a:solidFill>
                 <a:latin typeface="Arial"/>
               </a:rPr>
-              <a:t>09 · SECTION　✨</a:t>
+              <a:t>09 · SECTION　🔧</a:t>
             </a:r>
           </a:p>
         </p:txBody>
@@ -7573,7 +8441,7 @@
                 </a:solidFill>
                 <a:latin typeface="Arial"/>
               </a:rPr>
-              <a:t>六、本月關注品牌／技術關鍵字</a:t>
+              <a:t>四、技術動態</a:t>
             </a:r>
           </a:p>
         </p:txBody>
@@ -7656,7 +8524,7 @@
                 </a:solidFill>
                 <a:latin typeface="Arial"/>
               </a:rPr>
-              <a:t>重點品牌</a:t>
+              <a:t>光學互連架構（Lightmatter）</a:t>
             </a:r>
           </a:p>
         </p:txBody>
@@ -7679,7 +8547,7 @@
         </p:spPr>
         <p:txBody>
           <a:bodyPr wrap="square">
-            <a:spAutoFit/>
+            <a:normAutofit/>
           </a:bodyPr>
           <a:lstStyle/>
           <a:p>
@@ -7695,7 +8563,7 @@
                 </a:solidFill>
                 <a:latin typeface="Arial"/>
               </a:rPr>
-              <a:t>極米（XGIMI）、當貝（Dangbei）、愛普生（Epson）、明基（BenQ）、巴可（Barco）、海信（Hisense）、Nebula（安克）、索尼（Sony）、台積電（TSMC）、唯捷光電（Vertilite）。</a:t>
+              <a:t>因應 AI 資料中心傳輸速率逼近 448G 與銅纜物理瓶頸，提出全光學互連架構藍圖，推動矽光子與 CPO 技術演進（DigiTimes）。</a:t>
             </a:r>
           </a:p>
         </p:txBody>
@@ -7778,7 +8646,7 @@
                 </a:solidFill>
                 <a:latin typeface="Arial"/>
               </a:rPr>
-              <a:t>核心技術與關鍵字</a:t>
+              <a:t>增強現實與動態投影（羿飛教育）</a:t>
             </a:r>
           </a:p>
         </p:txBody>
@@ -7801,7 +8669,7 @@
         </p:spPr>
         <p:txBody>
           <a:bodyPr wrap="square">
-            <a:spAutoFit/>
+            <a:normAutofit/>
           </a:bodyPr>
           <a:lstStyle/>
           <a:p>
@@ -7817,7 +8685,7 @@
                 </a:solidFill>
                 <a:latin typeface="Arial"/>
               </a:rPr>
-              <a:t>RGB純雷射 / 三色雷射、全光學互連（InP雷射晶片 / ELSFP模組）、360度雲台、海外出海、車載光學 / AI應用、8K / 4K 120Hz。</a:t>
+              <a:t>於山東教育博覽會展示結合即時增強現實（AR）的地理沙盤與古戰場動態模擬投影系統，推進數位化沉浸式教學應用（投影時代）。</a:t>
             </a:r>
           </a:p>
         </p:txBody>

--- a/reports/2026-08.pptx
+++ b/reports/2026-08.pptx
@@ -16,8 +16,6 @@
     <p:sldId id="264" r:id="rId15"/>
     <p:sldId id="265" r:id="rId16"/>
     <p:sldId id="266" r:id="rId17"/>
-    <p:sldId id="267" r:id="rId18"/>
-    <p:sldId id="268" r:id="rId19"/>
   </p:sldIdLst>
   <p:sldSz cx="12191695" cy="6858000" type="screen4x3"/>
   <p:notesSz cx="6858000" cy="9144000"/>
@@ -3643,7 +3641,7 @@
                 </a:solidFill>
                 <a:latin typeface="Arial"/>
               </a:rPr>
-              <a:t>10 · SECTION　🔧</a:t>
+              <a:t>10 · SECTION</a:t>
             </a:r>
           </a:p>
         </p:txBody>
@@ -3678,69 +3676,21 @@
                 </a:solidFill>
                 <a:latin typeface="Arial"/>
               </a:rPr>
-              <a:t>五、供應鏈觀察</a:t>
-            </a:r>
-          </a:p>
-        </p:txBody>
-      </p:sp>
-      <p:sp>
-        <p:nvSpPr>
-          <p:cNvPr id="4" name="Rounded Rectangle 3"/>
-          <p:cNvSpPr/>
-          <p:nvPr/>
-        </p:nvSpPr>
-        <p:spPr>
-          <a:xfrm>
-            <a:off x="548640" y="1600200"/>
-            <a:ext cx="3545738" cy="2263140"/>
-          </a:xfrm>
-          <a:prstGeom prst="roundRect">
-            <a:avLst>
-              <a:gd name="adj" fmla="val 6000"/>
-            </a:avLst>
-          </a:prstGeom>
-          <a:solidFill>
-            <a:srgbClr val="23262F"/>
-          </a:solidFill>
-          <a:ln w="12700">
-            <a:solidFill>
-              <a:srgbClr val="4C7EFF"/>
-            </a:solidFill>
-          </a:ln>
-          <a:effectLst/>
-        </p:spPr>
-        <p:style>
-          <a:lnRef idx="1">
-            <a:schemeClr val="accent1"/>
-          </a:lnRef>
-          <a:fillRef idx="3">
-            <a:schemeClr val="accent1"/>
-          </a:fillRef>
-          <a:effectRef idx="2">
-            <a:schemeClr val="accent1"/>
-          </a:effectRef>
-          <a:fontRef idx="minor">
-            <a:schemeClr val="lt1"/>
-          </a:fontRef>
-        </p:style>
-        <p:txBody>
-          <a:bodyPr rtlCol="0" anchor="ctr"/>
-          <a:lstStyle/>
-          <a:p>
-            <a:pPr algn="ctr"/>
-          </a:p>
-        </p:txBody>
-      </p:sp>
-      <p:sp>
-        <p:nvSpPr>
-          <p:cNvPr id="5" name="TextBox 4"/>
+              <a:t>附錄：本月參考來源</a:t>
+            </a:r>
+          </a:p>
+        </p:txBody>
+      </p:sp>
+      <p:sp>
+        <p:nvSpPr>
+          <p:cNvPr id="4" name="TextBox 3"/>
           <p:cNvSpPr txBox="1"/>
           <p:nvPr/>
         </p:nvSpPr>
         <p:spPr>
           <a:xfrm>
-            <a:off x="749808" y="1764792"/>
-            <a:ext cx="3143402" cy="457200"/>
+            <a:off x="548640" y="2194560"/>
+            <a:ext cx="10515600" cy="548640"/>
           </a:xfrm>
           <a:prstGeom prst="rect">
             <a:avLst/>
@@ -3755,114 +3705,27 @@
           <a:p>
             <a:pPr algn="l"/>
             <a:r>
-              <a:rPr sz="1600" b="1">
-                <a:solidFill>
-                  <a:srgbClr val="4C7EFF"/>
+              <a:rPr sz="2000" b="1">
+                <a:solidFill>
+                  <a:srgbClr val="F5F3EC"/>
                 </a:solidFill>
                 <a:latin typeface="Arial"/>
               </a:rPr>
-              <a:t>索尼與台積電合作案（TSMC / Sony）</a:t>
-            </a:r>
-          </a:p>
-        </p:txBody>
-      </p:sp>
-      <p:sp>
-        <p:nvSpPr>
-          <p:cNvPr id="6" name="TextBox 5"/>
+              <a:t>共 161 項</a:t>
+            </a:r>
+          </a:p>
+        </p:txBody>
+      </p:sp>
+      <p:sp>
+        <p:nvSpPr>
+          <p:cNvPr id="5" name="TextBox 4"/>
           <p:cNvSpPr txBox="1"/>
           <p:nvPr/>
         </p:nvSpPr>
         <p:spPr>
           <a:xfrm>
-            <a:off x="749808" y="2258568"/>
-            <a:ext cx="3143402" cy="1440180"/>
-          </a:xfrm>
-          <a:prstGeom prst="rect">
-            <a:avLst/>
-          </a:prstGeom>
-          <a:noFill/>
-        </p:spPr>
-        <p:txBody>
-          <a:bodyPr wrap="square">
-            <a:normAutofit/>
-          </a:bodyPr>
-          <a:lstStyle/>
-          <a:p>
-            <a:pPr>
-              <a:lnSpc>
-                <a:spcPct val="120000"/>
-              </a:lnSpc>
-            </a:pPr>
-            <a:r>
-              <a:rPr sz="1300">
-                <a:solidFill>
-                  <a:srgbClr val="F5F3EC"/>
-                </a:solidFill>
-                <a:latin typeface="Arial"/>
-              </a:rPr>
-              <a:t>台積電董事會拍板認購 282 億日圓股份，雙方計畫投資約 63 億美元於日本熊本成立影像感測器合資公司，主要由蘋果龐大需求帶動（DigiTimes）。</a:t>
-            </a:r>
-          </a:p>
-        </p:txBody>
-      </p:sp>
-      <p:sp>
-        <p:nvSpPr>
-          <p:cNvPr id="7" name="Rounded Rectangle 6"/>
-          <p:cNvSpPr/>
-          <p:nvPr/>
-        </p:nvSpPr>
-        <p:spPr>
-          <a:xfrm>
-            <a:off x="4322978" y="1600200"/>
-            <a:ext cx="3545738" cy="2263140"/>
-          </a:xfrm>
-          <a:prstGeom prst="roundRect">
-            <a:avLst>
-              <a:gd name="adj" fmla="val 6000"/>
-            </a:avLst>
-          </a:prstGeom>
-          <a:solidFill>
-            <a:srgbClr val="23262F"/>
-          </a:solidFill>
-          <a:ln w="12700">
-            <a:solidFill>
-              <a:srgbClr val="FFB454"/>
-            </a:solidFill>
-          </a:ln>
-          <a:effectLst/>
-        </p:spPr>
-        <p:style>
-          <a:lnRef idx="1">
-            <a:schemeClr val="accent1"/>
-          </a:lnRef>
-          <a:fillRef idx="3">
-            <a:schemeClr val="accent1"/>
-          </a:fillRef>
-          <a:effectRef idx="2">
-            <a:schemeClr val="accent1"/>
-          </a:effectRef>
-          <a:fontRef idx="minor">
-            <a:schemeClr val="lt1"/>
-          </a:fontRef>
-        </p:style>
-        <p:txBody>
-          <a:bodyPr rtlCol="0" anchor="ctr"/>
-          <a:lstStyle/>
-          <a:p>
-            <a:pPr algn="ctr"/>
-          </a:p>
-        </p:txBody>
-      </p:sp>
-      <p:sp>
-        <p:nvSpPr>
-          <p:cNvPr id="8" name="TextBox 7"/>
-          <p:cNvSpPr txBox="1"/>
-          <p:nvPr/>
-        </p:nvSpPr>
-        <p:spPr>
-          <a:xfrm>
-            <a:off x="4524146" y="1764792"/>
-            <a:ext cx="3143402" cy="457200"/>
+            <a:off x="548640" y="2834640"/>
+            <a:ext cx="10515600" cy="731520"/>
           </a:xfrm>
           <a:prstGeom prst="rect">
             <a:avLst/>
@@ -3877,390 +3740,20 @@
           <a:p>
             <a:pPr algn="l"/>
             <a:r>
-              <a:rPr sz="1600" b="1">
-                <a:solidFill>
-                  <a:srgbClr val="FFB454"/>
+              <a:rPr sz="1400" b="0">
+                <a:solidFill>
+                  <a:srgbClr val="9096A1"/>
                 </a:solidFill>
                 <a:latin typeface="Arial"/>
               </a:rPr>
-              <a:t>光電核心元件投資（唯捷光電）</a:t>
-            </a:r>
-          </a:p>
-        </p:txBody>
-      </p:sp>
-      <p:sp>
-        <p:nvSpPr>
-          <p:cNvPr id="9" name="TextBox 8"/>
-          <p:cNvSpPr txBox="1"/>
-          <p:nvPr/>
-        </p:nvSpPr>
-        <p:spPr>
-          <a:xfrm>
-            <a:off x="4524146" y="2258568"/>
-            <a:ext cx="3143402" cy="1440180"/>
-          </a:xfrm>
-          <a:prstGeom prst="rect">
-            <a:avLst/>
-          </a:prstGeom>
-          <a:noFill/>
-        </p:spPr>
-        <p:txBody>
-          <a:bodyPr wrap="square">
-            <a:normAutofit/>
-          </a:bodyPr>
-          <a:lstStyle/>
-          <a:p>
-            <a:pPr>
-              <a:lnSpc>
-                <a:spcPct val="120000"/>
-              </a:lnSpc>
-            </a:pPr>
-            <a:r>
-              <a:rPr sz="1300">
-                <a:solidFill>
-                  <a:srgbClr val="F5F3EC"/>
-                </a:solidFill>
-                <a:latin typeface="Arial"/>
-              </a:rPr>
-              <a:t>投資 7.41 億美元於常州建立生產基地，業務從 VCSEL 拓展至高階磷化銦（InP）雷射晶片，鎖定 AI 光互連市場（DigiTimes）。</a:t>
-            </a:r>
-          </a:p>
-        </p:txBody>
-      </p:sp>
-      <p:sp>
-        <p:nvSpPr>
-          <p:cNvPr id="10" name="Rounded Rectangle 9"/>
-          <p:cNvSpPr/>
-          <p:nvPr/>
-        </p:nvSpPr>
-        <p:spPr>
-          <a:xfrm>
-            <a:off x="8097316" y="1600200"/>
-            <a:ext cx="3545738" cy="2263140"/>
-          </a:xfrm>
-          <a:prstGeom prst="roundRect">
-            <a:avLst>
-              <a:gd name="adj" fmla="val 6000"/>
-            </a:avLst>
-          </a:prstGeom>
-          <a:solidFill>
-            <a:srgbClr val="23262F"/>
-          </a:solidFill>
-          <a:ln w="12700">
-            <a:solidFill>
-              <a:srgbClr val="8B7FD6"/>
-            </a:solidFill>
-          </a:ln>
-          <a:effectLst/>
-        </p:spPr>
-        <p:style>
-          <a:lnRef idx="1">
-            <a:schemeClr val="accent1"/>
-          </a:lnRef>
-          <a:fillRef idx="3">
-            <a:schemeClr val="accent1"/>
-          </a:fillRef>
-          <a:effectRef idx="2">
-            <a:schemeClr val="accent1"/>
-          </a:effectRef>
-          <a:fontRef idx="minor">
-            <a:schemeClr val="lt1"/>
-          </a:fontRef>
-        </p:style>
-        <p:txBody>
-          <a:bodyPr rtlCol="0" anchor="ctr"/>
-          <a:lstStyle/>
-          <a:p>
-            <a:pPr algn="ctr"/>
-          </a:p>
-        </p:txBody>
-      </p:sp>
-      <p:sp>
-        <p:nvSpPr>
-          <p:cNvPr id="11" name="TextBox 10"/>
-          <p:cNvSpPr txBox="1"/>
-          <p:nvPr/>
-        </p:nvSpPr>
-        <p:spPr>
-          <a:xfrm>
-            <a:off x="8298484" y="1801368"/>
-            <a:ext cx="3143402" cy="1897380"/>
-          </a:xfrm>
-          <a:prstGeom prst="rect">
-            <a:avLst/>
-          </a:prstGeom>
-          <a:noFill/>
-        </p:spPr>
-        <p:txBody>
-          <a:bodyPr wrap="square">
-            <a:normAutofit/>
-          </a:bodyPr>
-          <a:lstStyle/>
-          <a:p>
-            <a:pPr>
-              <a:lnSpc>
-                <a:spcPct val="120000"/>
-              </a:lnSpc>
-            </a:pPr>
-            <a:r>
-              <a:rPr sz="1300">
-                <a:solidFill>
-                  <a:srgbClr val="F5F3EC"/>
-                </a:solidFill>
-                <a:latin typeface="Arial"/>
-              </a:rPr>
-              <a:t>AI資料中心雷射模組（環鴻科技 / EugenLight）：推出超高功率外部雷射光源可插拔模組（ELSFP），針對次世代 AI 運算叢集的高速光互連需求，預計 2027 年第一季量產（DigiTimes）。</a:t>
-            </a:r>
-          </a:p>
-        </p:txBody>
-      </p:sp>
-      <p:sp>
-        <p:nvSpPr>
-          <p:cNvPr id="12" name="Rounded Rectangle 11"/>
-          <p:cNvSpPr/>
-          <p:nvPr/>
-        </p:nvSpPr>
-        <p:spPr>
-          <a:xfrm>
-            <a:off x="548640" y="4091939"/>
-            <a:ext cx="3545738" cy="2263140"/>
-          </a:xfrm>
-          <a:prstGeom prst="roundRect">
-            <a:avLst>
-              <a:gd name="adj" fmla="val 6000"/>
-            </a:avLst>
-          </a:prstGeom>
-          <a:solidFill>
-            <a:srgbClr val="23262F"/>
-          </a:solidFill>
-          <a:ln w="12700">
-            <a:solidFill>
-              <a:srgbClr val="6FCF97"/>
-            </a:solidFill>
-          </a:ln>
-          <a:effectLst/>
-        </p:spPr>
-        <p:style>
-          <a:lnRef idx="1">
-            <a:schemeClr val="accent1"/>
-          </a:lnRef>
-          <a:fillRef idx="3">
-            <a:schemeClr val="accent1"/>
-          </a:fillRef>
-          <a:effectRef idx="2">
-            <a:schemeClr val="accent1"/>
-          </a:effectRef>
-          <a:fontRef idx="minor">
-            <a:schemeClr val="lt1"/>
-          </a:fontRef>
-        </p:style>
-        <p:txBody>
-          <a:bodyPr rtlCol="0" anchor="ctr"/>
-          <a:lstStyle/>
-          <a:p>
-            <a:pPr algn="ctr"/>
-          </a:p>
-        </p:txBody>
-      </p:sp>
-      <p:sp>
-        <p:nvSpPr>
-          <p:cNvPr id="13" name="TextBox 12"/>
-          <p:cNvSpPr txBox="1"/>
-          <p:nvPr/>
-        </p:nvSpPr>
-        <p:spPr>
-          <a:xfrm>
-            <a:off x="749808" y="4256531"/>
-            <a:ext cx="3143402" cy="457200"/>
-          </a:xfrm>
-          <a:prstGeom prst="rect">
-            <a:avLst/>
-          </a:prstGeom>
-          <a:noFill/>
-        </p:spPr>
-        <p:txBody>
-          <a:bodyPr wrap="square" anchor="t">
-            <a:spAutoFit/>
-          </a:bodyPr>
-          <a:lstStyle/>
-          <a:p>
-            <a:pPr algn="l"/>
-            <a:r>
-              <a:rPr sz="1600" b="1">
-                <a:solidFill>
-                  <a:srgbClr val="6FCF97"/>
-                </a:solidFill>
-                <a:latin typeface="Arial"/>
-              </a:rPr>
-              <a:t>光學鏡頭與產業投資（聯合光電）</a:t>
-            </a:r>
-          </a:p>
-        </p:txBody>
-      </p:sp>
-      <p:sp>
-        <p:nvSpPr>
-          <p:cNvPr id="14" name="TextBox 13"/>
-          <p:cNvSpPr txBox="1"/>
-          <p:nvPr/>
-        </p:nvSpPr>
-        <p:spPr>
-          <a:xfrm>
-            <a:off x="749808" y="4750307"/>
-            <a:ext cx="3143402" cy="1440180"/>
-          </a:xfrm>
-          <a:prstGeom prst="rect">
-            <a:avLst/>
-          </a:prstGeom>
-          <a:noFill/>
-        </p:spPr>
-        <p:txBody>
-          <a:bodyPr wrap="square">
-            <a:normAutofit/>
-          </a:bodyPr>
-          <a:lstStyle/>
-          <a:p>
-            <a:pPr>
-              <a:lnSpc>
-                <a:spcPct val="120000"/>
-              </a:lnSpc>
-            </a:pPr>
-            <a:r>
-              <a:rPr sz="1300">
-                <a:solidFill>
-                  <a:srgbClr val="F5F3EC"/>
-                </a:solidFill>
-                <a:latin typeface="Arial"/>
-              </a:rPr>
-              <a:t>2026 上半年實現扭虧為盈，完成超短焦及短焦新光機設計，並取得火樂科技（堅果）約 13.62% 股權以深耕智慧顯示布局（投影時代）。</a:t>
-            </a:r>
-          </a:p>
-        </p:txBody>
-      </p:sp>
-      <p:sp>
-        <p:nvSpPr>
-          <p:cNvPr id="15" name="Rounded Rectangle 14"/>
-          <p:cNvSpPr/>
-          <p:nvPr/>
-        </p:nvSpPr>
-        <p:spPr>
-          <a:xfrm>
-            <a:off x="4322978" y="4091939"/>
-            <a:ext cx="3545738" cy="2263140"/>
-          </a:xfrm>
-          <a:prstGeom prst="roundRect">
-            <a:avLst>
-              <a:gd name="adj" fmla="val 6000"/>
-            </a:avLst>
-          </a:prstGeom>
-          <a:solidFill>
-            <a:srgbClr val="23262F"/>
-          </a:solidFill>
-          <a:ln w="12700">
-            <a:solidFill>
-              <a:srgbClr val="4C7EFF"/>
-            </a:solidFill>
-          </a:ln>
-          <a:effectLst/>
-        </p:spPr>
-        <p:style>
-          <a:lnRef idx="1">
-            <a:schemeClr val="accent1"/>
-          </a:lnRef>
-          <a:fillRef idx="3">
-            <a:schemeClr val="accent1"/>
-          </a:fillRef>
-          <a:effectRef idx="2">
-            <a:schemeClr val="accent1"/>
-          </a:effectRef>
-          <a:fontRef idx="minor">
-            <a:schemeClr val="lt1"/>
-          </a:fontRef>
-        </p:style>
-        <p:txBody>
-          <a:bodyPr rtlCol="0" anchor="ctr"/>
-          <a:lstStyle/>
-          <a:p>
-            <a:pPr algn="ctr"/>
-          </a:p>
-        </p:txBody>
-      </p:sp>
-      <p:sp>
-        <p:nvSpPr>
-          <p:cNvPr id="16" name="TextBox 15"/>
-          <p:cNvSpPr txBox="1"/>
-          <p:nvPr/>
-        </p:nvSpPr>
-        <p:spPr>
-          <a:xfrm>
-            <a:off x="4524146" y="4256531"/>
-            <a:ext cx="3143402" cy="457200"/>
-          </a:xfrm>
-          <a:prstGeom prst="rect">
-            <a:avLst/>
-          </a:prstGeom>
-          <a:noFill/>
-        </p:spPr>
-        <p:txBody>
-          <a:bodyPr wrap="square" anchor="t">
-            <a:spAutoFit/>
-          </a:bodyPr>
-          <a:lstStyle/>
-          <a:p>
-            <a:pPr algn="l"/>
-            <a:r>
-              <a:rPr sz="1600" b="1">
-                <a:solidFill>
-                  <a:srgbClr val="4C7EFF"/>
-                </a:solidFill>
-                <a:latin typeface="Arial"/>
-              </a:rPr>
-              <a:t>智慧家庭生態合作（中國移動 / 當貝）</a:t>
-            </a:r>
-          </a:p>
-        </p:txBody>
-      </p:sp>
-      <p:sp>
-        <p:nvSpPr>
-          <p:cNvPr id="17" name="TextBox 16"/>
-          <p:cNvSpPr txBox="1"/>
-          <p:nvPr/>
-        </p:nvSpPr>
-        <p:spPr>
-          <a:xfrm>
-            <a:off x="4524146" y="4750307"/>
-            <a:ext cx="3143402" cy="1440180"/>
-          </a:xfrm>
-          <a:prstGeom prst="rect">
-            <a:avLst/>
-          </a:prstGeom>
-          <a:noFill/>
-        </p:spPr>
-        <p:txBody>
-          <a:bodyPr wrap="square">
-            <a:normAutofit/>
-          </a:bodyPr>
-          <a:lstStyle/>
-          <a:p>
-            <a:pPr>
-              <a:lnSpc>
-                <a:spcPct val="120000"/>
-              </a:lnSpc>
-            </a:pPr>
-            <a:r>
-              <a:rPr sz="1300">
-                <a:solidFill>
-                  <a:srgbClr val="F5F3EC"/>
-                </a:solidFill>
-                <a:latin typeface="Arial"/>
-              </a:rPr>
-              <a:t>雙方達成戰略合作，結合 5G 超高清、AI 與物聯網技術，共同推動智慧家庭大屏生態（ZNDS投影頻道）。</a:t>
-            </a:r>
-          </a:p>
-        </p:txBody>
-      </p:sp>
-      <p:sp>
-        <p:nvSpPr>
-          <p:cNvPr id="18" name="TextBox 17"/>
+              <a:t>完整清單與連結請見網站上的文字版報告</a:t>
+            </a:r>
+          </a:p>
+        </p:txBody>
+      </p:sp>
+      <p:sp>
+        <p:nvSpPr>
+          <p:cNvPr id="6" name="TextBox 5"/>
           <p:cNvSpPr txBox="1"/>
           <p:nvPr/>
         </p:nvSpPr>
@@ -4321,97 +3814,25 @@
       <p:grpSpPr/>
       <p:sp>
         <p:nvSpPr>
-          <p:cNvPr id="2" name="TextBox 1"/>
-          <p:cNvSpPr txBox="1"/>
-          <p:nvPr/>
-        </p:nvSpPr>
-        <p:spPr>
-          <a:xfrm>
-            <a:off x="548640" y="384048"/>
-            <a:ext cx="7315200" cy="320040"/>
-          </a:xfrm>
-          <a:prstGeom prst="rect">
+          <p:cNvPr id="2" name="Oval 1"/>
+          <p:cNvSpPr/>
+          <p:nvPr/>
+        </p:nvSpPr>
+        <p:spPr>
+          <a:xfrm>
+            <a:off x="8961120" y="3200400"/>
+            <a:ext cx="5486400" cy="5486400"/>
+          </a:xfrm>
+          <a:prstGeom prst="ellipse">
             <a:avLst/>
           </a:prstGeom>
-          <a:noFill/>
-        </p:spPr>
-        <p:txBody>
-          <a:bodyPr wrap="square" anchor="t">
-            <a:spAutoFit/>
-          </a:bodyPr>
-          <a:lstStyle/>
-          <a:p>
-            <a:pPr algn="l"/>
-            <a:r>
-              <a:rPr sz="1100" b="1">
-                <a:solidFill>
-                  <a:srgbClr val="FFB454"/>
-                </a:solidFill>
-                <a:latin typeface="Arial"/>
-              </a:rPr>
-              <a:t>11 · SECTION　✨</a:t>
-            </a:r>
-          </a:p>
-        </p:txBody>
-      </p:sp>
-      <p:sp>
-        <p:nvSpPr>
-          <p:cNvPr id="3" name="TextBox 2"/>
-          <p:cNvSpPr txBox="1"/>
-          <p:nvPr/>
-        </p:nvSpPr>
-        <p:spPr>
-          <a:xfrm>
-            <a:off x="548640" y="713232"/>
-            <a:ext cx="10972800" cy="685800"/>
-          </a:xfrm>
-          <a:prstGeom prst="rect">
-            <a:avLst/>
-          </a:prstGeom>
-          <a:noFill/>
-        </p:spPr>
-        <p:txBody>
-          <a:bodyPr wrap="square" anchor="t">
-            <a:spAutoFit/>
-          </a:bodyPr>
-          <a:lstStyle/>
-          <a:p>
-            <a:pPr algn="l"/>
-            <a:r>
-              <a:rPr sz="2600" b="1">
-                <a:solidFill>
-                  <a:srgbClr val="F5F3EC"/>
-                </a:solidFill>
-                <a:latin typeface="Arial"/>
-              </a:rPr>
-              <a:t>六、本月關注品牌／技術關鍵字</a:t>
-            </a:r>
-          </a:p>
-        </p:txBody>
-      </p:sp>
-      <p:sp>
-        <p:nvSpPr>
-          <p:cNvPr id="4" name="Rounded Rectangle 3"/>
-          <p:cNvSpPr/>
-          <p:nvPr/>
-        </p:nvSpPr>
-        <p:spPr>
-          <a:xfrm>
-            <a:off x="548640" y="1600200"/>
-            <a:ext cx="5432907" cy="4754880"/>
-          </a:xfrm>
-          <a:prstGeom prst="roundRect">
-            <a:avLst>
-              <a:gd name="adj" fmla="val 6000"/>
-            </a:avLst>
-          </a:prstGeom>
           <a:solidFill>
-            <a:srgbClr val="23262F"/>
+            <a:srgbClr val="4C7EFF">
+              <a:alpha val="10000"/>
+            </a:srgbClr>
           </a:solidFill>
-          <a:ln w="12700">
-            <a:solidFill>
-              <a:srgbClr val="4C7EFF"/>
-            </a:solidFill>
+          <a:ln>
+            <a:noFill/>
           </a:ln>
           <a:effectLst/>
         </p:spPr>
@@ -4439,14 +3860,14 @@
       </p:sp>
       <p:sp>
         <p:nvSpPr>
-          <p:cNvPr id="5" name="TextBox 4"/>
+          <p:cNvPr id="3" name="TextBox 2"/>
           <p:cNvSpPr txBox="1"/>
           <p:nvPr/>
         </p:nvSpPr>
         <p:spPr>
           <a:xfrm>
-            <a:off x="749808" y="1764792"/>
-            <a:ext cx="5030571" cy="457200"/>
+            <a:off x="731520" y="2926080"/>
+            <a:ext cx="9144000" cy="822960"/>
           </a:xfrm>
           <a:prstGeom prst="rect">
             <a:avLst/>
@@ -4461,114 +3882,27 @@
           <a:p>
             <a:pPr algn="l"/>
             <a:r>
-              <a:rPr sz="2000" b="1">
-                <a:solidFill>
-                  <a:srgbClr val="4C7EFF"/>
+              <a:rPr sz="3000" b="1">
+                <a:solidFill>
+                  <a:srgbClr val="F5F3EC"/>
                 </a:solidFill>
                 <a:latin typeface="Arial"/>
               </a:rPr>
-              <a:t>重點品牌</a:t>
-            </a:r>
-          </a:p>
-        </p:txBody>
-      </p:sp>
-      <p:sp>
-        <p:nvSpPr>
-          <p:cNvPr id="6" name="TextBox 5"/>
+              <a:t>投影機情報站</a:t>
+            </a:r>
+          </a:p>
+        </p:txBody>
+      </p:sp>
+      <p:sp>
+        <p:nvSpPr>
+          <p:cNvPr id="4" name="TextBox 3"/>
           <p:cNvSpPr txBox="1"/>
           <p:nvPr/>
         </p:nvSpPr>
         <p:spPr>
           <a:xfrm>
-            <a:off x="749808" y="2258568"/>
-            <a:ext cx="5030571" cy="3931920"/>
-          </a:xfrm>
-          <a:prstGeom prst="rect">
-            <a:avLst/>
-          </a:prstGeom>
-          <a:noFill/>
-        </p:spPr>
-        <p:txBody>
-          <a:bodyPr wrap="square">
-            <a:normAutofit/>
-          </a:bodyPr>
-          <a:lstStyle/>
-          <a:p>
-            <a:pPr>
-              <a:lnSpc>
-                <a:spcPct val="120000"/>
-              </a:lnSpc>
-            </a:pPr>
-            <a:r>
-              <a:rPr sz="1550">
-                <a:solidFill>
-                  <a:srgbClr val="F5F3EC"/>
-                </a:solidFill>
-                <a:latin typeface="Arial"/>
-              </a:rPr>
-              <a:t>巴可 (Barco)、極米 (XGIMI)、當貝 (Dangbei)、明基 (BenQ)、愛普生 (Epson)、索尼 (Sony)、台積電 (TSMC)、Nebula (Anker)、海信 (Hisense)、JVC</a:t>
-            </a:r>
-          </a:p>
-        </p:txBody>
-      </p:sp>
-      <p:sp>
-        <p:nvSpPr>
-          <p:cNvPr id="7" name="Rounded Rectangle 6"/>
-          <p:cNvSpPr/>
-          <p:nvPr/>
-        </p:nvSpPr>
-        <p:spPr>
-          <a:xfrm>
-            <a:off x="6210147" y="1600200"/>
-            <a:ext cx="5432907" cy="4754880"/>
-          </a:xfrm>
-          <a:prstGeom prst="roundRect">
-            <a:avLst>
-              <a:gd name="adj" fmla="val 6000"/>
-            </a:avLst>
-          </a:prstGeom>
-          <a:solidFill>
-            <a:srgbClr val="23262F"/>
-          </a:solidFill>
-          <a:ln w="12700">
-            <a:solidFill>
-              <a:srgbClr val="FFB454"/>
-            </a:solidFill>
-          </a:ln>
-          <a:effectLst/>
-        </p:spPr>
-        <p:style>
-          <a:lnRef idx="1">
-            <a:schemeClr val="accent1"/>
-          </a:lnRef>
-          <a:fillRef idx="3">
-            <a:schemeClr val="accent1"/>
-          </a:fillRef>
-          <a:effectRef idx="2">
-            <a:schemeClr val="accent1"/>
-          </a:effectRef>
-          <a:fontRef idx="minor">
-            <a:schemeClr val="lt1"/>
-          </a:fontRef>
-        </p:style>
-        <p:txBody>
-          <a:bodyPr rtlCol="0" anchor="ctr"/>
-          <a:lstStyle/>
-          <a:p>
-            <a:pPr algn="ctr"/>
-          </a:p>
-        </p:txBody>
-      </p:sp>
-      <p:sp>
-        <p:nvSpPr>
-          <p:cNvPr id="8" name="TextBox 7"/>
-          <p:cNvSpPr txBox="1"/>
-          <p:nvPr/>
-        </p:nvSpPr>
-        <p:spPr>
-          <a:xfrm>
-            <a:off x="6411315" y="1764792"/>
-            <a:ext cx="5030571" cy="457200"/>
+            <a:off x="731520" y="3611880"/>
+            <a:ext cx="9144000" cy="457200"/>
           </a:xfrm>
           <a:prstGeom prst="rect">
             <a:avLst/>
@@ -4583,59 +3917,20 @@
           <a:p>
             <a:pPr algn="l"/>
             <a:r>
-              <a:rPr sz="2000" b="1">
-                <a:solidFill>
-                  <a:srgbClr val="FFB454"/>
+              <a:rPr sz="1400" b="0">
+                <a:solidFill>
+                  <a:srgbClr val="9096A1"/>
                 </a:solidFill>
                 <a:latin typeface="Arial"/>
               </a:rPr>
-              <a:t>核心技術與趨勢</a:t>
-            </a:r>
-          </a:p>
-        </p:txBody>
-      </p:sp>
-      <p:sp>
-        <p:nvSpPr>
-          <p:cNvPr id="9" name="TextBox 8"/>
-          <p:cNvSpPr txBox="1"/>
-          <p:nvPr/>
-        </p:nvSpPr>
-        <p:spPr>
-          <a:xfrm>
-            <a:off x="6411315" y="2258568"/>
-            <a:ext cx="5030571" cy="3931920"/>
-          </a:xfrm>
-          <a:prstGeom prst="rect">
-            <a:avLst/>
-          </a:prstGeom>
-          <a:noFill/>
-        </p:spPr>
-        <p:txBody>
-          <a:bodyPr wrap="square">
-            <a:normAutofit/>
-          </a:bodyPr>
-          <a:lstStyle/>
-          <a:p>
-            <a:pPr>
-              <a:lnSpc>
-                <a:spcPct val="120000"/>
-              </a:lnSpc>
-            </a:pPr>
-            <a:r>
-              <a:rPr sz="1550">
-                <a:solidFill>
-                  <a:srgbClr val="F5F3EC"/>
-                </a:solidFill>
-                <a:latin typeface="Arial"/>
-              </a:rPr>
-              <a:t>三色雷射 (Tri-Chroma Laser)、RGB純雷射、4K/8K 3DLP、一體式雲台、AI光互連/磷化銦(InP)晶片、ELSFP雷射模組、海外市場轉型 (Outbound Expansion)</a:t>
-            </a:r>
-          </a:p>
-        </p:txBody>
-      </p:sp>
-      <p:sp>
-        <p:nvSpPr>
-          <p:cNvPr id="10" name="TextBox 9"/>
+              <a:t>由本站爬蟲每日追蹤產業動態，AI 自動摘要與分類</a:t>
+            </a:r>
+          </a:p>
+        </p:txBody>
+      </p:sp>
+      <p:sp>
+        <p:nvSpPr>
+          <p:cNvPr id="5" name="TextBox 4"/>
           <p:cNvSpPr txBox="1"/>
           <p:nvPr/>
         </p:nvSpPr>
@@ -4664,384 +3959,6 @@
                 <a:latin typeface="Arial"/>
               </a:rPr>
               <a:t>11</a:t>
-            </a:r>
-          </a:p>
-        </p:txBody>
-      </p:sp>
-    </p:spTree>
-  </p:cSld>
-  <p:clrMapOvr>
-    <a:masterClrMapping/>
-  </p:clrMapOvr>
-</p:sld>
-</file>
-
-<file path=ppt/slides/slide12.xml><?xml version="1.0" encoding="utf-8"?>
-<p:sld xmlns:a="http://schemas.openxmlformats.org/drawingml/2006/main" xmlns:p="http://schemas.openxmlformats.org/presentationml/2006/main" xmlns:r="http://schemas.openxmlformats.org/officeDocument/2006/relationships">
-  <p:cSld>
-    <p:bg>
-      <p:bgPr>
-        <a:solidFill>
-          <a:srgbClr val="14161A"/>
-        </a:solidFill>
-        <a:effectLst/>
-      </p:bgPr>
-    </p:bg>
-    <p:spTree>
-      <p:nvGrpSpPr>
-        <p:cNvPr id="1" name=""/>
-        <p:cNvGrpSpPr/>
-        <p:nvPr/>
-      </p:nvGrpSpPr>
-      <p:grpSpPr/>
-      <p:sp>
-        <p:nvSpPr>
-          <p:cNvPr id="2" name="TextBox 1"/>
-          <p:cNvSpPr txBox="1"/>
-          <p:nvPr/>
-        </p:nvSpPr>
-        <p:spPr>
-          <a:xfrm>
-            <a:off x="548640" y="384048"/>
-            <a:ext cx="7315200" cy="320040"/>
-          </a:xfrm>
-          <a:prstGeom prst="rect">
-            <a:avLst/>
-          </a:prstGeom>
-          <a:noFill/>
-        </p:spPr>
-        <p:txBody>
-          <a:bodyPr wrap="square" anchor="t">
-            <a:spAutoFit/>
-          </a:bodyPr>
-          <a:lstStyle/>
-          <a:p>
-            <a:pPr algn="l"/>
-            <a:r>
-              <a:rPr sz="1100" b="1">
-                <a:solidFill>
-                  <a:srgbClr val="FFB454"/>
-                </a:solidFill>
-                <a:latin typeface="Arial"/>
-              </a:rPr>
-              <a:t>12 · SECTION</a:t>
-            </a:r>
-          </a:p>
-        </p:txBody>
-      </p:sp>
-      <p:sp>
-        <p:nvSpPr>
-          <p:cNvPr id="3" name="TextBox 2"/>
-          <p:cNvSpPr txBox="1"/>
-          <p:nvPr/>
-        </p:nvSpPr>
-        <p:spPr>
-          <a:xfrm>
-            <a:off x="548640" y="713232"/>
-            <a:ext cx="10972800" cy="685800"/>
-          </a:xfrm>
-          <a:prstGeom prst="rect">
-            <a:avLst/>
-          </a:prstGeom>
-          <a:noFill/>
-        </p:spPr>
-        <p:txBody>
-          <a:bodyPr wrap="square" anchor="t">
-            <a:spAutoFit/>
-          </a:bodyPr>
-          <a:lstStyle/>
-          <a:p>
-            <a:pPr algn="l"/>
-            <a:r>
-              <a:rPr sz="2600" b="1">
-                <a:solidFill>
-                  <a:srgbClr val="F5F3EC"/>
-                </a:solidFill>
-                <a:latin typeface="Arial"/>
-              </a:rPr>
-              <a:t>附錄：本月參考來源</a:t>
-            </a:r>
-          </a:p>
-        </p:txBody>
-      </p:sp>
-      <p:sp>
-        <p:nvSpPr>
-          <p:cNvPr id="4" name="TextBox 3"/>
-          <p:cNvSpPr txBox="1"/>
-          <p:nvPr/>
-        </p:nvSpPr>
-        <p:spPr>
-          <a:xfrm>
-            <a:off x="548640" y="2194560"/>
-            <a:ext cx="10515600" cy="548640"/>
-          </a:xfrm>
-          <a:prstGeom prst="rect">
-            <a:avLst/>
-          </a:prstGeom>
-          <a:noFill/>
-        </p:spPr>
-        <p:txBody>
-          <a:bodyPr wrap="square" anchor="t">
-            <a:spAutoFit/>
-          </a:bodyPr>
-          <a:lstStyle/>
-          <a:p>
-            <a:pPr algn="l"/>
-            <a:r>
-              <a:rPr sz="2000" b="1">
-                <a:solidFill>
-                  <a:srgbClr val="F5F3EC"/>
-                </a:solidFill>
-                <a:latin typeface="Arial"/>
-              </a:rPr>
-              <a:t>共 161 項</a:t>
-            </a:r>
-          </a:p>
-        </p:txBody>
-      </p:sp>
-      <p:sp>
-        <p:nvSpPr>
-          <p:cNvPr id="5" name="TextBox 4"/>
-          <p:cNvSpPr txBox="1"/>
-          <p:nvPr/>
-        </p:nvSpPr>
-        <p:spPr>
-          <a:xfrm>
-            <a:off x="548640" y="2834640"/>
-            <a:ext cx="10515600" cy="731520"/>
-          </a:xfrm>
-          <a:prstGeom prst="rect">
-            <a:avLst/>
-          </a:prstGeom>
-          <a:noFill/>
-        </p:spPr>
-        <p:txBody>
-          <a:bodyPr wrap="square" anchor="t">
-            <a:spAutoFit/>
-          </a:bodyPr>
-          <a:lstStyle/>
-          <a:p>
-            <a:pPr algn="l"/>
-            <a:r>
-              <a:rPr sz="1400" b="0">
-                <a:solidFill>
-                  <a:srgbClr val="9096A1"/>
-                </a:solidFill>
-                <a:latin typeface="Arial"/>
-              </a:rPr>
-              <a:t>完整清單與連結請見網站上的文字版報告</a:t>
-            </a:r>
-          </a:p>
-        </p:txBody>
-      </p:sp>
-      <p:sp>
-        <p:nvSpPr>
-          <p:cNvPr id="6" name="TextBox 5"/>
-          <p:cNvSpPr txBox="1"/>
-          <p:nvPr/>
-        </p:nvSpPr>
-        <p:spPr>
-          <a:xfrm>
-            <a:off x="11430000" y="6446520"/>
-            <a:ext cx="548640" cy="274320"/>
-          </a:xfrm>
-          <a:prstGeom prst="rect">
-            <a:avLst/>
-          </a:prstGeom>
-          <a:noFill/>
-        </p:spPr>
-        <p:txBody>
-          <a:bodyPr wrap="square" anchor="t">
-            <a:spAutoFit/>
-          </a:bodyPr>
-          <a:lstStyle/>
-          <a:p>
-            <a:pPr algn="r"/>
-            <a:r>
-              <a:rPr sz="1000" b="0">
-                <a:solidFill>
-                  <a:srgbClr val="9096A1"/>
-                </a:solidFill>
-                <a:latin typeface="Arial"/>
-              </a:rPr>
-              <a:t>12</a:t>
-            </a:r>
-          </a:p>
-        </p:txBody>
-      </p:sp>
-    </p:spTree>
-  </p:cSld>
-  <p:clrMapOvr>
-    <a:masterClrMapping/>
-  </p:clrMapOvr>
-</p:sld>
-</file>
-
-<file path=ppt/slides/slide13.xml><?xml version="1.0" encoding="utf-8"?>
-<p:sld xmlns:a="http://schemas.openxmlformats.org/drawingml/2006/main" xmlns:p="http://schemas.openxmlformats.org/presentationml/2006/main" xmlns:r="http://schemas.openxmlformats.org/officeDocument/2006/relationships">
-  <p:cSld>
-    <p:bg>
-      <p:bgPr>
-        <a:solidFill>
-          <a:srgbClr val="14161A"/>
-        </a:solidFill>
-        <a:effectLst/>
-      </p:bgPr>
-    </p:bg>
-    <p:spTree>
-      <p:nvGrpSpPr>
-        <p:cNvPr id="1" name=""/>
-        <p:cNvGrpSpPr/>
-        <p:nvPr/>
-      </p:nvGrpSpPr>
-      <p:grpSpPr/>
-      <p:sp>
-        <p:nvSpPr>
-          <p:cNvPr id="2" name="Oval 1"/>
-          <p:cNvSpPr/>
-          <p:nvPr/>
-        </p:nvSpPr>
-        <p:spPr>
-          <a:xfrm>
-            <a:off x="8961120" y="3200400"/>
-            <a:ext cx="5486400" cy="5486400"/>
-          </a:xfrm>
-          <a:prstGeom prst="ellipse">
-            <a:avLst/>
-          </a:prstGeom>
-          <a:solidFill>
-            <a:srgbClr val="4C7EFF">
-              <a:alpha val="10000"/>
-            </a:srgbClr>
-          </a:solidFill>
-          <a:ln>
-            <a:noFill/>
-          </a:ln>
-          <a:effectLst/>
-        </p:spPr>
-        <p:style>
-          <a:lnRef idx="1">
-            <a:schemeClr val="accent1"/>
-          </a:lnRef>
-          <a:fillRef idx="3">
-            <a:schemeClr val="accent1"/>
-          </a:fillRef>
-          <a:effectRef idx="2">
-            <a:schemeClr val="accent1"/>
-          </a:effectRef>
-          <a:fontRef idx="minor">
-            <a:schemeClr val="lt1"/>
-          </a:fontRef>
-        </p:style>
-        <p:txBody>
-          <a:bodyPr rtlCol="0" anchor="ctr"/>
-          <a:lstStyle/>
-          <a:p>
-            <a:pPr algn="ctr"/>
-          </a:p>
-        </p:txBody>
-      </p:sp>
-      <p:sp>
-        <p:nvSpPr>
-          <p:cNvPr id="3" name="TextBox 2"/>
-          <p:cNvSpPr txBox="1"/>
-          <p:nvPr/>
-        </p:nvSpPr>
-        <p:spPr>
-          <a:xfrm>
-            <a:off x="731520" y="2926080"/>
-            <a:ext cx="9144000" cy="822960"/>
-          </a:xfrm>
-          <a:prstGeom prst="rect">
-            <a:avLst/>
-          </a:prstGeom>
-          <a:noFill/>
-        </p:spPr>
-        <p:txBody>
-          <a:bodyPr wrap="square" anchor="t">
-            <a:spAutoFit/>
-          </a:bodyPr>
-          <a:lstStyle/>
-          <a:p>
-            <a:pPr algn="l"/>
-            <a:r>
-              <a:rPr sz="3000" b="1">
-                <a:solidFill>
-                  <a:srgbClr val="F5F3EC"/>
-                </a:solidFill>
-                <a:latin typeface="Arial"/>
-              </a:rPr>
-              <a:t>投影機情報站</a:t>
-            </a:r>
-          </a:p>
-        </p:txBody>
-      </p:sp>
-      <p:sp>
-        <p:nvSpPr>
-          <p:cNvPr id="4" name="TextBox 3"/>
-          <p:cNvSpPr txBox="1"/>
-          <p:nvPr/>
-        </p:nvSpPr>
-        <p:spPr>
-          <a:xfrm>
-            <a:off x="731520" y="3611880"/>
-            <a:ext cx="9144000" cy="457200"/>
-          </a:xfrm>
-          <a:prstGeom prst="rect">
-            <a:avLst/>
-          </a:prstGeom>
-          <a:noFill/>
-        </p:spPr>
-        <p:txBody>
-          <a:bodyPr wrap="square" anchor="t">
-            <a:spAutoFit/>
-          </a:bodyPr>
-          <a:lstStyle/>
-          <a:p>
-            <a:pPr algn="l"/>
-            <a:r>
-              <a:rPr sz="1400" b="0">
-                <a:solidFill>
-                  <a:srgbClr val="9096A1"/>
-                </a:solidFill>
-                <a:latin typeface="Arial"/>
-              </a:rPr>
-              <a:t>由本站爬蟲每日追蹤產業動態，AI 自動摘要與分類</a:t>
-            </a:r>
-          </a:p>
-        </p:txBody>
-      </p:sp>
-      <p:sp>
-        <p:nvSpPr>
-          <p:cNvPr id="5" name="TextBox 4"/>
-          <p:cNvSpPr txBox="1"/>
-          <p:nvPr/>
-        </p:nvSpPr>
-        <p:spPr>
-          <a:xfrm>
-            <a:off x="11430000" y="6446520"/>
-            <a:ext cx="548640" cy="274320"/>
-          </a:xfrm>
-          <a:prstGeom prst="rect">
-            <a:avLst/>
-          </a:prstGeom>
-          <a:noFill/>
-        </p:spPr>
-        <p:txBody>
-          <a:bodyPr wrap="square" anchor="t">
-            <a:spAutoFit/>
-          </a:bodyPr>
-          <a:lstStyle/>
-          <a:p>
-            <a:pPr algn="r"/>
-            <a:r>
-              <a:rPr sz="1000" b="0">
-                <a:solidFill>
-                  <a:srgbClr val="9096A1"/>
-                </a:solidFill>
-                <a:latin typeface="Arial"/>
-              </a:rPr>
-              <a:t>13</a:t>
             </a:r>
           </a:p>
         </p:txBody>
@@ -5080,8 +3997,8 @@
         </p:nvSpPr>
         <p:spPr>
           <a:xfrm>
-            <a:off x="731520" y="685800"/>
-            <a:ext cx="9144000" cy="365760"/>
+            <a:off x="548640" y="384048"/>
+            <a:ext cx="7315200" cy="320040"/>
           </a:xfrm>
           <a:prstGeom prst="rect">
             <a:avLst/>
@@ -5096,13 +4013,13 @@
           <a:p>
             <a:pPr algn="l"/>
             <a:r>
-              <a:rPr sz="1600" b="1">
+              <a:rPr sz="1100" b="1">
                 <a:solidFill>
                   <a:srgbClr val="FFB454"/>
                 </a:solidFill>
                 <a:latin typeface="Arial"/>
               </a:rPr>
-              <a:t>本期報告總覽</a:t>
+              <a:t>02 · SECTION　📝</a:t>
             </a:r>
           </a:p>
         </p:txBody>
@@ -5115,8 +4032,8 @@
         </p:nvSpPr>
         <p:spPr>
           <a:xfrm>
-            <a:off x="548640" y="2377440"/>
-            <a:ext cx="1944563" cy="1097280"/>
+            <a:off x="548640" y="713232"/>
+            <a:ext cx="10972800" cy="685800"/>
           </a:xfrm>
           <a:prstGeom prst="rect">
             <a:avLst/>
@@ -5129,29 +4046,73 @@
           </a:bodyPr>
           <a:lstStyle/>
           <a:p>
-            <a:pPr algn="ctr"/>
-            <a:r>
-              <a:rPr sz="5400" b="1">
+            <a:pPr algn="l"/>
+            <a:r>
+              <a:rPr sz="2600" b="1">
                 <a:solidFill>
                   <a:srgbClr val="F5F3EC"/>
                 </a:solidFill>
                 <a:latin typeface="Arial"/>
               </a:rPr>
-              <a:t>6</a:t>
-            </a:r>
-          </a:p>
-        </p:txBody>
-      </p:sp>
-      <p:sp>
-        <p:nvSpPr>
-          <p:cNvPr id="4" name="TextBox 3"/>
+              <a:t>一、本月摘要</a:t>
+            </a:r>
+          </a:p>
+        </p:txBody>
+      </p:sp>
+      <p:sp>
+        <p:nvSpPr>
+          <p:cNvPr id="4" name="Oval 3"/>
+          <p:cNvSpPr/>
+          <p:nvPr/>
+        </p:nvSpPr>
+        <p:spPr>
+          <a:xfrm>
+            <a:off x="594360" y="1728216"/>
+            <a:ext cx="100584" cy="100584"/>
+          </a:xfrm>
+          <a:prstGeom prst="ellipse">
+            <a:avLst/>
+          </a:prstGeom>
+          <a:solidFill>
+            <a:srgbClr val="4C7EFF"/>
+          </a:solidFill>
+          <a:ln>
+            <a:noFill/>
+          </a:ln>
+          <a:effectLst/>
+        </p:spPr>
+        <p:style>
+          <a:lnRef idx="1">
+            <a:schemeClr val="accent1"/>
+          </a:lnRef>
+          <a:fillRef idx="3">
+            <a:schemeClr val="accent1"/>
+          </a:fillRef>
+          <a:effectRef idx="2">
+            <a:schemeClr val="accent1"/>
+          </a:effectRef>
+          <a:fontRef idx="minor">
+            <a:schemeClr val="lt1"/>
+          </a:fontRef>
+        </p:style>
+        <p:txBody>
+          <a:bodyPr rtlCol="0" anchor="ctr"/>
+          <a:lstStyle/>
+          <a:p>
+            <a:pPr algn="ctr"/>
+          </a:p>
+        </p:txBody>
+      </p:sp>
+      <p:sp>
+        <p:nvSpPr>
+          <p:cNvPr id="5" name="TextBox 4"/>
           <p:cNvSpPr txBox="1"/>
           <p:nvPr/>
         </p:nvSpPr>
         <p:spPr>
           <a:xfrm>
-            <a:off x="548640" y="3520440"/>
-            <a:ext cx="1944563" cy="457200"/>
+            <a:off x="868680" y="1600200"/>
+            <a:ext cx="10698480" cy="1828800"/>
           </a:xfrm>
           <a:prstGeom prst="rect">
             <a:avLst/>
@@ -5159,55 +4120,24 @@
           <a:noFill/>
         </p:spPr>
         <p:txBody>
-          <a:bodyPr wrap="square" anchor="t">
+          <a:bodyPr wrap="square">
             <a:spAutoFit/>
           </a:bodyPr>
           <a:lstStyle/>
           <a:p>
-            <a:pPr algn="ctr"/>
-            <a:r>
-              <a:rPr sz="1400" b="0">
-                <a:solidFill>
-                  <a:srgbClr val="9096A1"/>
+            <a:pPr>
+              <a:lnSpc>
+                <a:spcPct val="115000"/>
+              </a:lnSpc>
+            </a:pPr>
+            <a:r>
+              <a:rPr sz="1450">
+                <a:solidFill>
+                  <a:srgbClr val="F5F3EC"/>
                 </a:solidFill>
                 <a:latin typeface="Arial"/>
               </a:rPr>
-              <a:t>涵蓋段落</a:t>
-            </a:r>
-          </a:p>
-        </p:txBody>
-      </p:sp>
-      <p:sp>
-        <p:nvSpPr>
-          <p:cNvPr id="5" name="TextBox 4"/>
-          <p:cNvSpPr txBox="1"/>
-          <p:nvPr/>
-        </p:nvSpPr>
-        <p:spPr>
-          <a:xfrm>
-            <a:off x="2767523" y="2377440"/>
-            <a:ext cx="1944563" cy="1097280"/>
-          </a:xfrm>
-          <a:prstGeom prst="rect">
-            <a:avLst/>
-          </a:prstGeom>
-          <a:noFill/>
-        </p:spPr>
-        <p:txBody>
-          <a:bodyPr wrap="square" anchor="t">
-            <a:spAutoFit/>
-          </a:bodyPr>
-          <a:lstStyle/>
-          <a:p>
-            <a:pPr algn="ctr"/>
-            <a:r>
-              <a:rPr sz="5400" b="1">
-                <a:solidFill>
-                  <a:srgbClr val="F5F3EC"/>
-                </a:solidFill>
-                <a:latin typeface="Arial"/>
-              </a:rPr>
-              <a:t>21</a:t>
+              <a:t>2026 年上半年全球投影機市場呈現「外熱內冷」的分化格局，中國國內市場受需求飽和與低價內捲影響銷量下滑 26%，促使極米、當貝與光峰等品牌加速拓展海外市場與車載/AI光學應用（投影時代）。供應鏈與核心元件端，台積電與索尼深化日本感測器合資，唯捷光電及環鴻科技亦大幅投資磷化銦（InP）雷射晶片與外部雷射模組，全力佈局 AI 資料中心光互連商機（DigiTimes）。產品技術方面，巴可與海信推動旗艦 4K/8K 3DLP 及三色雷射電視等頂級顯示規格，同時 REDMI 與當貝等品牌則透過雲台設計與輕量化三色雷射機型，加速下沉家用市場（投影時代、IT之家）。</a:t>
             </a:r>
           </a:p>
         </p:txBody>
@@ -5215,251 +4145,6 @@
       <p:sp>
         <p:nvSpPr>
           <p:cNvPr id="6" name="TextBox 5"/>
-          <p:cNvSpPr txBox="1"/>
-          <p:nvPr/>
-        </p:nvSpPr>
-        <p:spPr>
-          <a:xfrm>
-            <a:off x="2767523" y="3520440"/>
-            <a:ext cx="1944563" cy="457200"/>
-          </a:xfrm>
-          <a:prstGeom prst="rect">
-            <a:avLst/>
-          </a:prstGeom>
-          <a:noFill/>
-        </p:spPr>
-        <p:txBody>
-          <a:bodyPr wrap="square" anchor="t">
-            <a:spAutoFit/>
-          </a:bodyPr>
-          <a:lstStyle/>
-          <a:p>
-            <a:pPr algn="ctr"/>
-            <a:r>
-              <a:rPr sz="1400" b="0">
-                <a:solidFill>
-                  <a:srgbClr val="9096A1"/>
-                </a:solidFill>
-                <a:latin typeface="Arial"/>
-              </a:rPr>
-              <a:t>重點項目</a:t>
-            </a:r>
-          </a:p>
-        </p:txBody>
-      </p:sp>
-      <p:sp>
-        <p:nvSpPr>
-          <p:cNvPr id="7" name="TextBox 6"/>
-          <p:cNvSpPr txBox="1"/>
-          <p:nvPr/>
-        </p:nvSpPr>
-        <p:spPr>
-          <a:xfrm>
-            <a:off x="4986406" y="2377440"/>
-            <a:ext cx="1944563" cy="1097280"/>
-          </a:xfrm>
-          <a:prstGeom prst="rect">
-            <a:avLst/>
-          </a:prstGeom>
-          <a:noFill/>
-        </p:spPr>
-        <p:txBody>
-          <a:bodyPr wrap="square" anchor="t">
-            <a:spAutoFit/>
-          </a:bodyPr>
-          <a:lstStyle/>
-          <a:p>
-            <a:pPr algn="ctr"/>
-            <a:r>
-              <a:rPr sz="5400" b="1">
-                <a:solidFill>
-                  <a:srgbClr val="F5F3EC"/>
-                </a:solidFill>
-                <a:latin typeface="Arial"/>
-              </a:rPr>
-              <a:t>161</a:t>
-            </a:r>
-          </a:p>
-        </p:txBody>
-      </p:sp>
-      <p:sp>
-        <p:nvSpPr>
-          <p:cNvPr id="8" name="TextBox 7"/>
-          <p:cNvSpPr txBox="1"/>
-          <p:nvPr/>
-        </p:nvSpPr>
-        <p:spPr>
-          <a:xfrm>
-            <a:off x="4986406" y="3520440"/>
-            <a:ext cx="1944563" cy="457200"/>
-          </a:xfrm>
-          <a:prstGeom prst="rect">
-            <a:avLst/>
-          </a:prstGeom>
-          <a:noFill/>
-        </p:spPr>
-        <p:txBody>
-          <a:bodyPr wrap="square" anchor="t">
-            <a:spAutoFit/>
-          </a:bodyPr>
-          <a:lstStyle/>
-          <a:p>
-            <a:pPr algn="ctr"/>
-            <a:r>
-              <a:rPr sz="1400" b="0">
-                <a:solidFill>
-                  <a:srgbClr val="9096A1"/>
-                </a:solidFill>
-                <a:latin typeface="Arial"/>
-              </a:rPr>
-              <a:t>參考文章</a:t>
-            </a:r>
-          </a:p>
-        </p:txBody>
-      </p:sp>
-      <p:sp>
-        <p:nvSpPr>
-          <p:cNvPr id="9" name="TextBox 8"/>
-          <p:cNvSpPr txBox="1"/>
-          <p:nvPr/>
-        </p:nvSpPr>
-        <p:spPr>
-          <a:xfrm>
-            <a:off x="7205289" y="2377440"/>
-            <a:ext cx="1944563" cy="1097280"/>
-          </a:xfrm>
-          <a:prstGeom prst="rect">
-            <a:avLst/>
-          </a:prstGeom>
-          <a:noFill/>
-        </p:spPr>
-        <p:txBody>
-          <a:bodyPr wrap="square" anchor="t">
-            <a:spAutoFit/>
-          </a:bodyPr>
-          <a:lstStyle/>
-          <a:p>
-            <a:pPr algn="ctr"/>
-            <a:r>
-              <a:rPr sz="5400" b="1">
-                <a:solidFill>
-                  <a:srgbClr val="F5F3EC"/>
-                </a:solidFill>
-                <a:latin typeface="Arial"/>
-              </a:rPr>
-              <a:t>1</a:t>
-            </a:r>
-          </a:p>
-        </p:txBody>
-      </p:sp>
-      <p:sp>
-        <p:nvSpPr>
-          <p:cNvPr id="10" name="TextBox 9"/>
-          <p:cNvSpPr txBox="1"/>
-          <p:nvPr/>
-        </p:nvSpPr>
-        <p:spPr>
-          <a:xfrm>
-            <a:off x="7205289" y="3520440"/>
-            <a:ext cx="1944563" cy="457200"/>
-          </a:xfrm>
-          <a:prstGeom prst="rect">
-            <a:avLst/>
-          </a:prstGeom>
-          <a:noFill/>
-        </p:spPr>
-        <p:txBody>
-          <a:bodyPr wrap="square" anchor="t">
-            <a:spAutoFit/>
-          </a:bodyPr>
-          <a:lstStyle/>
-          <a:p>
-            <a:pPr algn="ctr"/>
-            <a:r>
-              <a:rPr sz="1400" b="0">
-                <a:solidFill>
-                  <a:srgbClr val="9096A1"/>
-                </a:solidFill>
-                <a:latin typeface="Arial"/>
-              </a:rPr>
-              <a:t>數據圖表</a:t>
-            </a:r>
-          </a:p>
-        </p:txBody>
-      </p:sp>
-      <p:sp>
-        <p:nvSpPr>
-          <p:cNvPr id="11" name="TextBox 10"/>
-          <p:cNvSpPr txBox="1"/>
-          <p:nvPr/>
-        </p:nvSpPr>
-        <p:spPr>
-          <a:xfrm>
-            <a:off x="9424172" y="2377440"/>
-            <a:ext cx="1944563" cy="1097280"/>
-          </a:xfrm>
-          <a:prstGeom prst="rect">
-            <a:avLst/>
-          </a:prstGeom>
-          <a:noFill/>
-        </p:spPr>
-        <p:txBody>
-          <a:bodyPr wrap="square" anchor="t">
-            <a:spAutoFit/>
-          </a:bodyPr>
-          <a:lstStyle/>
-          <a:p>
-            <a:pPr algn="ctr"/>
-            <a:r>
-              <a:rPr sz="5400" b="1">
-                <a:solidFill>
-                  <a:srgbClr val="F5F3EC"/>
-                </a:solidFill>
-                <a:latin typeface="Arial"/>
-              </a:rPr>
-              <a:t>1</a:t>
-            </a:r>
-          </a:p>
-        </p:txBody>
-      </p:sp>
-      <p:sp>
-        <p:nvSpPr>
-          <p:cNvPr id="12" name="TextBox 11"/>
-          <p:cNvSpPr txBox="1"/>
-          <p:nvPr/>
-        </p:nvSpPr>
-        <p:spPr>
-          <a:xfrm>
-            <a:off x="9424172" y="3520440"/>
-            <a:ext cx="1944563" cy="457200"/>
-          </a:xfrm>
-          <a:prstGeom prst="rect">
-            <a:avLst/>
-          </a:prstGeom>
-          <a:noFill/>
-        </p:spPr>
-        <p:txBody>
-          <a:bodyPr wrap="square" anchor="t">
-            <a:spAutoFit/>
-          </a:bodyPr>
-          <a:lstStyle/>
-          <a:p>
-            <a:pPr algn="ctr"/>
-            <a:r>
-              <a:rPr sz="1400" b="0">
-                <a:solidFill>
-                  <a:srgbClr val="9096A1"/>
-                </a:solidFill>
-                <a:latin typeface="Arial"/>
-              </a:rPr>
-              <a:t>比較表格</a:t>
-            </a:r>
-          </a:p>
-        </p:txBody>
-      </p:sp>
-      <p:sp>
-        <p:nvSpPr>
-          <p:cNvPr id="13" name="TextBox 12"/>
           <p:cNvSpPr txBox="1"/>
           <p:nvPr/>
         </p:nvSpPr>
@@ -5548,7 +4233,7 @@
                 </a:solidFill>
                 <a:latin typeface="Arial"/>
               </a:rPr>
-              <a:t>03 · SECTION　📝</a:t>
+              <a:t>03 · SECTION　📊</a:t>
             </a:r>
           </a:p>
         </p:txBody>
@@ -5583,97 +4268,32 @@
                 </a:solidFill>
                 <a:latin typeface="Arial"/>
               </a:rPr>
-              <a:t>一、本月摘要</a:t>
-            </a:r>
-          </a:p>
-        </p:txBody>
-      </p:sp>
-      <p:sp>
-        <p:nvSpPr>
-          <p:cNvPr id="4" name="Oval 3"/>
-          <p:cNvSpPr/>
-          <p:nvPr/>
-        </p:nvSpPr>
-        <p:spPr>
-          <a:xfrm>
-            <a:off x="594360" y="1728216"/>
-            <a:ext cx="100584" cy="100584"/>
-          </a:xfrm>
-          <a:prstGeom prst="ellipse">
-            <a:avLst/>
-          </a:prstGeom>
-          <a:solidFill>
-            <a:srgbClr val="4C7EFF"/>
-          </a:solidFill>
-          <a:ln>
-            <a:noFill/>
-          </a:ln>
-          <a:effectLst/>
-        </p:spPr>
-        <p:style>
-          <a:lnRef idx="1">
-            <a:schemeClr val="accent1"/>
-          </a:lnRef>
-          <a:fillRef idx="3">
-            <a:schemeClr val="accent1"/>
-          </a:fillRef>
-          <a:effectRef idx="2">
-            <a:schemeClr val="accent1"/>
-          </a:effectRef>
-          <a:fontRef idx="minor">
-            <a:schemeClr val="lt1"/>
-          </a:fontRef>
-        </p:style>
-        <p:txBody>
-          <a:bodyPr rtlCol="0" anchor="ctr"/>
-          <a:lstStyle/>
-          <a:p>
-            <a:pPr algn="ctr"/>
-          </a:p>
-        </p:txBody>
-      </p:sp>
+              <a:t>二、市場數據</a:t>
+            </a:r>
+          </a:p>
+        </p:txBody>
+      </p:sp>
+      <p:graphicFrame>
+        <p:nvGraphicFramePr>
+          <p:cNvPr id="4" name="Chart 3"/>
+          <p:cNvGraphicFramePr>
+            <a:graphicFrameLocks noGrp="1"/>
+          </p:cNvGraphicFramePr>
+          <p:nvPr/>
+        </p:nvGraphicFramePr>
+        <p:xfrm>
+          <a:off x="731520" y="1554480"/>
+          <a:ext cx="10698480" cy="4754880"/>
+        </p:xfrm>
+        <a:graphic>
+          <a:graphicData uri="http://schemas.openxmlformats.org/drawingml/2006/chart">
+            <c:chart xmlns:c="http://schemas.openxmlformats.org/drawingml/2006/chart" r:id="rId2"/>
+          </a:graphicData>
+        </a:graphic>
+      </p:graphicFrame>
       <p:sp>
         <p:nvSpPr>
           <p:cNvPr id="5" name="TextBox 4"/>
-          <p:cNvSpPr txBox="1"/>
-          <p:nvPr/>
-        </p:nvSpPr>
-        <p:spPr>
-          <a:xfrm>
-            <a:off x="868680" y="1600200"/>
-            <a:ext cx="10698480" cy="1828800"/>
-          </a:xfrm>
-          <a:prstGeom prst="rect">
-            <a:avLst/>
-          </a:prstGeom>
-          <a:noFill/>
-        </p:spPr>
-        <p:txBody>
-          <a:bodyPr wrap="square">
-            <a:spAutoFit/>
-          </a:bodyPr>
-          <a:lstStyle/>
-          <a:p>
-            <a:pPr>
-              <a:lnSpc>
-                <a:spcPct val="115000"/>
-              </a:lnSpc>
-            </a:pPr>
-            <a:r>
-              <a:rPr sz="1450">
-                <a:solidFill>
-                  <a:srgbClr val="F5F3EC"/>
-                </a:solidFill>
-                <a:latin typeface="Arial"/>
-              </a:rPr>
-              <a:t>2026 年上半年全球投影機市場呈現「外熱內冷」的分化格局，中國國內市場受需求飽和與低價內捲影響銷量下滑 26%，促使極米、當貝與光峰等品牌加速拓展海外市場與車載/AI光學應用（投影時代）。供應鏈與核心元件端，台積電與索尼深化日本感測器合資，唯捷光電及環鴻科技亦大幅投資磷化銦（InP）雷射晶片與外部雷射模組，全力佈局 AI 資料中心光互連商機（DigiTimes）。產品技術方面，巴可與海信推動旗艦 4K/8K 3DLP 及三色雷射電視等頂級顯示規格，同時 REDMI 與當貝等品牌則透過雲台設計與輕量化三色雷射機型，加速下沉家用市場（投影時代、IT之家）。</a:t>
-            </a:r>
-          </a:p>
-        </p:txBody>
-      </p:sp>
-      <p:sp>
-        <p:nvSpPr>
-          <p:cNvPr id="6" name="TextBox 5"/>
           <p:cNvSpPr txBox="1"/>
           <p:nvPr/>
         </p:nvSpPr>
@@ -5804,25 +4424,27 @@
       </p:sp>
       <p:sp>
         <p:nvSpPr>
-          <p:cNvPr id="4" name="Oval 3"/>
+          <p:cNvPr id="4" name="Rounded Rectangle 3"/>
           <p:cNvSpPr/>
           <p:nvPr/>
         </p:nvSpPr>
         <p:spPr>
           <a:xfrm>
-            <a:off x="9418320" y="-1371600"/>
-            <a:ext cx="5486400" cy="5486400"/>
-          </a:xfrm>
-          <a:prstGeom prst="ellipse">
-            <a:avLst/>
+            <a:off x="548640" y="1600200"/>
+            <a:ext cx="3545738" cy="2263140"/>
+          </a:xfrm>
+          <a:prstGeom prst="roundRect">
+            <a:avLst>
+              <a:gd name="adj" fmla="val 6000"/>
+            </a:avLst>
           </a:prstGeom>
           <a:solidFill>
-            <a:srgbClr val="4C7EFF">
-              <a:alpha val="10000"/>
-            </a:srgbClr>
+            <a:srgbClr val="23262F"/>
           </a:solidFill>
-          <a:ln>
-            <a:noFill/>
+          <a:ln w="12700">
+            <a:solidFill>
+              <a:srgbClr val="4C7EFF"/>
+            </a:solidFill>
           </a:ln>
           <a:effectLst/>
         </p:spPr>
@@ -5856,8 +4478,8 @@
         </p:nvSpPr>
         <p:spPr>
           <a:xfrm>
-            <a:off x="548640" y="2286000"/>
-            <a:ext cx="11064240" cy="1828800"/>
+            <a:off x="749808" y="1764792"/>
+            <a:ext cx="3143402" cy="457200"/>
           </a:xfrm>
           <a:prstGeom prst="rect">
             <a:avLst/>
@@ -5870,15 +4492,15 @@
           </a:bodyPr>
           <a:lstStyle/>
           <a:p>
-            <a:pPr algn="ctr"/>
-            <a:r>
-              <a:rPr sz="8800" b="1">
-                <a:solidFill>
-                  <a:srgbClr val="FFB454"/>
+            <a:pPr algn="l"/>
+            <a:r>
+              <a:rPr sz="1600" b="1">
+                <a:solidFill>
+                  <a:srgbClr val="4C7EFF"/>
                 </a:solidFill>
                 <a:latin typeface="Arial"/>
               </a:rPr>
-              <a:t>+87.63%</a:t>
+              <a:t>全球投影機市場</a:t>
             </a:r>
           </a:p>
         </p:txBody>
@@ -5891,8 +4513,95 @@
         </p:nvSpPr>
         <p:spPr>
           <a:xfrm>
-            <a:off x="777240" y="4160520"/>
-            <a:ext cx="10607040" cy="548640"/>
+            <a:off x="749808" y="2258568"/>
+            <a:ext cx="3143402" cy="1440180"/>
+          </a:xfrm>
+          <a:prstGeom prst="rect">
+            <a:avLst/>
+          </a:prstGeom>
+          <a:noFill/>
+        </p:spPr>
+        <p:txBody>
+          <a:bodyPr wrap="square">
+            <a:normAutofit/>
+          </a:bodyPr>
+          <a:lstStyle/>
+          <a:p>
+            <a:pPr>
+              <a:lnSpc>
+                <a:spcPct val="120000"/>
+              </a:lnSpc>
+            </a:pPr>
+            <a:r>
+              <a:rPr sz="1300">
+                <a:solidFill>
+                  <a:srgbClr val="F5F3EC"/>
+                </a:solidFill>
+                <a:latin typeface="Arial"/>
+              </a:rPr>
+              <a:t>2026 上半年中國國內銷量受政策退潮與需求飽和影響大幅下滑 26%，海外市場則在品牌業者出海帶動下逆勢成長（洛圖科技、投影時代）。</a:t>
+            </a:r>
+          </a:p>
+        </p:txBody>
+      </p:sp>
+      <p:sp>
+        <p:nvSpPr>
+          <p:cNvPr id="7" name="Rounded Rectangle 6"/>
+          <p:cNvSpPr/>
+          <p:nvPr/>
+        </p:nvSpPr>
+        <p:spPr>
+          <a:xfrm>
+            <a:off x="4322978" y="1600200"/>
+            <a:ext cx="3545738" cy="2263140"/>
+          </a:xfrm>
+          <a:prstGeom prst="roundRect">
+            <a:avLst>
+              <a:gd name="adj" fmla="val 6000"/>
+            </a:avLst>
+          </a:prstGeom>
+          <a:solidFill>
+            <a:srgbClr val="23262F"/>
+          </a:solidFill>
+          <a:ln w="12700">
+            <a:solidFill>
+              <a:srgbClr val="FFB454"/>
+            </a:solidFill>
+          </a:ln>
+          <a:effectLst/>
+        </p:spPr>
+        <p:style>
+          <a:lnRef idx="1">
+            <a:schemeClr val="accent1"/>
+          </a:lnRef>
+          <a:fillRef idx="3">
+            <a:schemeClr val="accent1"/>
+          </a:fillRef>
+          <a:effectRef idx="2">
+            <a:schemeClr val="accent1"/>
+          </a:effectRef>
+          <a:fontRef idx="minor">
+            <a:schemeClr val="lt1"/>
+          </a:fontRef>
+        </p:style>
+        <p:txBody>
+          <a:bodyPr rtlCol="0" anchor="ctr"/>
+          <a:lstStyle/>
+          <a:p>
+            <a:pPr algn="ctr"/>
+          </a:p>
+        </p:txBody>
+      </p:sp>
+      <p:sp>
+        <p:nvSpPr>
+          <p:cNvPr id="8" name="TextBox 7"/>
+          <p:cNvSpPr txBox="1"/>
+          <p:nvPr/>
+        </p:nvSpPr>
+        <p:spPr>
+          <a:xfrm>
+            <a:off x="4524146" y="1764792"/>
+            <a:ext cx="3143402" cy="457200"/>
           </a:xfrm>
           <a:prstGeom prst="rect">
             <a:avLst/>
@@ -5905,29 +4614,116 @@
           </a:bodyPr>
           <a:lstStyle/>
           <a:p>
-            <a:pPr algn="ctr"/>
-            <a:r>
-              <a:rPr sz="2200" b="1">
-                <a:solidFill>
-                  <a:srgbClr val="F5F3EC"/>
+            <a:pPr algn="l"/>
+            <a:r>
+              <a:rPr sz="1600" b="1">
+                <a:solidFill>
+                  <a:srgbClr val="FFB454"/>
                 </a:solidFill>
                 <a:latin typeface="Arial"/>
               </a:rPr>
-              <a:t>極米科技 2026 年上半年海外收入年增率</a:t>
-            </a:r>
-          </a:p>
-        </p:txBody>
-      </p:sp>
-      <p:sp>
-        <p:nvSpPr>
-          <p:cNvPr id="7" name="TextBox 6"/>
+              <a:t>極米科技</a:t>
+            </a:r>
+          </a:p>
+        </p:txBody>
+      </p:sp>
+      <p:sp>
+        <p:nvSpPr>
+          <p:cNvPr id="9" name="TextBox 8"/>
           <p:cNvSpPr txBox="1"/>
           <p:nvPr/>
         </p:nvSpPr>
         <p:spPr>
           <a:xfrm>
-            <a:off x="1371600" y="4800600"/>
-            <a:ext cx="9418320" cy="731520"/>
+            <a:off x="4524146" y="2258568"/>
+            <a:ext cx="3143402" cy="1440180"/>
+          </a:xfrm>
+          <a:prstGeom prst="rect">
+            <a:avLst/>
+          </a:prstGeom>
+          <a:noFill/>
+        </p:spPr>
+        <p:txBody>
+          <a:bodyPr wrap="square">
+            <a:normAutofit/>
+          </a:bodyPr>
+          <a:lstStyle/>
+          <a:p>
+            <a:pPr>
+              <a:lnSpc>
+                <a:spcPct val="120000"/>
+              </a:lnSpc>
+            </a:pPr>
+            <a:r>
+              <a:rPr sz="1300">
+                <a:solidFill>
+                  <a:srgbClr val="F5F3EC"/>
+                </a:solidFill>
+                <a:latin typeface="Arial"/>
+              </a:rPr>
+              <a:t>2026 上半年憑藉海外收入年增 87.63%，拉升整體毛利率至 39%，並積極布局三色雷射商顯與車載光學市場（投影時代）。</a:t>
+            </a:r>
+          </a:p>
+        </p:txBody>
+      </p:sp>
+      <p:sp>
+        <p:nvSpPr>
+          <p:cNvPr id="10" name="Rounded Rectangle 9"/>
+          <p:cNvSpPr/>
+          <p:nvPr/>
+        </p:nvSpPr>
+        <p:spPr>
+          <a:xfrm>
+            <a:off x="8097316" y="1600200"/>
+            <a:ext cx="3545738" cy="2263140"/>
+          </a:xfrm>
+          <a:prstGeom prst="roundRect">
+            <a:avLst>
+              <a:gd name="adj" fmla="val 6000"/>
+            </a:avLst>
+          </a:prstGeom>
+          <a:solidFill>
+            <a:srgbClr val="23262F"/>
+          </a:solidFill>
+          <a:ln w="12700">
+            <a:solidFill>
+              <a:srgbClr val="8B7FD6"/>
+            </a:solidFill>
+          </a:ln>
+          <a:effectLst/>
+        </p:spPr>
+        <p:style>
+          <a:lnRef idx="1">
+            <a:schemeClr val="accent1"/>
+          </a:lnRef>
+          <a:fillRef idx="3">
+            <a:schemeClr val="accent1"/>
+          </a:fillRef>
+          <a:effectRef idx="2">
+            <a:schemeClr val="accent1"/>
+          </a:effectRef>
+          <a:fontRef idx="minor">
+            <a:schemeClr val="lt1"/>
+          </a:fontRef>
+        </p:style>
+        <p:txBody>
+          <a:bodyPr rtlCol="0" anchor="ctr"/>
+          <a:lstStyle/>
+          <a:p>
+            <a:pPr algn="ctr"/>
+          </a:p>
+        </p:txBody>
+      </p:sp>
+      <p:sp>
+        <p:nvSpPr>
+          <p:cNvPr id="11" name="TextBox 10"/>
+          <p:cNvSpPr txBox="1"/>
+          <p:nvPr/>
+        </p:nvSpPr>
+        <p:spPr>
+          <a:xfrm>
+            <a:off x="8298484" y="1764792"/>
+            <a:ext cx="3143402" cy="457200"/>
           </a:xfrm>
           <a:prstGeom prst="rect">
             <a:avLst/>
@@ -5940,22 +4736,305 @@
           </a:bodyPr>
           <a:lstStyle/>
           <a:p>
-            <a:pPr algn="ctr"/>
-            <a:r>
-              <a:rPr sz="1400" b="0">
-                <a:solidFill>
-                  <a:srgbClr val="9096A1"/>
+            <a:pPr algn="l"/>
+            <a:r>
+              <a:rPr sz="1600" b="1">
+                <a:solidFill>
+                  <a:srgbClr val="8B7FD6"/>
                 </a:solidFill>
                 <a:latin typeface="Arial"/>
               </a:rPr>
-              <a:t>帶動整體毛利率升至 39%，有效減緩中國國內需求放緩衝擊</a:t>
-            </a:r>
-          </a:p>
-        </p:txBody>
-      </p:sp>
-      <p:sp>
-        <p:nvSpPr>
-          <p:cNvPr id="8" name="TextBox 7"/>
+              <a:t>安克創新（Nebula）</a:t>
+            </a:r>
+          </a:p>
+        </p:txBody>
+      </p:sp>
+      <p:sp>
+        <p:nvSpPr>
+          <p:cNvPr id="12" name="TextBox 11"/>
+          <p:cNvSpPr txBox="1"/>
+          <p:nvPr/>
+        </p:nvSpPr>
+        <p:spPr>
+          <a:xfrm>
+            <a:off x="8298484" y="2258568"/>
+            <a:ext cx="3143402" cy="1440180"/>
+          </a:xfrm>
+          <a:prstGeom prst="rect">
+            <a:avLst/>
+          </a:prstGeom>
+          <a:noFill/>
+        </p:spPr>
+        <p:txBody>
+          <a:bodyPr wrap="square">
+            <a:normAutofit/>
+          </a:bodyPr>
+          <a:lstStyle/>
+          <a:p>
+            <a:pPr>
+              <a:lnSpc>
+                <a:spcPct val="120000"/>
+              </a:lnSpc>
+            </a:pPr>
+            <a:r>
+              <a:rPr sz="1300">
+                <a:solidFill>
+                  <a:srgbClr val="F5F3EC"/>
+                </a:solidFill>
+                <a:latin typeface="Arial"/>
+              </a:rPr>
+              <a:t>2026 上半年總營收達 166.05 億元人民幣（年增 29.05%），其中包含 Nebula 投影機在內的智慧影音板塊營收達 34.85 億元人民幣（年增 24.53%）（投影時代）。</a:t>
+            </a:r>
+          </a:p>
+        </p:txBody>
+      </p:sp>
+      <p:sp>
+        <p:nvSpPr>
+          <p:cNvPr id="13" name="Rounded Rectangle 12"/>
+          <p:cNvSpPr/>
+          <p:nvPr/>
+        </p:nvSpPr>
+        <p:spPr>
+          <a:xfrm>
+            <a:off x="548640" y="4091939"/>
+            <a:ext cx="3545738" cy="2263140"/>
+          </a:xfrm>
+          <a:prstGeom prst="roundRect">
+            <a:avLst>
+              <a:gd name="adj" fmla="val 6000"/>
+            </a:avLst>
+          </a:prstGeom>
+          <a:solidFill>
+            <a:srgbClr val="23262F"/>
+          </a:solidFill>
+          <a:ln w="12700">
+            <a:solidFill>
+              <a:srgbClr val="6FCF97"/>
+            </a:solidFill>
+          </a:ln>
+          <a:effectLst/>
+        </p:spPr>
+        <p:style>
+          <a:lnRef idx="1">
+            <a:schemeClr val="accent1"/>
+          </a:lnRef>
+          <a:fillRef idx="3">
+            <a:schemeClr val="accent1"/>
+          </a:fillRef>
+          <a:effectRef idx="2">
+            <a:schemeClr val="accent1"/>
+          </a:effectRef>
+          <a:fontRef idx="minor">
+            <a:schemeClr val="lt1"/>
+          </a:fontRef>
+        </p:style>
+        <p:txBody>
+          <a:bodyPr rtlCol="0" anchor="ctr"/>
+          <a:lstStyle/>
+          <a:p>
+            <a:pPr algn="ctr"/>
+          </a:p>
+        </p:txBody>
+      </p:sp>
+      <p:sp>
+        <p:nvSpPr>
+          <p:cNvPr id="14" name="TextBox 13"/>
+          <p:cNvSpPr txBox="1"/>
+          <p:nvPr/>
+        </p:nvSpPr>
+        <p:spPr>
+          <a:xfrm>
+            <a:off x="749808" y="4256531"/>
+            <a:ext cx="3143402" cy="457200"/>
+          </a:xfrm>
+          <a:prstGeom prst="rect">
+            <a:avLst/>
+          </a:prstGeom>
+          <a:noFill/>
+        </p:spPr>
+        <p:txBody>
+          <a:bodyPr wrap="square" anchor="t">
+            <a:spAutoFit/>
+          </a:bodyPr>
+          <a:lstStyle/>
+          <a:p>
+            <a:pPr algn="l"/>
+            <a:r>
+              <a:rPr sz="1600" b="1">
+                <a:solidFill>
+                  <a:srgbClr val="6FCF97"/>
+                </a:solidFill>
+                <a:latin typeface="Arial"/>
+              </a:rPr>
+              <a:t>中光學</a:t>
+            </a:r>
+          </a:p>
+        </p:txBody>
+      </p:sp>
+      <p:sp>
+        <p:nvSpPr>
+          <p:cNvPr id="15" name="TextBox 14"/>
+          <p:cNvSpPr txBox="1"/>
+          <p:nvPr/>
+        </p:nvSpPr>
+        <p:spPr>
+          <a:xfrm>
+            <a:off x="749808" y="4750307"/>
+            <a:ext cx="3143402" cy="1440180"/>
+          </a:xfrm>
+          <a:prstGeom prst="rect">
+            <a:avLst/>
+          </a:prstGeom>
+          <a:noFill/>
+        </p:spPr>
+        <p:txBody>
+          <a:bodyPr wrap="square">
+            <a:normAutofit/>
+          </a:bodyPr>
+          <a:lstStyle/>
+          <a:p>
+            <a:pPr>
+              <a:lnSpc>
+                <a:spcPct val="120000"/>
+              </a:lnSpc>
+            </a:pPr>
+            <a:r>
+              <a:rPr sz="1300">
+                <a:solidFill>
+                  <a:srgbClr val="F5F3EC"/>
+                </a:solidFill>
+                <a:latin typeface="Arial"/>
+              </a:rPr>
+              <a:t>2026 上半年營收達 7.25 億元人民幣（年增 6.71%），淨虧損同比縮減 39.95%，其中投影機整機及配件營收為 1.18 億元人民幣（年減 5.72%）（投影時代）。</a:t>
+            </a:r>
+          </a:p>
+        </p:txBody>
+      </p:sp>
+      <p:sp>
+        <p:nvSpPr>
+          <p:cNvPr id="16" name="Rounded Rectangle 15"/>
+          <p:cNvSpPr/>
+          <p:nvPr/>
+        </p:nvSpPr>
+        <p:spPr>
+          <a:xfrm>
+            <a:off x="4322978" y="4091939"/>
+            <a:ext cx="3545738" cy="2263140"/>
+          </a:xfrm>
+          <a:prstGeom prst="roundRect">
+            <a:avLst>
+              <a:gd name="adj" fmla="val 6000"/>
+            </a:avLst>
+          </a:prstGeom>
+          <a:solidFill>
+            <a:srgbClr val="23262F"/>
+          </a:solidFill>
+          <a:ln w="12700">
+            <a:solidFill>
+              <a:srgbClr val="4C7EFF"/>
+            </a:solidFill>
+          </a:ln>
+          <a:effectLst/>
+        </p:spPr>
+        <p:style>
+          <a:lnRef idx="1">
+            <a:schemeClr val="accent1"/>
+          </a:lnRef>
+          <a:fillRef idx="3">
+            <a:schemeClr val="accent1"/>
+          </a:fillRef>
+          <a:effectRef idx="2">
+            <a:schemeClr val="accent1"/>
+          </a:effectRef>
+          <a:fontRef idx="minor">
+            <a:schemeClr val="lt1"/>
+          </a:fontRef>
+        </p:style>
+        <p:txBody>
+          <a:bodyPr rtlCol="0" anchor="ctr"/>
+          <a:lstStyle/>
+          <a:p>
+            <a:pPr algn="ctr"/>
+          </a:p>
+        </p:txBody>
+      </p:sp>
+      <p:sp>
+        <p:nvSpPr>
+          <p:cNvPr id="17" name="TextBox 16"/>
+          <p:cNvSpPr txBox="1"/>
+          <p:nvPr/>
+        </p:nvSpPr>
+        <p:spPr>
+          <a:xfrm>
+            <a:off x="4524146" y="4256531"/>
+            <a:ext cx="3143402" cy="457200"/>
+          </a:xfrm>
+          <a:prstGeom prst="rect">
+            <a:avLst/>
+          </a:prstGeom>
+          <a:noFill/>
+        </p:spPr>
+        <p:txBody>
+          <a:bodyPr wrap="square" anchor="t">
+            <a:spAutoFit/>
+          </a:bodyPr>
+          <a:lstStyle/>
+          <a:p>
+            <a:pPr algn="l"/>
+            <a:r>
+              <a:rPr sz="1600" b="1">
+                <a:solidFill>
+                  <a:srgbClr val="4C7EFF"/>
+                </a:solidFill>
+                <a:latin typeface="Arial"/>
+              </a:rPr>
+              <a:t>區域通路行情</a:t>
+            </a:r>
+          </a:p>
+        </p:txBody>
+      </p:sp>
+      <p:sp>
+        <p:nvSpPr>
+          <p:cNvPr id="18" name="TextBox 17"/>
+          <p:cNvSpPr txBox="1"/>
+          <p:nvPr/>
+        </p:nvSpPr>
+        <p:spPr>
+          <a:xfrm>
+            <a:off x="4524146" y="4750307"/>
+            <a:ext cx="3143402" cy="1440180"/>
+          </a:xfrm>
+          <a:prstGeom prst="rect">
+            <a:avLst/>
+          </a:prstGeom>
+          <a:noFill/>
+        </p:spPr>
+        <p:txBody>
+          <a:bodyPr wrap="square">
+            <a:normAutofit/>
+          </a:bodyPr>
+          <a:lstStyle/>
+          <a:p>
+            <a:pPr>
+              <a:lnSpc>
+                <a:spcPct val="120000"/>
+              </a:lnSpc>
+            </a:pPr>
+            <a:r>
+              <a:rPr sz="1300">
+                <a:solidFill>
+                  <a:srgbClr val="F5F3EC"/>
+                </a:solidFill>
+                <a:latin typeface="Arial"/>
+              </a:rPr>
+              <a:t>松下、愛普生、明基、索諾克與易仁科技等品牌多款商用及工程投影機種，本月於北京實體經銷通路集中展開特價促銷（ZOL投影機頻道）。</a:t>
+            </a:r>
+          </a:p>
+        </p:txBody>
+      </p:sp>
+      <p:sp>
+        <p:nvSpPr>
+          <p:cNvPr id="19" name="TextBox 18"/>
           <p:cNvSpPr txBox="1"/>
           <p:nvPr/>
         </p:nvSpPr>
@@ -6044,897 +5123,7 @@
                 </a:solidFill>
                 <a:latin typeface="Arial"/>
               </a:rPr>
-              <a:t>05 · SECTION　📊</a:t>
-            </a:r>
-          </a:p>
-        </p:txBody>
-      </p:sp>
-      <p:sp>
-        <p:nvSpPr>
-          <p:cNvPr id="3" name="TextBox 2"/>
-          <p:cNvSpPr txBox="1"/>
-          <p:nvPr/>
-        </p:nvSpPr>
-        <p:spPr>
-          <a:xfrm>
-            <a:off x="548640" y="713232"/>
-            <a:ext cx="10972800" cy="685800"/>
-          </a:xfrm>
-          <a:prstGeom prst="rect">
-            <a:avLst/>
-          </a:prstGeom>
-          <a:noFill/>
-        </p:spPr>
-        <p:txBody>
-          <a:bodyPr wrap="square" anchor="t">
-            <a:spAutoFit/>
-          </a:bodyPr>
-          <a:lstStyle/>
-          <a:p>
-            <a:pPr algn="l"/>
-            <a:r>
-              <a:rPr sz="2600" b="1">
-                <a:solidFill>
-                  <a:srgbClr val="F5F3EC"/>
-                </a:solidFill>
-                <a:latin typeface="Arial"/>
-              </a:rPr>
-              <a:t>二、市場數據</a:t>
-            </a:r>
-          </a:p>
-        </p:txBody>
-      </p:sp>
-      <p:graphicFrame>
-        <p:nvGraphicFramePr>
-          <p:cNvPr id="4" name="Chart 3"/>
-          <p:cNvGraphicFramePr>
-            <a:graphicFrameLocks noGrp="1"/>
-          </p:cNvGraphicFramePr>
-          <p:nvPr/>
-        </p:nvGraphicFramePr>
-        <p:xfrm>
-          <a:off x="731520" y="1554480"/>
-          <a:ext cx="10698480" cy="4754880"/>
-        </p:xfrm>
-        <a:graphic>
-          <a:graphicData uri="http://schemas.openxmlformats.org/drawingml/2006/chart">
-            <c:chart xmlns:c="http://schemas.openxmlformats.org/drawingml/2006/chart" r:id="rId2"/>
-          </a:graphicData>
-        </a:graphic>
-      </p:graphicFrame>
-      <p:sp>
-        <p:nvSpPr>
-          <p:cNvPr id="5" name="TextBox 4"/>
-          <p:cNvSpPr txBox="1"/>
-          <p:nvPr/>
-        </p:nvSpPr>
-        <p:spPr>
-          <a:xfrm>
-            <a:off x="11430000" y="6446520"/>
-            <a:ext cx="548640" cy="274320"/>
-          </a:xfrm>
-          <a:prstGeom prst="rect">
-            <a:avLst/>
-          </a:prstGeom>
-          <a:noFill/>
-        </p:spPr>
-        <p:txBody>
-          <a:bodyPr wrap="square" anchor="t">
-            <a:spAutoFit/>
-          </a:bodyPr>
-          <a:lstStyle/>
-          <a:p>
-            <a:pPr algn="r"/>
-            <a:r>
-              <a:rPr sz="1000" b="0">
-                <a:solidFill>
-                  <a:srgbClr val="9096A1"/>
-                </a:solidFill>
-                <a:latin typeface="Arial"/>
-              </a:rPr>
-              <a:t>05</a:t>
-            </a:r>
-          </a:p>
-        </p:txBody>
-      </p:sp>
-    </p:spTree>
-  </p:cSld>
-  <p:clrMapOvr>
-    <a:masterClrMapping/>
-  </p:clrMapOvr>
-</p:sld>
-</file>
-
-<file path=ppt/slides/slide6.xml><?xml version="1.0" encoding="utf-8"?>
-<p:sld xmlns:a="http://schemas.openxmlformats.org/drawingml/2006/main" xmlns:p="http://schemas.openxmlformats.org/presentationml/2006/main" xmlns:r="http://schemas.openxmlformats.org/officeDocument/2006/relationships">
-  <p:cSld>
-    <p:bg>
-      <p:bgPr>
-        <a:solidFill>
-          <a:srgbClr val="14161A"/>
-        </a:solidFill>
-        <a:effectLst/>
-      </p:bgPr>
-    </p:bg>
-    <p:spTree>
-      <p:nvGrpSpPr>
-        <p:cNvPr id="1" name=""/>
-        <p:cNvGrpSpPr/>
-        <p:nvPr/>
-      </p:nvGrpSpPr>
-      <p:grpSpPr/>
-      <p:sp>
-        <p:nvSpPr>
-          <p:cNvPr id="2" name="TextBox 1"/>
-          <p:cNvSpPr txBox="1"/>
-          <p:nvPr/>
-        </p:nvSpPr>
-        <p:spPr>
-          <a:xfrm>
-            <a:off x="548640" y="384048"/>
-            <a:ext cx="7315200" cy="320040"/>
-          </a:xfrm>
-          <a:prstGeom prst="rect">
-            <a:avLst/>
-          </a:prstGeom>
-          <a:noFill/>
-        </p:spPr>
-        <p:txBody>
-          <a:bodyPr wrap="square" anchor="t">
-            <a:spAutoFit/>
-          </a:bodyPr>
-          <a:lstStyle/>
-          <a:p>
-            <a:pPr algn="l"/>
-            <a:r>
-              <a:rPr sz="1100" b="1">
-                <a:solidFill>
-                  <a:srgbClr val="FFB454"/>
-                </a:solidFill>
-                <a:latin typeface="Arial"/>
-              </a:rPr>
-              <a:t>06 · SECTION　📊</a:t>
-            </a:r>
-          </a:p>
-        </p:txBody>
-      </p:sp>
-      <p:sp>
-        <p:nvSpPr>
-          <p:cNvPr id="3" name="TextBox 2"/>
-          <p:cNvSpPr txBox="1"/>
-          <p:nvPr/>
-        </p:nvSpPr>
-        <p:spPr>
-          <a:xfrm>
-            <a:off x="548640" y="713232"/>
-            <a:ext cx="10972800" cy="685800"/>
-          </a:xfrm>
-          <a:prstGeom prst="rect">
-            <a:avLst/>
-          </a:prstGeom>
-          <a:noFill/>
-        </p:spPr>
-        <p:txBody>
-          <a:bodyPr wrap="square" anchor="t">
-            <a:spAutoFit/>
-          </a:bodyPr>
-          <a:lstStyle/>
-          <a:p>
-            <a:pPr algn="l"/>
-            <a:r>
-              <a:rPr sz="2600" b="1">
-                <a:solidFill>
-                  <a:srgbClr val="F5F3EC"/>
-                </a:solidFill>
-                <a:latin typeface="Arial"/>
-              </a:rPr>
-              <a:t>二、市場數據</a:t>
-            </a:r>
-          </a:p>
-        </p:txBody>
-      </p:sp>
-      <p:sp>
-        <p:nvSpPr>
-          <p:cNvPr id="4" name="Rounded Rectangle 3"/>
-          <p:cNvSpPr/>
-          <p:nvPr/>
-        </p:nvSpPr>
-        <p:spPr>
-          <a:xfrm>
-            <a:off x="548640" y="1600200"/>
-            <a:ext cx="3545738" cy="2263140"/>
-          </a:xfrm>
-          <a:prstGeom prst="roundRect">
-            <a:avLst>
-              <a:gd name="adj" fmla="val 6000"/>
-            </a:avLst>
-          </a:prstGeom>
-          <a:solidFill>
-            <a:srgbClr val="23262F"/>
-          </a:solidFill>
-          <a:ln w="12700">
-            <a:solidFill>
-              <a:srgbClr val="4C7EFF"/>
-            </a:solidFill>
-          </a:ln>
-          <a:effectLst/>
-        </p:spPr>
-        <p:style>
-          <a:lnRef idx="1">
-            <a:schemeClr val="accent1"/>
-          </a:lnRef>
-          <a:fillRef idx="3">
-            <a:schemeClr val="accent1"/>
-          </a:fillRef>
-          <a:effectRef idx="2">
-            <a:schemeClr val="accent1"/>
-          </a:effectRef>
-          <a:fontRef idx="minor">
-            <a:schemeClr val="lt1"/>
-          </a:fontRef>
-        </p:style>
-        <p:txBody>
-          <a:bodyPr rtlCol="0" anchor="ctr"/>
-          <a:lstStyle/>
-          <a:p>
-            <a:pPr algn="ctr"/>
-          </a:p>
-        </p:txBody>
-      </p:sp>
-      <p:sp>
-        <p:nvSpPr>
-          <p:cNvPr id="5" name="TextBox 4"/>
-          <p:cNvSpPr txBox="1"/>
-          <p:nvPr/>
-        </p:nvSpPr>
-        <p:spPr>
-          <a:xfrm>
-            <a:off x="749808" y="1764792"/>
-            <a:ext cx="3143402" cy="457200"/>
-          </a:xfrm>
-          <a:prstGeom prst="rect">
-            <a:avLst/>
-          </a:prstGeom>
-          <a:noFill/>
-        </p:spPr>
-        <p:txBody>
-          <a:bodyPr wrap="square" anchor="t">
-            <a:spAutoFit/>
-          </a:bodyPr>
-          <a:lstStyle/>
-          <a:p>
-            <a:pPr algn="l"/>
-            <a:r>
-              <a:rPr sz="1600" b="1">
-                <a:solidFill>
-                  <a:srgbClr val="4C7EFF"/>
-                </a:solidFill>
-                <a:latin typeface="Arial"/>
-              </a:rPr>
-              <a:t>全球投影機市場</a:t>
-            </a:r>
-          </a:p>
-        </p:txBody>
-      </p:sp>
-      <p:sp>
-        <p:nvSpPr>
-          <p:cNvPr id="6" name="TextBox 5"/>
-          <p:cNvSpPr txBox="1"/>
-          <p:nvPr/>
-        </p:nvSpPr>
-        <p:spPr>
-          <a:xfrm>
-            <a:off x="749808" y="2258568"/>
-            <a:ext cx="3143402" cy="1440180"/>
-          </a:xfrm>
-          <a:prstGeom prst="rect">
-            <a:avLst/>
-          </a:prstGeom>
-          <a:noFill/>
-        </p:spPr>
-        <p:txBody>
-          <a:bodyPr wrap="square">
-            <a:normAutofit/>
-          </a:bodyPr>
-          <a:lstStyle/>
-          <a:p>
-            <a:pPr>
-              <a:lnSpc>
-                <a:spcPct val="120000"/>
-              </a:lnSpc>
-            </a:pPr>
-            <a:r>
-              <a:rPr sz="1300">
-                <a:solidFill>
-                  <a:srgbClr val="F5F3EC"/>
-                </a:solidFill>
-                <a:latin typeface="Arial"/>
-              </a:rPr>
-              <a:t>2026 上半年中國國內銷量受政策退潮與需求飽和影響大幅下滑 26%，海外市場則在品牌業者出海帶動下逆勢成長（洛圖科技、投影時代）。</a:t>
-            </a:r>
-          </a:p>
-        </p:txBody>
-      </p:sp>
-      <p:sp>
-        <p:nvSpPr>
-          <p:cNvPr id="7" name="Rounded Rectangle 6"/>
-          <p:cNvSpPr/>
-          <p:nvPr/>
-        </p:nvSpPr>
-        <p:spPr>
-          <a:xfrm>
-            <a:off x="4322978" y="1600200"/>
-            <a:ext cx="3545738" cy="2263140"/>
-          </a:xfrm>
-          <a:prstGeom prst="roundRect">
-            <a:avLst>
-              <a:gd name="adj" fmla="val 6000"/>
-            </a:avLst>
-          </a:prstGeom>
-          <a:solidFill>
-            <a:srgbClr val="23262F"/>
-          </a:solidFill>
-          <a:ln w="12700">
-            <a:solidFill>
-              <a:srgbClr val="FFB454"/>
-            </a:solidFill>
-          </a:ln>
-          <a:effectLst/>
-        </p:spPr>
-        <p:style>
-          <a:lnRef idx="1">
-            <a:schemeClr val="accent1"/>
-          </a:lnRef>
-          <a:fillRef idx="3">
-            <a:schemeClr val="accent1"/>
-          </a:fillRef>
-          <a:effectRef idx="2">
-            <a:schemeClr val="accent1"/>
-          </a:effectRef>
-          <a:fontRef idx="minor">
-            <a:schemeClr val="lt1"/>
-          </a:fontRef>
-        </p:style>
-        <p:txBody>
-          <a:bodyPr rtlCol="0" anchor="ctr"/>
-          <a:lstStyle/>
-          <a:p>
-            <a:pPr algn="ctr"/>
-          </a:p>
-        </p:txBody>
-      </p:sp>
-      <p:sp>
-        <p:nvSpPr>
-          <p:cNvPr id="8" name="TextBox 7"/>
-          <p:cNvSpPr txBox="1"/>
-          <p:nvPr/>
-        </p:nvSpPr>
-        <p:spPr>
-          <a:xfrm>
-            <a:off x="4524146" y="1764792"/>
-            <a:ext cx="3143402" cy="457200"/>
-          </a:xfrm>
-          <a:prstGeom prst="rect">
-            <a:avLst/>
-          </a:prstGeom>
-          <a:noFill/>
-        </p:spPr>
-        <p:txBody>
-          <a:bodyPr wrap="square" anchor="t">
-            <a:spAutoFit/>
-          </a:bodyPr>
-          <a:lstStyle/>
-          <a:p>
-            <a:pPr algn="l"/>
-            <a:r>
-              <a:rPr sz="1600" b="1">
-                <a:solidFill>
-                  <a:srgbClr val="FFB454"/>
-                </a:solidFill>
-                <a:latin typeface="Arial"/>
-              </a:rPr>
-              <a:t>極米科技</a:t>
-            </a:r>
-          </a:p>
-        </p:txBody>
-      </p:sp>
-      <p:sp>
-        <p:nvSpPr>
-          <p:cNvPr id="9" name="TextBox 8"/>
-          <p:cNvSpPr txBox="1"/>
-          <p:nvPr/>
-        </p:nvSpPr>
-        <p:spPr>
-          <a:xfrm>
-            <a:off x="4524146" y="2258568"/>
-            <a:ext cx="3143402" cy="1440180"/>
-          </a:xfrm>
-          <a:prstGeom prst="rect">
-            <a:avLst/>
-          </a:prstGeom>
-          <a:noFill/>
-        </p:spPr>
-        <p:txBody>
-          <a:bodyPr wrap="square">
-            <a:normAutofit/>
-          </a:bodyPr>
-          <a:lstStyle/>
-          <a:p>
-            <a:pPr>
-              <a:lnSpc>
-                <a:spcPct val="120000"/>
-              </a:lnSpc>
-            </a:pPr>
-            <a:r>
-              <a:rPr sz="1300">
-                <a:solidFill>
-                  <a:srgbClr val="F5F3EC"/>
-                </a:solidFill>
-                <a:latin typeface="Arial"/>
-              </a:rPr>
-              <a:t>2026 上半年憑藉海外收入年增 87.63%，拉升整體毛利率至 39%，並積極布局三色雷射商顯與車載光學市場（投影時代）。</a:t>
-            </a:r>
-          </a:p>
-        </p:txBody>
-      </p:sp>
-      <p:sp>
-        <p:nvSpPr>
-          <p:cNvPr id="10" name="Rounded Rectangle 9"/>
-          <p:cNvSpPr/>
-          <p:nvPr/>
-        </p:nvSpPr>
-        <p:spPr>
-          <a:xfrm>
-            <a:off x="8097316" y="1600200"/>
-            <a:ext cx="3545738" cy="2263140"/>
-          </a:xfrm>
-          <a:prstGeom prst="roundRect">
-            <a:avLst>
-              <a:gd name="adj" fmla="val 6000"/>
-            </a:avLst>
-          </a:prstGeom>
-          <a:solidFill>
-            <a:srgbClr val="23262F"/>
-          </a:solidFill>
-          <a:ln w="12700">
-            <a:solidFill>
-              <a:srgbClr val="8B7FD6"/>
-            </a:solidFill>
-          </a:ln>
-          <a:effectLst/>
-        </p:spPr>
-        <p:style>
-          <a:lnRef idx="1">
-            <a:schemeClr val="accent1"/>
-          </a:lnRef>
-          <a:fillRef idx="3">
-            <a:schemeClr val="accent1"/>
-          </a:fillRef>
-          <a:effectRef idx="2">
-            <a:schemeClr val="accent1"/>
-          </a:effectRef>
-          <a:fontRef idx="minor">
-            <a:schemeClr val="lt1"/>
-          </a:fontRef>
-        </p:style>
-        <p:txBody>
-          <a:bodyPr rtlCol="0" anchor="ctr"/>
-          <a:lstStyle/>
-          <a:p>
-            <a:pPr algn="ctr"/>
-          </a:p>
-        </p:txBody>
-      </p:sp>
-      <p:sp>
-        <p:nvSpPr>
-          <p:cNvPr id="11" name="TextBox 10"/>
-          <p:cNvSpPr txBox="1"/>
-          <p:nvPr/>
-        </p:nvSpPr>
-        <p:spPr>
-          <a:xfrm>
-            <a:off x="8298484" y="1764792"/>
-            <a:ext cx="3143402" cy="457200"/>
-          </a:xfrm>
-          <a:prstGeom prst="rect">
-            <a:avLst/>
-          </a:prstGeom>
-          <a:noFill/>
-        </p:spPr>
-        <p:txBody>
-          <a:bodyPr wrap="square" anchor="t">
-            <a:spAutoFit/>
-          </a:bodyPr>
-          <a:lstStyle/>
-          <a:p>
-            <a:pPr algn="l"/>
-            <a:r>
-              <a:rPr sz="1600" b="1">
-                <a:solidFill>
-                  <a:srgbClr val="8B7FD6"/>
-                </a:solidFill>
-                <a:latin typeface="Arial"/>
-              </a:rPr>
-              <a:t>安克創新（Nebula）</a:t>
-            </a:r>
-          </a:p>
-        </p:txBody>
-      </p:sp>
-      <p:sp>
-        <p:nvSpPr>
-          <p:cNvPr id="12" name="TextBox 11"/>
-          <p:cNvSpPr txBox="1"/>
-          <p:nvPr/>
-        </p:nvSpPr>
-        <p:spPr>
-          <a:xfrm>
-            <a:off x="8298484" y="2258568"/>
-            <a:ext cx="3143402" cy="1440180"/>
-          </a:xfrm>
-          <a:prstGeom prst="rect">
-            <a:avLst/>
-          </a:prstGeom>
-          <a:noFill/>
-        </p:spPr>
-        <p:txBody>
-          <a:bodyPr wrap="square">
-            <a:normAutofit/>
-          </a:bodyPr>
-          <a:lstStyle/>
-          <a:p>
-            <a:pPr>
-              <a:lnSpc>
-                <a:spcPct val="120000"/>
-              </a:lnSpc>
-            </a:pPr>
-            <a:r>
-              <a:rPr sz="1300">
-                <a:solidFill>
-                  <a:srgbClr val="F5F3EC"/>
-                </a:solidFill>
-                <a:latin typeface="Arial"/>
-              </a:rPr>
-              <a:t>2026 上半年總營收達 166.05 億元人民幣（年增 29.05%），其中包含 Nebula 投影機在內的智慧影音板塊營收達 34.85 億元人民幣（年增 24.53%）（投影時代）。</a:t>
-            </a:r>
-          </a:p>
-        </p:txBody>
-      </p:sp>
-      <p:sp>
-        <p:nvSpPr>
-          <p:cNvPr id="13" name="Rounded Rectangle 12"/>
-          <p:cNvSpPr/>
-          <p:nvPr/>
-        </p:nvSpPr>
-        <p:spPr>
-          <a:xfrm>
-            <a:off x="548640" y="4091939"/>
-            <a:ext cx="3545738" cy="2263140"/>
-          </a:xfrm>
-          <a:prstGeom prst="roundRect">
-            <a:avLst>
-              <a:gd name="adj" fmla="val 6000"/>
-            </a:avLst>
-          </a:prstGeom>
-          <a:solidFill>
-            <a:srgbClr val="23262F"/>
-          </a:solidFill>
-          <a:ln w="12700">
-            <a:solidFill>
-              <a:srgbClr val="6FCF97"/>
-            </a:solidFill>
-          </a:ln>
-          <a:effectLst/>
-        </p:spPr>
-        <p:style>
-          <a:lnRef idx="1">
-            <a:schemeClr val="accent1"/>
-          </a:lnRef>
-          <a:fillRef idx="3">
-            <a:schemeClr val="accent1"/>
-          </a:fillRef>
-          <a:effectRef idx="2">
-            <a:schemeClr val="accent1"/>
-          </a:effectRef>
-          <a:fontRef idx="minor">
-            <a:schemeClr val="lt1"/>
-          </a:fontRef>
-        </p:style>
-        <p:txBody>
-          <a:bodyPr rtlCol="0" anchor="ctr"/>
-          <a:lstStyle/>
-          <a:p>
-            <a:pPr algn="ctr"/>
-          </a:p>
-        </p:txBody>
-      </p:sp>
-      <p:sp>
-        <p:nvSpPr>
-          <p:cNvPr id="14" name="TextBox 13"/>
-          <p:cNvSpPr txBox="1"/>
-          <p:nvPr/>
-        </p:nvSpPr>
-        <p:spPr>
-          <a:xfrm>
-            <a:off x="749808" y="4256531"/>
-            <a:ext cx="3143402" cy="457200"/>
-          </a:xfrm>
-          <a:prstGeom prst="rect">
-            <a:avLst/>
-          </a:prstGeom>
-          <a:noFill/>
-        </p:spPr>
-        <p:txBody>
-          <a:bodyPr wrap="square" anchor="t">
-            <a:spAutoFit/>
-          </a:bodyPr>
-          <a:lstStyle/>
-          <a:p>
-            <a:pPr algn="l"/>
-            <a:r>
-              <a:rPr sz="1600" b="1">
-                <a:solidFill>
-                  <a:srgbClr val="6FCF97"/>
-                </a:solidFill>
-                <a:latin typeface="Arial"/>
-              </a:rPr>
-              <a:t>中光學</a:t>
-            </a:r>
-          </a:p>
-        </p:txBody>
-      </p:sp>
-      <p:sp>
-        <p:nvSpPr>
-          <p:cNvPr id="15" name="TextBox 14"/>
-          <p:cNvSpPr txBox="1"/>
-          <p:nvPr/>
-        </p:nvSpPr>
-        <p:spPr>
-          <a:xfrm>
-            <a:off x="749808" y="4750307"/>
-            <a:ext cx="3143402" cy="1440180"/>
-          </a:xfrm>
-          <a:prstGeom prst="rect">
-            <a:avLst/>
-          </a:prstGeom>
-          <a:noFill/>
-        </p:spPr>
-        <p:txBody>
-          <a:bodyPr wrap="square">
-            <a:normAutofit/>
-          </a:bodyPr>
-          <a:lstStyle/>
-          <a:p>
-            <a:pPr>
-              <a:lnSpc>
-                <a:spcPct val="120000"/>
-              </a:lnSpc>
-            </a:pPr>
-            <a:r>
-              <a:rPr sz="1300">
-                <a:solidFill>
-                  <a:srgbClr val="F5F3EC"/>
-                </a:solidFill>
-                <a:latin typeface="Arial"/>
-              </a:rPr>
-              <a:t>2026 上半年營收達 7.25 億元人民幣（年增 6.71%），淨虧損同比縮減 39.95%，其中投影機整機及配件營收為 1.18 億元人民幣（年減 5.72%）（投影時代）。</a:t>
-            </a:r>
-          </a:p>
-        </p:txBody>
-      </p:sp>
-      <p:sp>
-        <p:nvSpPr>
-          <p:cNvPr id="16" name="Rounded Rectangle 15"/>
-          <p:cNvSpPr/>
-          <p:nvPr/>
-        </p:nvSpPr>
-        <p:spPr>
-          <a:xfrm>
-            <a:off x="4322978" y="4091939"/>
-            <a:ext cx="3545738" cy="2263140"/>
-          </a:xfrm>
-          <a:prstGeom prst="roundRect">
-            <a:avLst>
-              <a:gd name="adj" fmla="val 6000"/>
-            </a:avLst>
-          </a:prstGeom>
-          <a:solidFill>
-            <a:srgbClr val="23262F"/>
-          </a:solidFill>
-          <a:ln w="12700">
-            <a:solidFill>
-              <a:srgbClr val="4C7EFF"/>
-            </a:solidFill>
-          </a:ln>
-          <a:effectLst/>
-        </p:spPr>
-        <p:style>
-          <a:lnRef idx="1">
-            <a:schemeClr val="accent1"/>
-          </a:lnRef>
-          <a:fillRef idx="3">
-            <a:schemeClr val="accent1"/>
-          </a:fillRef>
-          <a:effectRef idx="2">
-            <a:schemeClr val="accent1"/>
-          </a:effectRef>
-          <a:fontRef idx="minor">
-            <a:schemeClr val="lt1"/>
-          </a:fontRef>
-        </p:style>
-        <p:txBody>
-          <a:bodyPr rtlCol="0" anchor="ctr"/>
-          <a:lstStyle/>
-          <a:p>
-            <a:pPr algn="ctr"/>
-          </a:p>
-        </p:txBody>
-      </p:sp>
-      <p:sp>
-        <p:nvSpPr>
-          <p:cNvPr id="17" name="TextBox 16"/>
-          <p:cNvSpPr txBox="1"/>
-          <p:nvPr/>
-        </p:nvSpPr>
-        <p:spPr>
-          <a:xfrm>
-            <a:off x="4524146" y="4256531"/>
-            <a:ext cx="3143402" cy="457200"/>
-          </a:xfrm>
-          <a:prstGeom prst="rect">
-            <a:avLst/>
-          </a:prstGeom>
-          <a:noFill/>
-        </p:spPr>
-        <p:txBody>
-          <a:bodyPr wrap="square" anchor="t">
-            <a:spAutoFit/>
-          </a:bodyPr>
-          <a:lstStyle/>
-          <a:p>
-            <a:pPr algn="l"/>
-            <a:r>
-              <a:rPr sz="1600" b="1">
-                <a:solidFill>
-                  <a:srgbClr val="4C7EFF"/>
-                </a:solidFill>
-                <a:latin typeface="Arial"/>
-              </a:rPr>
-              <a:t>區域通路行情</a:t>
-            </a:r>
-          </a:p>
-        </p:txBody>
-      </p:sp>
-      <p:sp>
-        <p:nvSpPr>
-          <p:cNvPr id="18" name="TextBox 17"/>
-          <p:cNvSpPr txBox="1"/>
-          <p:nvPr/>
-        </p:nvSpPr>
-        <p:spPr>
-          <a:xfrm>
-            <a:off x="4524146" y="4750307"/>
-            <a:ext cx="3143402" cy="1440180"/>
-          </a:xfrm>
-          <a:prstGeom prst="rect">
-            <a:avLst/>
-          </a:prstGeom>
-          <a:noFill/>
-        </p:spPr>
-        <p:txBody>
-          <a:bodyPr wrap="square">
-            <a:normAutofit/>
-          </a:bodyPr>
-          <a:lstStyle/>
-          <a:p>
-            <a:pPr>
-              <a:lnSpc>
-                <a:spcPct val="120000"/>
-              </a:lnSpc>
-            </a:pPr>
-            <a:r>
-              <a:rPr sz="1300">
-                <a:solidFill>
-                  <a:srgbClr val="F5F3EC"/>
-                </a:solidFill>
-                <a:latin typeface="Arial"/>
-              </a:rPr>
-              <a:t>松下、愛普生、明基、索諾克與易仁科技等品牌多款商用及工程投影機種，本月於北京實體經銷通路集中展開特價促銷（ZOL投影機頻道）。</a:t>
-            </a:r>
-          </a:p>
-        </p:txBody>
-      </p:sp>
-      <p:sp>
-        <p:nvSpPr>
-          <p:cNvPr id="19" name="TextBox 18"/>
-          <p:cNvSpPr txBox="1"/>
-          <p:nvPr/>
-        </p:nvSpPr>
-        <p:spPr>
-          <a:xfrm>
-            <a:off x="11430000" y="6446520"/>
-            <a:ext cx="548640" cy="274320"/>
-          </a:xfrm>
-          <a:prstGeom prst="rect">
-            <a:avLst/>
-          </a:prstGeom>
-          <a:noFill/>
-        </p:spPr>
-        <p:txBody>
-          <a:bodyPr wrap="square" anchor="t">
-            <a:spAutoFit/>
-          </a:bodyPr>
-          <a:lstStyle/>
-          <a:p>
-            <a:pPr algn="r"/>
-            <a:r>
-              <a:rPr sz="1000" b="0">
-                <a:solidFill>
-                  <a:srgbClr val="9096A1"/>
-                </a:solidFill>
-                <a:latin typeface="Arial"/>
-              </a:rPr>
-              <a:t>06</a:t>
-            </a:r>
-          </a:p>
-        </p:txBody>
-      </p:sp>
-    </p:spTree>
-  </p:cSld>
-  <p:clrMapOvr>
-    <a:masterClrMapping/>
-  </p:clrMapOvr>
-</p:sld>
-</file>
-
-<file path=ppt/slides/slide7.xml><?xml version="1.0" encoding="utf-8"?>
-<p:sld xmlns:a="http://schemas.openxmlformats.org/drawingml/2006/main" xmlns:p="http://schemas.openxmlformats.org/presentationml/2006/main" xmlns:r="http://schemas.openxmlformats.org/officeDocument/2006/relationships">
-  <p:cSld>
-    <p:bg>
-      <p:bgPr>
-        <a:solidFill>
-          <a:srgbClr val="14161A"/>
-        </a:solidFill>
-        <a:effectLst/>
-      </p:bgPr>
-    </p:bg>
-    <p:spTree>
-      <p:nvGrpSpPr>
-        <p:cNvPr id="1" name=""/>
-        <p:cNvGrpSpPr/>
-        <p:nvPr/>
-      </p:nvGrpSpPr>
-      <p:grpSpPr/>
-      <p:sp>
-        <p:nvSpPr>
-          <p:cNvPr id="2" name="TextBox 1"/>
-          <p:cNvSpPr txBox="1"/>
-          <p:nvPr/>
-        </p:nvSpPr>
-        <p:spPr>
-          <a:xfrm>
-            <a:off x="548640" y="384048"/>
-            <a:ext cx="7315200" cy="320040"/>
-          </a:xfrm>
-          <a:prstGeom prst="rect">
-            <a:avLst/>
-          </a:prstGeom>
-          <a:noFill/>
-        </p:spPr>
-        <p:txBody>
-          <a:bodyPr wrap="square" anchor="t">
-            <a:spAutoFit/>
-          </a:bodyPr>
-          <a:lstStyle/>
-          <a:p>
-            <a:pPr algn="l"/>
-            <a:r>
-              <a:rPr sz="1100" b="1">
-                <a:solidFill>
-                  <a:srgbClr val="FFB454"/>
-                </a:solidFill>
-                <a:latin typeface="Arial"/>
-              </a:rPr>
-              <a:t>07 · SECTION　✨</a:t>
+              <a:t>05 · SECTION　✨</a:t>
             </a:r>
           </a:p>
         </p:txBody>
@@ -7482,6 +5671,1244 @@
                 </a:solidFill>
                 <a:latin typeface="Arial"/>
               </a:rPr>
+              <a:t>05</a:t>
+            </a:r>
+          </a:p>
+        </p:txBody>
+      </p:sp>
+    </p:spTree>
+  </p:cSld>
+  <p:clrMapOvr>
+    <a:masterClrMapping/>
+  </p:clrMapOvr>
+</p:sld>
+</file>
+
+<file path=ppt/slides/slide6.xml><?xml version="1.0" encoding="utf-8"?>
+<p:sld xmlns:a="http://schemas.openxmlformats.org/drawingml/2006/main" xmlns:p="http://schemas.openxmlformats.org/presentationml/2006/main" xmlns:r="http://schemas.openxmlformats.org/officeDocument/2006/relationships">
+  <p:cSld>
+    <p:bg>
+      <p:bgPr>
+        <a:solidFill>
+          <a:srgbClr val="14161A"/>
+        </a:solidFill>
+        <a:effectLst/>
+      </p:bgPr>
+    </p:bg>
+    <p:spTree>
+      <p:nvGrpSpPr>
+        <p:cNvPr id="1" name=""/>
+        <p:cNvGrpSpPr/>
+        <p:nvPr/>
+      </p:nvGrpSpPr>
+      <p:grpSpPr/>
+      <p:sp>
+        <p:nvSpPr>
+          <p:cNvPr id="2" name="TextBox 1"/>
+          <p:cNvSpPr txBox="1"/>
+          <p:nvPr/>
+        </p:nvSpPr>
+        <p:spPr>
+          <a:xfrm>
+            <a:off x="548640" y="384048"/>
+            <a:ext cx="7315200" cy="320040"/>
+          </a:xfrm>
+          <a:prstGeom prst="rect">
+            <a:avLst/>
+          </a:prstGeom>
+          <a:noFill/>
+        </p:spPr>
+        <p:txBody>
+          <a:bodyPr wrap="square" anchor="t">
+            <a:spAutoFit/>
+          </a:bodyPr>
+          <a:lstStyle/>
+          <a:p>
+            <a:pPr algn="l"/>
+            <a:r>
+              <a:rPr sz="1100" b="1">
+                <a:solidFill>
+                  <a:srgbClr val="FFB454"/>
+                </a:solidFill>
+                <a:latin typeface="Arial"/>
+              </a:rPr>
+              <a:t>06 · SECTION　✨</a:t>
+            </a:r>
+          </a:p>
+        </p:txBody>
+      </p:sp>
+      <p:sp>
+        <p:nvSpPr>
+          <p:cNvPr id="3" name="TextBox 2"/>
+          <p:cNvSpPr txBox="1"/>
+          <p:nvPr/>
+        </p:nvSpPr>
+        <p:spPr>
+          <a:xfrm>
+            <a:off x="548640" y="713232"/>
+            <a:ext cx="10972800" cy="685800"/>
+          </a:xfrm>
+          <a:prstGeom prst="rect">
+            <a:avLst/>
+          </a:prstGeom>
+          <a:noFill/>
+        </p:spPr>
+        <p:txBody>
+          <a:bodyPr wrap="square" anchor="t">
+            <a:spAutoFit/>
+          </a:bodyPr>
+          <a:lstStyle/>
+          <a:p>
+            <a:pPr algn="l"/>
+            <a:r>
+              <a:rPr sz="2600" b="1">
+                <a:solidFill>
+                  <a:srgbClr val="F5F3EC"/>
+                </a:solidFill>
+                <a:latin typeface="Arial"/>
+              </a:rPr>
+              <a:t>三、新品與品牌動態</a:t>
+            </a:r>
+          </a:p>
+        </p:txBody>
+      </p:sp>
+      <p:sp>
+        <p:nvSpPr>
+          <p:cNvPr id="4" name="Rounded Rectangle 3"/>
+          <p:cNvSpPr/>
+          <p:nvPr/>
+        </p:nvSpPr>
+        <p:spPr>
+          <a:xfrm>
+            <a:off x="548640" y="1600200"/>
+            <a:ext cx="3545738" cy="2263140"/>
+          </a:xfrm>
+          <a:prstGeom prst="roundRect">
+            <a:avLst>
+              <a:gd name="adj" fmla="val 6000"/>
+            </a:avLst>
+          </a:prstGeom>
+          <a:solidFill>
+            <a:srgbClr val="23262F"/>
+          </a:solidFill>
+          <a:ln w="12700">
+            <a:solidFill>
+              <a:srgbClr val="4C7EFF"/>
+            </a:solidFill>
+          </a:ln>
+          <a:effectLst/>
+        </p:spPr>
+        <p:style>
+          <a:lnRef idx="1">
+            <a:schemeClr val="accent1"/>
+          </a:lnRef>
+          <a:fillRef idx="3">
+            <a:schemeClr val="accent1"/>
+          </a:fillRef>
+          <a:effectRef idx="2">
+            <a:schemeClr val="accent1"/>
+          </a:effectRef>
+          <a:fontRef idx="minor">
+            <a:schemeClr val="lt1"/>
+          </a:fontRef>
+        </p:style>
+        <p:txBody>
+          <a:bodyPr rtlCol="0" anchor="ctr"/>
+          <a:lstStyle/>
+          <a:p>
+            <a:pPr algn="ctr"/>
+          </a:p>
+        </p:txBody>
+      </p:sp>
+      <p:sp>
+        <p:nvSpPr>
+          <p:cNvPr id="5" name="TextBox 4"/>
+          <p:cNvSpPr txBox="1"/>
+          <p:nvPr/>
+        </p:nvSpPr>
+        <p:spPr>
+          <a:xfrm>
+            <a:off x="749808" y="1764792"/>
+            <a:ext cx="3143402" cy="457200"/>
+          </a:xfrm>
+          <a:prstGeom prst="rect">
+            <a:avLst/>
+          </a:prstGeom>
+          <a:noFill/>
+        </p:spPr>
+        <p:txBody>
+          <a:bodyPr wrap="square" anchor="t">
+            <a:spAutoFit/>
+          </a:bodyPr>
+          <a:lstStyle/>
+          <a:p>
+            <a:pPr algn="l"/>
+            <a:r>
+              <a:rPr sz="1600" b="1">
+                <a:solidFill>
+                  <a:srgbClr val="4C7EFF"/>
+                </a:solidFill>
+                <a:latin typeface="Arial"/>
+              </a:rPr>
+              <a:t>巴可（Barco）</a:t>
+            </a:r>
+          </a:p>
+        </p:txBody>
+      </p:sp>
+      <p:sp>
+        <p:nvSpPr>
+          <p:cNvPr id="6" name="TextBox 5"/>
+          <p:cNvSpPr txBox="1"/>
+          <p:nvPr/>
+        </p:nvSpPr>
+        <p:spPr>
+          <a:xfrm>
+            <a:off x="749808" y="2258568"/>
+            <a:ext cx="3143402" cy="1440180"/>
+          </a:xfrm>
+          <a:prstGeom prst="rect">
+            <a:avLst/>
+          </a:prstGeom>
+          <a:noFill/>
+        </p:spPr>
+        <p:txBody>
+          <a:bodyPr wrap="square">
+            <a:normAutofit/>
+          </a:bodyPr>
+          <a:lstStyle/>
+          <a:p>
+            <a:pPr>
+              <a:lnSpc>
+                <a:spcPct val="120000"/>
+              </a:lnSpc>
+            </a:pPr>
+            <a:r>
+              <a:rPr sz="1300">
+                <a:solidFill>
+                  <a:srgbClr val="F5F3EC"/>
+                </a:solidFill>
+                <a:latin typeface="Arial"/>
+              </a:rPr>
+              <a:t>發表旗艦 QDX-N4K RGB 純雷射 3DLP 工程投影機，搭載 0.98 吋原生 4K DMD 晶片、100% Rec.2020 色域與 4K@120Hz 低延遲技術，預計 2026 年量產（投影時代）。</a:t>
+            </a:r>
+          </a:p>
+        </p:txBody>
+      </p:sp>
+      <p:sp>
+        <p:nvSpPr>
+          <p:cNvPr id="7" name="Rounded Rectangle 6"/>
+          <p:cNvSpPr/>
+          <p:nvPr/>
+        </p:nvSpPr>
+        <p:spPr>
+          <a:xfrm>
+            <a:off x="4322978" y="1600200"/>
+            <a:ext cx="3545738" cy="2263140"/>
+          </a:xfrm>
+          <a:prstGeom prst="roundRect">
+            <a:avLst>
+              <a:gd name="adj" fmla="val 6000"/>
+            </a:avLst>
+          </a:prstGeom>
+          <a:solidFill>
+            <a:srgbClr val="23262F"/>
+          </a:solidFill>
+          <a:ln w="12700">
+            <a:solidFill>
+              <a:srgbClr val="FFB454"/>
+            </a:solidFill>
+          </a:ln>
+          <a:effectLst/>
+        </p:spPr>
+        <p:style>
+          <a:lnRef idx="1">
+            <a:schemeClr val="accent1"/>
+          </a:lnRef>
+          <a:fillRef idx="3">
+            <a:schemeClr val="accent1"/>
+          </a:fillRef>
+          <a:effectRef idx="2">
+            <a:schemeClr val="accent1"/>
+          </a:effectRef>
+          <a:fontRef idx="minor">
+            <a:schemeClr val="lt1"/>
+          </a:fontRef>
+        </p:style>
+        <p:txBody>
+          <a:bodyPr rtlCol="0" anchor="ctr"/>
+          <a:lstStyle/>
+          <a:p>
+            <a:pPr algn="ctr"/>
+          </a:p>
+        </p:txBody>
+      </p:sp>
+      <p:sp>
+        <p:nvSpPr>
+          <p:cNvPr id="8" name="TextBox 7"/>
+          <p:cNvSpPr txBox="1"/>
+          <p:nvPr/>
+        </p:nvSpPr>
+        <p:spPr>
+          <a:xfrm>
+            <a:off x="4524146" y="1764792"/>
+            <a:ext cx="3143402" cy="457200"/>
+          </a:xfrm>
+          <a:prstGeom prst="rect">
+            <a:avLst/>
+          </a:prstGeom>
+          <a:noFill/>
+        </p:spPr>
+        <p:txBody>
+          <a:bodyPr wrap="square" anchor="t">
+            <a:spAutoFit/>
+          </a:bodyPr>
+          <a:lstStyle/>
+          <a:p>
+            <a:pPr algn="l"/>
+            <a:r>
+              <a:rPr sz="1600" b="1">
+                <a:solidFill>
+                  <a:srgbClr val="FFB454"/>
+                </a:solidFill>
+                <a:latin typeface="Arial"/>
+              </a:rPr>
+              <a:t>極米（XGIMI）</a:t>
+            </a:r>
+          </a:p>
+        </p:txBody>
+      </p:sp>
+      <p:sp>
+        <p:nvSpPr>
+          <p:cNvPr id="9" name="TextBox 8"/>
+          <p:cNvSpPr txBox="1"/>
+          <p:nvPr/>
+        </p:nvSpPr>
+        <p:spPr>
+          <a:xfrm>
+            <a:off x="4524146" y="2258568"/>
+            <a:ext cx="3143402" cy="1440180"/>
+          </a:xfrm>
+          <a:prstGeom prst="rect">
+            <a:avLst/>
+          </a:prstGeom>
+          <a:noFill/>
+        </p:spPr>
+        <p:txBody>
+          <a:bodyPr wrap="square">
+            <a:normAutofit/>
+          </a:bodyPr>
+          <a:lstStyle/>
+          <a:p>
+            <a:pPr>
+              <a:lnSpc>
+                <a:spcPct val="120000"/>
+              </a:lnSpc>
+            </a:pPr>
+            <a:r>
+              <a:rPr sz="1300">
+                <a:solidFill>
+                  <a:srgbClr val="F5F3EC"/>
+                </a:solidFill>
+                <a:latin typeface="Arial"/>
+              </a:rPr>
+              <a:t>攜手美國客製化安裝商 AWALL 推出高端品牌「XWALL by XGIMI」，專攻北美高端家庭影院市場並於 CEDIA 展會亮相（ProjectorCentral）。</a:t>
+            </a:r>
+          </a:p>
+        </p:txBody>
+      </p:sp>
+      <p:sp>
+        <p:nvSpPr>
+          <p:cNvPr id="10" name="Rounded Rectangle 9"/>
+          <p:cNvSpPr/>
+          <p:nvPr/>
+        </p:nvSpPr>
+        <p:spPr>
+          <a:xfrm>
+            <a:off x="8097316" y="1600200"/>
+            <a:ext cx="3545738" cy="2263140"/>
+          </a:xfrm>
+          <a:prstGeom prst="roundRect">
+            <a:avLst>
+              <a:gd name="adj" fmla="val 6000"/>
+            </a:avLst>
+          </a:prstGeom>
+          <a:solidFill>
+            <a:srgbClr val="23262F"/>
+          </a:solidFill>
+          <a:ln w="12700">
+            <a:solidFill>
+              <a:srgbClr val="8B7FD6"/>
+            </a:solidFill>
+          </a:ln>
+          <a:effectLst/>
+        </p:spPr>
+        <p:style>
+          <a:lnRef idx="1">
+            <a:schemeClr val="accent1"/>
+          </a:lnRef>
+          <a:fillRef idx="3">
+            <a:schemeClr val="accent1"/>
+          </a:fillRef>
+          <a:effectRef idx="2">
+            <a:schemeClr val="accent1"/>
+          </a:effectRef>
+          <a:fontRef idx="minor">
+            <a:schemeClr val="lt1"/>
+          </a:fontRef>
+        </p:style>
+        <p:txBody>
+          <a:bodyPr rtlCol="0" anchor="ctr"/>
+          <a:lstStyle/>
+          <a:p>
+            <a:pPr algn="ctr"/>
+          </a:p>
+        </p:txBody>
+      </p:sp>
+      <p:sp>
+        <p:nvSpPr>
+          <p:cNvPr id="11" name="TextBox 10"/>
+          <p:cNvSpPr txBox="1"/>
+          <p:nvPr/>
+        </p:nvSpPr>
+        <p:spPr>
+          <a:xfrm>
+            <a:off x="8298484" y="1764792"/>
+            <a:ext cx="3143402" cy="457200"/>
+          </a:xfrm>
+          <a:prstGeom prst="rect">
+            <a:avLst/>
+          </a:prstGeom>
+          <a:noFill/>
+        </p:spPr>
+        <p:txBody>
+          <a:bodyPr wrap="square" anchor="t">
+            <a:spAutoFit/>
+          </a:bodyPr>
+          <a:lstStyle/>
+          <a:p>
+            <a:pPr algn="l"/>
+            <a:r>
+              <a:rPr sz="1600" b="1">
+                <a:solidFill>
+                  <a:srgbClr val="8B7FD6"/>
+                </a:solidFill>
+                <a:latin typeface="Arial"/>
+              </a:rPr>
+              <a:t>當貝（Dangbei）</a:t>
+            </a:r>
+          </a:p>
+        </p:txBody>
+      </p:sp>
+      <p:sp>
+        <p:nvSpPr>
+          <p:cNvPr id="12" name="TextBox 11"/>
+          <p:cNvSpPr txBox="1"/>
+          <p:nvPr/>
+        </p:nvSpPr>
+        <p:spPr>
+          <a:xfrm>
+            <a:off x="8298484" y="2258568"/>
+            <a:ext cx="3143402" cy="1440180"/>
+          </a:xfrm>
+          <a:prstGeom prst="rect">
+            <a:avLst/>
+          </a:prstGeom>
+          <a:noFill/>
+        </p:spPr>
+        <p:txBody>
+          <a:bodyPr wrap="square">
+            <a:normAutofit/>
+          </a:bodyPr>
+          <a:lstStyle/>
+          <a:p>
+            <a:pPr>
+              <a:lnSpc>
+                <a:spcPct val="120000"/>
+              </a:lnSpc>
+            </a:pPr>
+            <a:r>
+              <a:rPr sz="1300">
+                <a:solidFill>
+                  <a:srgbClr val="F5F3EC"/>
+                </a:solidFill>
+                <a:latin typeface="Arial"/>
+              </a:rPr>
+              <a:t>發表旗艦 4K 純三色雷射投影機 X7 Max，並推出兩千元人民幣價位的當貝 D7X 與不足 1 公斤的 Smart2 便攜機型，加速三色雷射普及（ZNDS投影頻道）。</a:t>
+            </a:r>
+          </a:p>
+        </p:txBody>
+      </p:sp>
+      <p:sp>
+        <p:nvSpPr>
+          <p:cNvPr id="13" name="Rounded Rectangle 12"/>
+          <p:cNvSpPr/>
+          <p:nvPr/>
+        </p:nvSpPr>
+        <p:spPr>
+          <a:xfrm>
+            <a:off x="548640" y="4091939"/>
+            <a:ext cx="3545738" cy="2263140"/>
+          </a:xfrm>
+          <a:prstGeom prst="roundRect">
+            <a:avLst>
+              <a:gd name="adj" fmla="val 6000"/>
+            </a:avLst>
+          </a:prstGeom>
+          <a:solidFill>
+            <a:srgbClr val="23262F"/>
+          </a:solidFill>
+          <a:ln w="12700">
+            <a:solidFill>
+              <a:srgbClr val="6FCF97"/>
+            </a:solidFill>
+          </a:ln>
+          <a:effectLst/>
+        </p:spPr>
+        <p:style>
+          <a:lnRef idx="1">
+            <a:schemeClr val="accent1"/>
+          </a:lnRef>
+          <a:fillRef idx="3">
+            <a:schemeClr val="accent1"/>
+          </a:fillRef>
+          <a:effectRef idx="2">
+            <a:schemeClr val="accent1"/>
+          </a:effectRef>
+          <a:fontRef idx="minor">
+            <a:schemeClr val="lt1"/>
+          </a:fontRef>
+        </p:style>
+        <p:txBody>
+          <a:bodyPr rtlCol="0" anchor="ctr"/>
+          <a:lstStyle/>
+          <a:p>
+            <a:pPr algn="ctr"/>
+          </a:p>
+        </p:txBody>
+      </p:sp>
+      <p:sp>
+        <p:nvSpPr>
+          <p:cNvPr id="14" name="TextBox 13"/>
+          <p:cNvSpPr txBox="1"/>
+          <p:nvPr/>
+        </p:nvSpPr>
+        <p:spPr>
+          <a:xfrm>
+            <a:off x="749808" y="4256531"/>
+            <a:ext cx="3143402" cy="457200"/>
+          </a:xfrm>
+          <a:prstGeom prst="rect">
+            <a:avLst/>
+          </a:prstGeom>
+          <a:noFill/>
+        </p:spPr>
+        <p:txBody>
+          <a:bodyPr wrap="square" anchor="t">
+            <a:spAutoFit/>
+          </a:bodyPr>
+          <a:lstStyle/>
+          <a:p>
+            <a:pPr algn="l"/>
+            <a:r>
+              <a:rPr sz="1600" b="1">
+                <a:solidFill>
+                  <a:srgbClr val="6FCF97"/>
+                </a:solidFill>
+                <a:latin typeface="Arial"/>
+              </a:rPr>
+              <a:t>Nebula（安克）</a:t>
+            </a:r>
+          </a:p>
+        </p:txBody>
+      </p:sp>
+      <p:sp>
+        <p:nvSpPr>
+          <p:cNvPr id="15" name="TextBox 14"/>
+          <p:cNvSpPr txBox="1"/>
+          <p:nvPr/>
+        </p:nvSpPr>
+        <p:spPr>
+          <a:xfrm>
+            <a:off x="749808" y="4750307"/>
+            <a:ext cx="3143402" cy="1440180"/>
+          </a:xfrm>
+          <a:prstGeom prst="rect">
+            <a:avLst/>
+          </a:prstGeom>
+          <a:noFill/>
+        </p:spPr>
+        <p:txBody>
+          <a:bodyPr wrap="square">
+            <a:normAutofit/>
+          </a:bodyPr>
+          <a:lstStyle/>
+          <a:p>
+            <a:pPr>
+              <a:lnSpc>
+                <a:spcPct val="120000"/>
+              </a:lnSpc>
+            </a:pPr>
+            <a:r>
+              <a:rPr sz="1300">
+                <a:solidFill>
+                  <a:srgbClr val="F5F3EC"/>
+                </a:solidFill>
+                <a:latin typeface="Arial"/>
+              </a:rPr>
+              <a:t>推出升級版 X1S 戶外 4K 三色雷射投影機，具備 6,000 流明高亮度與簡易設定機能（ProjectorCentral）。</a:t>
+            </a:r>
+          </a:p>
+        </p:txBody>
+      </p:sp>
+      <p:sp>
+        <p:nvSpPr>
+          <p:cNvPr id="16" name="Rounded Rectangle 15"/>
+          <p:cNvSpPr/>
+          <p:nvPr/>
+        </p:nvSpPr>
+        <p:spPr>
+          <a:xfrm>
+            <a:off x="4322978" y="4091939"/>
+            <a:ext cx="3545738" cy="2263140"/>
+          </a:xfrm>
+          <a:prstGeom prst="roundRect">
+            <a:avLst>
+              <a:gd name="adj" fmla="val 6000"/>
+            </a:avLst>
+          </a:prstGeom>
+          <a:solidFill>
+            <a:srgbClr val="23262F"/>
+          </a:solidFill>
+          <a:ln w="12700">
+            <a:solidFill>
+              <a:srgbClr val="4C7EFF"/>
+            </a:solidFill>
+          </a:ln>
+          <a:effectLst/>
+        </p:spPr>
+        <p:style>
+          <a:lnRef idx="1">
+            <a:schemeClr val="accent1"/>
+          </a:lnRef>
+          <a:fillRef idx="3">
+            <a:schemeClr val="accent1"/>
+          </a:fillRef>
+          <a:effectRef idx="2">
+            <a:schemeClr val="accent1"/>
+          </a:effectRef>
+          <a:fontRef idx="minor">
+            <a:schemeClr val="lt1"/>
+          </a:fontRef>
+        </p:style>
+        <p:txBody>
+          <a:bodyPr rtlCol="0" anchor="ctr"/>
+          <a:lstStyle/>
+          <a:p>
+            <a:pPr algn="ctr"/>
+          </a:p>
+        </p:txBody>
+      </p:sp>
+      <p:sp>
+        <p:nvSpPr>
+          <p:cNvPr id="17" name="TextBox 16"/>
+          <p:cNvSpPr txBox="1"/>
+          <p:nvPr/>
+        </p:nvSpPr>
+        <p:spPr>
+          <a:xfrm>
+            <a:off x="4524146" y="4256531"/>
+            <a:ext cx="3143402" cy="457200"/>
+          </a:xfrm>
+          <a:prstGeom prst="rect">
+            <a:avLst/>
+          </a:prstGeom>
+          <a:noFill/>
+        </p:spPr>
+        <p:txBody>
+          <a:bodyPr wrap="square" anchor="t">
+            <a:spAutoFit/>
+          </a:bodyPr>
+          <a:lstStyle/>
+          <a:p>
+            <a:pPr algn="l"/>
+            <a:r>
+              <a:rPr sz="1600" b="1">
+                <a:solidFill>
+                  <a:srgbClr val="4C7EFF"/>
+                </a:solidFill>
+                <a:latin typeface="Arial"/>
+              </a:rPr>
+              <a:t>JVC</a:t>
+            </a:r>
+          </a:p>
+        </p:txBody>
+      </p:sp>
+      <p:sp>
+        <p:nvSpPr>
+          <p:cNvPr id="18" name="TextBox 17"/>
+          <p:cNvSpPr txBox="1"/>
+          <p:nvPr/>
+        </p:nvSpPr>
+        <p:spPr>
+          <a:xfrm>
+            <a:off x="4524146" y="4750307"/>
+            <a:ext cx="3143402" cy="1440180"/>
+          </a:xfrm>
+          <a:prstGeom prst="rect">
+            <a:avLst/>
+          </a:prstGeom>
+          <a:noFill/>
+        </p:spPr>
+        <p:txBody>
+          <a:bodyPr wrap="square">
+            <a:normAutofit/>
+          </a:bodyPr>
+          <a:lstStyle/>
+          <a:p>
+            <a:pPr>
+              <a:lnSpc>
+                <a:spcPct val="120000"/>
+              </a:lnSpc>
+            </a:pPr>
+            <a:r>
+              <a:rPr sz="1300">
+                <a:solidFill>
+                  <a:srgbClr val="F5F3EC"/>
+                </a:solidFill>
+                <a:latin typeface="Arial"/>
+              </a:rPr>
+              <a:t>於 CEDIA 2026 展示 DLA-NZ900 與 DLA-NZ800 旗艦機種，聚焦 8K 家庭劇院與原生 4K/120p 高刷新率電競體驗（ProjectorCentral）。</a:t>
+            </a:r>
+          </a:p>
+        </p:txBody>
+      </p:sp>
+      <p:sp>
+        <p:nvSpPr>
+          <p:cNvPr id="19" name="Rounded Rectangle 18"/>
+          <p:cNvSpPr/>
+          <p:nvPr/>
+        </p:nvSpPr>
+        <p:spPr>
+          <a:xfrm>
+            <a:off x="8097316" y="4091939"/>
+            <a:ext cx="3545738" cy="2263140"/>
+          </a:xfrm>
+          <a:prstGeom prst="roundRect">
+            <a:avLst>
+              <a:gd name="adj" fmla="val 6000"/>
+            </a:avLst>
+          </a:prstGeom>
+          <a:solidFill>
+            <a:srgbClr val="23262F"/>
+          </a:solidFill>
+          <a:ln w="12700">
+            <a:solidFill>
+              <a:srgbClr val="FFB454"/>
+            </a:solidFill>
+          </a:ln>
+          <a:effectLst/>
+        </p:spPr>
+        <p:style>
+          <a:lnRef idx="1">
+            <a:schemeClr val="accent1"/>
+          </a:lnRef>
+          <a:fillRef idx="3">
+            <a:schemeClr val="accent1"/>
+          </a:fillRef>
+          <a:effectRef idx="2">
+            <a:schemeClr val="accent1"/>
+          </a:effectRef>
+          <a:fontRef idx="minor">
+            <a:schemeClr val="lt1"/>
+          </a:fontRef>
+        </p:style>
+        <p:txBody>
+          <a:bodyPr rtlCol="0" anchor="ctr"/>
+          <a:lstStyle/>
+          <a:p>
+            <a:pPr algn="ctr"/>
+          </a:p>
+        </p:txBody>
+      </p:sp>
+      <p:sp>
+        <p:nvSpPr>
+          <p:cNvPr id="20" name="TextBox 19"/>
+          <p:cNvSpPr txBox="1"/>
+          <p:nvPr/>
+        </p:nvSpPr>
+        <p:spPr>
+          <a:xfrm>
+            <a:off x="8298484" y="4256531"/>
+            <a:ext cx="3143402" cy="457200"/>
+          </a:xfrm>
+          <a:prstGeom prst="rect">
+            <a:avLst/>
+          </a:prstGeom>
+          <a:noFill/>
+        </p:spPr>
+        <p:txBody>
+          <a:bodyPr wrap="square" anchor="t">
+            <a:spAutoFit/>
+          </a:bodyPr>
+          <a:lstStyle/>
+          <a:p>
+            <a:pPr algn="l"/>
+            <a:r>
+              <a:rPr sz="1600" b="1">
+                <a:solidFill>
+                  <a:srgbClr val="FFB454"/>
+                </a:solidFill>
+                <a:latin typeface="Arial"/>
+              </a:rPr>
+              <a:t>愛普生（Epson）</a:t>
+            </a:r>
+          </a:p>
+        </p:txBody>
+      </p:sp>
+      <p:sp>
+        <p:nvSpPr>
+          <p:cNvPr id="21" name="TextBox 20"/>
+          <p:cNvSpPr txBox="1"/>
+          <p:nvPr/>
+        </p:nvSpPr>
+        <p:spPr>
+          <a:xfrm>
+            <a:off x="8298484" y="4750307"/>
+            <a:ext cx="3143402" cy="1440180"/>
+          </a:xfrm>
+          <a:prstGeom prst="rect">
+            <a:avLst/>
+          </a:prstGeom>
+          <a:noFill/>
+        </p:spPr>
+        <p:txBody>
+          <a:bodyPr wrap="square">
+            <a:normAutofit/>
+          </a:bodyPr>
+          <a:lstStyle/>
+          <a:p>
+            <a:pPr>
+              <a:lnSpc>
+                <a:spcPct val="120000"/>
+              </a:lnSpc>
+            </a:pPr>
+            <a:r>
+              <a:rPr sz="1300">
+                <a:solidFill>
+                  <a:srgbClr val="F5F3EC"/>
+                </a:solidFill>
+                <a:latin typeface="Arial"/>
+              </a:rPr>
+              <a:t>以 48 台高亮雷射工程投影機打造上海《永不消失的黑水城》沉浸式展覽，並於 InfoComm 與 ISTELive 等展會累計獲得 16 項產業大獎（投影時代、Epson官方）。</a:t>
+            </a:r>
+          </a:p>
+        </p:txBody>
+      </p:sp>
+      <p:sp>
+        <p:nvSpPr>
+          <p:cNvPr id="22" name="TextBox 21"/>
+          <p:cNvSpPr txBox="1"/>
+          <p:nvPr/>
+        </p:nvSpPr>
+        <p:spPr>
+          <a:xfrm>
+            <a:off x="11430000" y="6446520"/>
+            <a:ext cx="548640" cy="274320"/>
+          </a:xfrm>
+          <a:prstGeom prst="rect">
+            <a:avLst/>
+          </a:prstGeom>
+          <a:noFill/>
+        </p:spPr>
+        <p:txBody>
+          <a:bodyPr wrap="square" anchor="t">
+            <a:spAutoFit/>
+          </a:bodyPr>
+          <a:lstStyle/>
+          <a:p>
+            <a:pPr algn="r"/>
+            <a:r>
+              <a:rPr sz="1000" b="0">
+                <a:solidFill>
+                  <a:srgbClr val="9096A1"/>
+                </a:solidFill>
+                <a:latin typeface="Arial"/>
+              </a:rPr>
+              <a:t>06</a:t>
+            </a:r>
+          </a:p>
+        </p:txBody>
+      </p:sp>
+    </p:spTree>
+  </p:cSld>
+  <p:clrMapOvr>
+    <a:masterClrMapping/>
+  </p:clrMapOvr>
+</p:sld>
+</file>
+
+<file path=ppt/slides/slide7.xml><?xml version="1.0" encoding="utf-8"?>
+<p:sld xmlns:a="http://schemas.openxmlformats.org/drawingml/2006/main" xmlns:p="http://schemas.openxmlformats.org/presentationml/2006/main" xmlns:r="http://schemas.openxmlformats.org/officeDocument/2006/relationships">
+  <p:cSld>
+    <p:bg>
+      <p:bgPr>
+        <a:solidFill>
+          <a:srgbClr val="14161A"/>
+        </a:solidFill>
+        <a:effectLst/>
+      </p:bgPr>
+    </p:bg>
+    <p:spTree>
+      <p:nvGrpSpPr>
+        <p:cNvPr id="1" name=""/>
+        <p:cNvGrpSpPr/>
+        <p:nvPr/>
+      </p:nvGrpSpPr>
+      <p:grpSpPr/>
+      <p:sp>
+        <p:nvSpPr>
+          <p:cNvPr id="2" name="TextBox 1"/>
+          <p:cNvSpPr txBox="1"/>
+          <p:nvPr/>
+        </p:nvSpPr>
+        <p:spPr>
+          <a:xfrm>
+            <a:off x="548640" y="384048"/>
+            <a:ext cx="7315200" cy="320040"/>
+          </a:xfrm>
+          <a:prstGeom prst="rect">
+            <a:avLst/>
+          </a:prstGeom>
+          <a:noFill/>
+        </p:spPr>
+        <p:txBody>
+          <a:bodyPr wrap="square" anchor="t">
+            <a:spAutoFit/>
+          </a:bodyPr>
+          <a:lstStyle/>
+          <a:p>
+            <a:pPr algn="l"/>
+            <a:r>
+              <a:rPr sz="1100" b="1">
+                <a:solidFill>
+                  <a:srgbClr val="FFB454"/>
+                </a:solidFill>
+                <a:latin typeface="Arial"/>
+              </a:rPr>
+              <a:t>07 · SECTION　🔧</a:t>
+            </a:r>
+          </a:p>
+        </p:txBody>
+      </p:sp>
+      <p:sp>
+        <p:nvSpPr>
+          <p:cNvPr id="3" name="TextBox 2"/>
+          <p:cNvSpPr txBox="1"/>
+          <p:nvPr/>
+        </p:nvSpPr>
+        <p:spPr>
+          <a:xfrm>
+            <a:off x="548640" y="713232"/>
+            <a:ext cx="10972800" cy="685800"/>
+          </a:xfrm>
+          <a:prstGeom prst="rect">
+            <a:avLst/>
+          </a:prstGeom>
+          <a:noFill/>
+        </p:spPr>
+        <p:txBody>
+          <a:bodyPr wrap="square" anchor="t">
+            <a:spAutoFit/>
+          </a:bodyPr>
+          <a:lstStyle/>
+          <a:p>
+            <a:pPr algn="l"/>
+            <a:r>
+              <a:rPr sz="2600" b="1">
+                <a:solidFill>
+                  <a:srgbClr val="F5F3EC"/>
+                </a:solidFill>
+                <a:latin typeface="Arial"/>
+              </a:rPr>
+              <a:t>四、技術動態</a:t>
+            </a:r>
+          </a:p>
+        </p:txBody>
+      </p:sp>
+      <p:sp>
+        <p:nvSpPr>
+          <p:cNvPr id="4" name="Rounded Rectangle 3"/>
+          <p:cNvSpPr/>
+          <p:nvPr/>
+        </p:nvSpPr>
+        <p:spPr>
+          <a:xfrm>
+            <a:off x="548640" y="1600200"/>
+            <a:ext cx="5432907" cy="4754880"/>
+          </a:xfrm>
+          <a:prstGeom prst="roundRect">
+            <a:avLst>
+              <a:gd name="adj" fmla="val 6000"/>
+            </a:avLst>
+          </a:prstGeom>
+          <a:solidFill>
+            <a:srgbClr val="23262F"/>
+          </a:solidFill>
+          <a:ln w="12700">
+            <a:solidFill>
+              <a:srgbClr val="4C7EFF"/>
+            </a:solidFill>
+          </a:ln>
+          <a:effectLst/>
+        </p:spPr>
+        <p:style>
+          <a:lnRef idx="1">
+            <a:schemeClr val="accent1"/>
+          </a:lnRef>
+          <a:fillRef idx="3">
+            <a:schemeClr val="accent1"/>
+          </a:fillRef>
+          <a:effectRef idx="2">
+            <a:schemeClr val="accent1"/>
+          </a:effectRef>
+          <a:fontRef idx="minor">
+            <a:schemeClr val="lt1"/>
+          </a:fontRef>
+        </p:style>
+        <p:txBody>
+          <a:bodyPr rtlCol="0" anchor="ctr"/>
+          <a:lstStyle/>
+          <a:p>
+            <a:pPr algn="ctr"/>
+          </a:p>
+        </p:txBody>
+      </p:sp>
+      <p:sp>
+        <p:nvSpPr>
+          <p:cNvPr id="5" name="TextBox 4"/>
+          <p:cNvSpPr txBox="1"/>
+          <p:nvPr/>
+        </p:nvSpPr>
+        <p:spPr>
+          <a:xfrm>
+            <a:off x="749808" y="1764792"/>
+            <a:ext cx="5030571" cy="457200"/>
+          </a:xfrm>
+          <a:prstGeom prst="rect">
+            <a:avLst/>
+          </a:prstGeom>
+          <a:noFill/>
+        </p:spPr>
+        <p:txBody>
+          <a:bodyPr wrap="square" anchor="t">
+            <a:spAutoFit/>
+          </a:bodyPr>
+          <a:lstStyle/>
+          <a:p>
+            <a:pPr algn="l"/>
+            <a:r>
+              <a:rPr sz="2000" b="1">
+                <a:solidFill>
+                  <a:srgbClr val="4C7EFF"/>
+                </a:solidFill>
+                <a:latin typeface="Arial"/>
+              </a:rPr>
+              <a:t>光學互連架構（Lightmatter）</a:t>
+            </a:r>
+          </a:p>
+        </p:txBody>
+      </p:sp>
+      <p:sp>
+        <p:nvSpPr>
+          <p:cNvPr id="6" name="TextBox 5"/>
+          <p:cNvSpPr txBox="1"/>
+          <p:nvPr/>
+        </p:nvSpPr>
+        <p:spPr>
+          <a:xfrm>
+            <a:off x="749808" y="2258568"/>
+            <a:ext cx="5030571" cy="3931920"/>
+          </a:xfrm>
+          <a:prstGeom prst="rect">
+            <a:avLst/>
+          </a:prstGeom>
+          <a:noFill/>
+        </p:spPr>
+        <p:txBody>
+          <a:bodyPr wrap="square">
+            <a:normAutofit/>
+          </a:bodyPr>
+          <a:lstStyle/>
+          <a:p>
+            <a:pPr>
+              <a:lnSpc>
+                <a:spcPct val="120000"/>
+              </a:lnSpc>
+            </a:pPr>
+            <a:r>
+              <a:rPr sz="1550">
+                <a:solidFill>
+                  <a:srgbClr val="F5F3EC"/>
+                </a:solidFill>
+                <a:latin typeface="Arial"/>
+              </a:rPr>
+              <a:t>因應 AI 資料中心傳輸速率逼近 448G 與銅纜物理瓶頸，提出全光學互連架構藍圖，推動矽光子與 CPO 技術演進（DigiTimes）。</a:t>
+            </a:r>
+          </a:p>
+        </p:txBody>
+      </p:sp>
+      <p:sp>
+        <p:nvSpPr>
+          <p:cNvPr id="7" name="Rounded Rectangle 6"/>
+          <p:cNvSpPr/>
+          <p:nvPr/>
+        </p:nvSpPr>
+        <p:spPr>
+          <a:xfrm>
+            <a:off x="6210147" y="1600200"/>
+            <a:ext cx="5432907" cy="4754880"/>
+          </a:xfrm>
+          <a:prstGeom prst="roundRect">
+            <a:avLst>
+              <a:gd name="adj" fmla="val 6000"/>
+            </a:avLst>
+          </a:prstGeom>
+          <a:solidFill>
+            <a:srgbClr val="23262F"/>
+          </a:solidFill>
+          <a:ln w="12700">
+            <a:solidFill>
+              <a:srgbClr val="FFB454"/>
+            </a:solidFill>
+          </a:ln>
+          <a:effectLst/>
+        </p:spPr>
+        <p:style>
+          <a:lnRef idx="1">
+            <a:schemeClr val="accent1"/>
+          </a:lnRef>
+          <a:fillRef idx="3">
+            <a:schemeClr val="accent1"/>
+          </a:fillRef>
+          <a:effectRef idx="2">
+            <a:schemeClr val="accent1"/>
+          </a:effectRef>
+          <a:fontRef idx="minor">
+            <a:schemeClr val="lt1"/>
+          </a:fontRef>
+        </p:style>
+        <p:txBody>
+          <a:bodyPr rtlCol="0" anchor="ctr"/>
+          <a:lstStyle/>
+          <a:p>
+            <a:pPr algn="ctr"/>
+          </a:p>
+        </p:txBody>
+      </p:sp>
+      <p:sp>
+        <p:nvSpPr>
+          <p:cNvPr id="8" name="TextBox 7"/>
+          <p:cNvSpPr txBox="1"/>
+          <p:nvPr/>
+        </p:nvSpPr>
+        <p:spPr>
+          <a:xfrm>
+            <a:off x="6411315" y="1764792"/>
+            <a:ext cx="5030571" cy="457200"/>
+          </a:xfrm>
+          <a:prstGeom prst="rect">
+            <a:avLst/>
+          </a:prstGeom>
+          <a:noFill/>
+        </p:spPr>
+        <p:txBody>
+          <a:bodyPr wrap="square" anchor="t">
+            <a:spAutoFit/>
+          </a:bodyPr>
+          <a:lstStyle/>
+          <a:p>
+            <a:pPr algn="l"/>
+            <a:r>
+              <a:rPr sz="2000" b="1">
+                <a:solidFill>
+                  <a:srgbClr val="FFB454"/>
+                </a:solidFill>
+                <a:latin typeface="Arial"/>
+              </a:rPr>
+              <a:t>增強現實與動態投影（羿飛教育）</a:t>
+            </a:r>
+          </a:p>
+        </p:txBody>
+      </p:sp>
+      <p:sp>
+        <p:nvSpPr>
+          <p:cNvPr id="9" name="TextBox 8"/>
+          <p:cNvSpPr txBox="1"/>
+          <p:nvPr/>
+        </p:nvSpPr>
+        <p:spPr>
+          <a:xfrm>
+            <a:off x="6411315" y="2258568"/>
+            <a:ext cx="5030571" cy="3931920"/>
+          </a:xfrm>
+          <a:prstGeom prst="rect">
+            <a:avLst/>
+          </a:prstGeom>
+          <a:noFill/>
+        </p:spPr>
+        <p:txBody>
+          <a:bodyPr wrap="square">
+            <a:normAutofit/>
+          </a:bodyPr>
+          <a:lstStyle/>
+          <a:p>
+            <a:pPr>
+              <a:lnSpc>
+                <a:spcPct val="120000"/>
+              </a:lnSpc>
+            </a:pPr>
+            <a:r>
+              <a:rPr sz="1550">
+                <a:solidFill>
+                  <a:srgbClr val="F5F3EC"/>
+                </a:solidFill>
+                <a:latin typeface="Arial"/>
+              </a:rPr>
+              <a:t>於山東教育博覽會展示結合即時增強現實（AR）的地理沙盤與古戰場動態模擬投影系統，推進數位化沉浸式教學應用（投影時代）。</a:t>
+            </a:r>
+          </a:p>
+        </p:txBody>
+      </p:sp>
+      <p:sp>
+        <p:nvSpPr>
+          <p:cNvPr id="10" name="TextBox 9"/>
+          <p:cNvSpPr txBox="1"/>
+          <p:nvPr/>
+        </p:nvSpPr>
+        <p:spPr>
+          <a:xfrm>
+            <a:off x="11430000" y="6446520"/>
+            <a:ext cx="548640" cy="274320"/>
+          </a:xfrm>
+          <a:prstGeom prst="rect">
+            <a:avLst/>
+          </a:prstGeom>
+          <a:noFill/>
+        </p:spPr>
+        <p:txBody>
+          <a:bodyPr wrap="square" anchor="t">
+            <a:spAutoFit/>
+          </a:bodyPr>
+          <a:lstStyle/>
+          <a:p>
+            <a:pPr algn="r"/>
+            <a:r>
+              <a:rPr sz="1000" b="0">
+                <a:solidFill>
+                  <a:srgbClr val="9096A1"/>
+                </a:solidFill>
+                <a:latin typeface="Arial"/>
+              </a:rPr>
               <a:t>07</a:t>
             </a:r>
           </a:p>
@@ -7543,7 +6970,7 @@
                 </a:solidFill>
                 <a:latin typeface="Arial"/>
               </a:rPr>
-              <a:t>08 · SECTION　✨</a:t>
+              <a:t>08 · SECTION　🔧</a:t>
             </a:r>
           </a:p>
         </p:txBody>
@@ -7578,7 +7005,7 @@
                 </a:solidFill>
                 <a:latin typeface="Arial"/>
               </a:rPr>
-              <a:t>三、新品與品牌動態</a:t>
+              <a:t>五、供應鏈觀察</a:t>
             </a:r>
           </a:p>
         </p:txBody>
@@ -7661,7 +7088,7 @@
                 </a:solidFill>
                 <a:latin typeface="Arial"/>
               </a:rPr>
-              <a:t>巴可（Barco）</a:t>
+              <a:t>索尼與台積電合作案（TSMC / Sony）</a:t>
             </a:r>
           </a:p>
         </p:txBody>
@@ -7700,7 +7127,7 @@
                 </a:solidFill>
                 <a:latin typeface="Arial"/>
               </a:rPr>
-              <a:t>發表旗艦 QDX-N4K RGB 純雷射 3DLP 工程投影機，搭載 0.98 吋原生 4K DMD 晶片、100% Rec.2020 色域與 4K@120Hz 低延遲技術，預計 2026 年量產（投影時代）。</a:t>
+              <a:t>台積電董事會拍板認購 282 億日圓股份，雙方計畫投資約 63 億美元於日本熊本成立影像感測器合資公司，主要由蘋果龐大需求帶動（DigiTimes）。</a:t>
             </a:r>
           </a:p>
         </p:txBody>
@@ -7783,7 +7210,7 @@
                 </a:solidFill>
                 <a:latin typeface="Arial"/>
               </a:rPr>
-              <a:t>極米（XGIMI）</a:t>
+              <a:t>光電核心元件投資（唯捷光電）</a:t>
             </a:r>
           </a:p>
         </p:txBody>
@@ -7822,7 +7249,7 @@
                 </a:solidFill>
                 <a:latin typeface="Arial"/>
               </a:rPr>
-              <a:t>攜手美國客製化安裝商 AWALL 推出高端品牌「XWALL by XGIMI」，專攻北美高端家庭影院市場並於 CEDIA 展會亮相（ProjectorCentral）。</a:t>
+              <a:t>投資 7.41 億美元於常州建立生產基地，業務從 VCSEL 拓展至高階磷化銦（InP）雷射晶片，鎖定 AI 光互連市場（DigiTimes）。</a:t>
             </a:r>
           </a:p>
         </p:txBody>
@@ -7883,43 +7310,8 @@
         </p:nvSpPr>
         <p:spPr>
           <a:xfrm>
-            <a:off x="8298484" y="1764792"/>
-            <a:ext cx="3143402" cy="457200"/>
-          </a:xfrm>
-          <a:prstGeom prst="rect">
-            <a:avLst/>
-          </a:prstGeom>
-          <a:noFill/>
-        </p:spPr>
-        <p:txBody>
-          <a:bodyPr wrap="square" anchor="t">
-            <a:spAutoFit/>
-          </a:bodyPr>
-          <a:lstStyle/>
-          <a:p>
-            <a:pPr algn="l"/>
-            <a:r>
-              <a:rPr sz="1600" b="1">
-                <a:solidFill>
-                  <a:srgbClr val="8B7FD6"/>
-                </a:solidFill>
-                <a:latin typeface="Arial"/>
-              </a:rPr>
-              <a:t>當貝（Dangbei）</a:t>
-            </a:r>
-          </a:p>
-        </p:txBody>
-      </p:sp>
-      <p:sp>
-        <p:nvSpPr>
-          <p:cNvPr id="12" name="TextBox 11"/>
-          <p:cNvSpPr txBox="1"/>
-          <p:nvPr/>
-        </p:nvSpPr>
-        <p:spPr>
-          <a:xfrm>
-            <a:off x="8298484" y="2258568"/>
-            <a:ext cx="3143402" cy="1440180"/>
+            <a:off x="8298484" y="1801368"/>
+            <a:ext cx="3143402" cy="1897380"/>
           </a:xfrm>
           <a:prstGeom prst="rect">
             <a:avLst/>
@@ -7944,14 +7336,14 @@
                 </a:solidFill>
                 <a:latin typeface="Arial"/>
               </a:rPr>
-              <a:t>發表旗艦 4K 純三色雷射投影機 X7 Max，並推出兩千元人民幣價位的當貝 D7X 與不足 1 公斤的 Smart2 便攜機型，加速三色雷射普及（ZNDS投影頻道）。</a:t>
-            </a:r>
-          </a:p>
-        </p:txBody>
-      </p:sp>
-      <p:sp>
-        <p:nvSpPr>
-          <p:cNvPr id="13" name="Rounded Rectangle 12"/>
+              <a:t>AI資料中心雷射模組（環鴻科技 / EugenLight）：推出超高功率外部雷射光源可插拔模組（ELSFP），針對次世代 AI 運算叢集的高速光互連需求，預計 2027 年第一季量產（DigiTimes）。</a:t>
+            </a:r>
+          </a:p>
+        </p:txBody>
+      </p:sp>
+      <p:sp>
+        <p:nvSpPr>
+          <p:cNvPr id="12" name="Rounded Rectangle 11"/>
           <p:cNvSpPr/>
           <p:nvPr/>
         </p:nvSpPr>
@@ -7999,7 +7391,7 @@
       </p:sp>
       <p:sp>
         <p:nvSpPr>
-          <p:cNvPr id="14" name="TextBox 13"/>
+          <p:cNvPr id="13" name="TextBox 12"/>
           <p:cNvSpPr txBox="1"/>
           <p:nvPr/>
         </p:nvSpPr>
@@ -8027,14 +7419,14 @@
                 </a:solidFill>
                 <a:latin typeface="Arial"/>
               </a:rPr>
-              <a:t>Nebula（安克）</a:t>
-            </a:r>
-          </a:p>
-        </p:txBody>
-      </p:sp>
-      <p:sp>
-        <p:nvSpPr>
-          <p:cNvPr id="15" name="TextBox 14"/>
+              <a:t>光學鏡頭與產業投資（聯合光電）</a:t>
+            </a:r>
+          </a:p>
+        </p:txBody>
+      </p:sp>
+      <p:sp>
+        <p:nvSpPr>
+          <p:cNvPr id="14" name="TextBox 13"/>
           <p:cNvSpPr txBox="1"/>
           <p:nvPr/>
         </p:nvSpPr>
@@ -8066,14 +7458,14 @@
                 </a:solidFill>
                 <a:latin typeface="Arial"/>
               </a:rPr>
-              <a:t>推出升級版 X1S 戶外 4K 三色雷射投影機，具備 6,000 流明高亮度與簡易設定機能（ProjectorCentral）。</a:t>
-            </a:r>
-          </a:p>
-        </p:txBody>
-      </p:sp>
-      <p:sp>
-        <p:nvSpPr>
-          <p:cNvPr id="16" name="Rounded Rectangle 15"/>
+              <a:t>2026 上半年實現扭虧為盈，完成超短焦及短焦新光機設計，並取得火樂科技（堅果）約 13.62% 股權以深耕智慧顯示布局（投影時代）。</a:t>
+            </a:r>
+          </a:p>
+        </p:txBody>
+      </p:sp>
+      <p:sp>
+        <p:nvSpPr>
+          <p:cNvPr id="15" name="Rounded Rectangle 14"/>
           <p:cNvSpPr/>
           <p:nvPr/>
         </p:nvSpPr>
@@ -8121,7 +7513,7 @@
       </p:sp>
       <p:sp>
         <p:nvSpPr>
-          <p:cNvPr id="17" name="TextBox 16"/>
+          <p:cNvPr id="16" name="TextBox 15"/>
           <p:cNvSpPr txBox="1"/>
           <p:nvPr/>
         </p:nvSpPr>
@@ -8149,14 +7541,14 @@
                 </a:solidFill>
                 <a:latin typeface="Arial"/>
               </a:rPr>
-              <a:t>JVC</a:t>
-            </a:r>
-          </a:p>
-        </p:txBody>
-      </p:sp>
-      <p:sp>
-        <p:nvSpPr>
-          <p:cNvPr id="18" name="TextBox 17"/>
+              <a:t>智慧家庭生態合作（中國移動 / 當貝）</a:t>
+            </a:r>
+          </a:p>
+        </p:txBody>
+      </p:sp>
+      <p:sp>
+        <p:nvSpPr>
+          <p:cNvPr id="17" name="TextBox 16"/>
           <p:cNvSpPr txBox="1"/>
           <p:nvPr/>
         </p:nvSpPr>
@@ -8188,136 +7580,14 @@
                 </a:solidFill>
                 <a:latin typeface="Arial"/>
               </a:rPr>
-              <a:t>於 CEDIA 2026 展示 DLA-NZ900 與 DLA-NZ800 旗艦機種，聚焦 8K 家庭劇院與原生 4K/120p 高刷新率電競體驗（ProjectorCentral）。</a:t>
-            </a:r>
-          </a:p>
-        </p:txBody>
-      </p:sp>
-      <p:sp>
-        <p:nvSpPr>
-          <p:cNvPr id="19" name="Rounded Rectangle 18"/>
-          <p:cNvSpPr/>
-          <p:nvPr/>
-        </p:nvSpPr>
-        <p:spPr>
-          <a:xfrm>
-            <a:off x="8097316" y="4091939"/>
-            <a:ext cx="3545738" cy="2263140"/>
-          </a:xfrm>
-          <a:prstGeom prst="roundRect">
-            <a:avLst>
-              <a:gd name="adj" fmla="val 6000"/>
-            </a:avLst>
-          </a:prstGeom>
-          <a:solidFill>
-            <a:srgbClr val="23262F"/>
-          </a:solidFill>
-          <a:ln w="12700">
-            <a:solidFill>
-              <a:srgbClr val="FFB454"/>
-            </a:solidFill>
-          </a:ln>
-          <a:effectLst/>
-        </p:spPr>
-        <p:style>
-          <a:lnRef idx="1">
-            <a:schemeClr val="accent1"/>
-          </a:lnRef>
-          <a:fillRef idx="3">
-            <a:schemeClr val="accent1"/>
-          </a:fillRef>
-          <a:effectRef idx="2">
-            <a:schemeClr val="accent1"/>
-          </a:effectRef>
-          <a:fontRef idx="minor">
-            <a:schemeClr val="lt1"/>
-          </a:fontRef>
-        </p:style>
-        <p:txBody>
-          <a:bodyPr rtlCol="0" anchor="ctr"/>
-          <a:lstStyle/>
-          <a:p>
-            <a:pPr algn="ctr"/>
-          </a:p>
-        </p:txBody>
-      </p:sp>
-      <p:sp>
-        <p:nvSpPr>
-          <p:cNvPr id="20" name="TextBox 19"/>
-          <p:cNvSpPr txBox="1"/>
-          <p:nvPr/>
-        </p:nvSpPr>
-        <p:spPr>
-          <a:xfrm>
-            <a:off x="8298484" y="4256531"/>
-            <a:ext cx="3143402" cy="457200"/>
-          </a:xfrm>
-          <a:prstGeom prst="rect">
-            <a:avLst/>
-          </a:prstGeom>
-          <a:noFill/>
-        </p:spPr>
-        <p:txBody>
-          <a:bodyPr wrap="square" anchor="t">
-            <a:spAutoFit/>
-          </a:bodyPr>
-          <a:lstStyle/>
-          <a:p>
-            <a:pPr algn="l"/>
-            <a:r>
-              <a:rPr sz="1600" b="1">
-                <a:solidFill>
-                  <a:srgbClr val="FFB454"/>
-                </a:solidFill>
-                <a:latin typeface="Arial"/>
-              </a:rPr>
-              <a:t>愛普生（Epson）</a:t>
-            </a:r>
-          </a:p>
-        </p:txBody>
-      </p:sp>
-      <p:sp>
-        <p:nvSpPr>
-          <p:cNvPr id="21" name="TextBox 20"/>
-          <p:cNvSpPr txBox="1"/>
-          <p:nvPr/>
-        </p:nvSpPr>
-        <p:spPr>
-          <a:xfrm>
-            <a:off x="8298484" y="4750307"/>
-            <a:ext cx="3143402" cy="1440180"/>
-          </a:xfrm>
-          <a:prstGeom prst="rect">
-            <a:avLst/>
-          </a:prstGeom>
-          <a:noFill/>
-        </p:spPr>
-        <p:txBody>
-          <a:bodyPr wrap="square">
-            <a:normAutofit/>
-          </a:bodyPr>
-          <a:lstStyle/>
-          <a:p>
-            <a:pPr>
-              <a:lnSpc>
-                <a:spcPct val="120000"/>
-              </a:lnSpc>
-            </a:pPr>
-            <a:r>
-              <a:rPr sz="1300">
-                <a:solidFill>
-                  <a:srgbClr val="F5F3EC"/>
-                </a:solidFill>
-                <a:latin typeface="Arial"/>
-              </a:rPr>
-              <a:t>以 48 台高亮雷射工程投影機打造上海《永不消失的黑水城》沉浸式展覽，並於 InfoComm 與 ISTELive 等展會累計獲得 16 項產業大獎（投影時代、Epson官方）。</a:t>
-            </a:r>
-          </a:p>
-        </p:txBody>
-      </p:sp>
-      <p:sp>
-        <p:nvSpPr>
-          <p:cNvPr id="22" name="TextBox 21"/>
+              <a:t>雙方達成戰略合作，結合 5G 超高清、AI 與物聯網技術，共同推動智慧家庭大屏生態（ZNDS投影頻道）。</a:t>
+            </a:r>
+          </a:p>
+        </p:txBody>
+      </p:sp>
+      <p:sp>
+        <p:nvSpPr>
+          <p:cNvPr id="18" name="TextBox 17"/>
           <p:cNvSpPr txBox="1"/>
           <p:nvPr/>
         </p:nvSpPr>
@@ -8406,7 +7676,7 @@
                 </a:solidFill>
                 <a:latin typeface="Arial"/>
               </a:rPr>
-              <a:t>09 · SECTION　🔧</a:t>
+              <a:t>09 · SECTION　✨</a:t>
             </a:r>
           </a:p>
         </p:txBody>
@@ -8441,7 +7711,7 @@
                 </a:solidFill>
                 <a:latin typeface="Arial"/>
               </a:rPr>
-              <a:t>四、技術動態</a:t>
+              <a:t>六、本月關注品牌／技術關鍵字</a:t>
             </a:r>
           </a:p>
         </p:txBody>
@@ -8524,7 +7794,7 @@
                 </a:solidFill>
                 <a:latin typeface="Arial"/>
               </a:rPr>
-              <a:t>光學互連架構（Lightmatter）</a:t>
+              <a:t>重點品牌</a:t>
             </a:r>
           </a:p>
         </p:txBody>
@@ -8563,7 +7833,7 @@
                 </a:solidFill>
                 <a:latin typeface="Arial"/>
               </a:rPr>
-              <a:t>因應 AI 資料中心傳輸速率逼近 448G 與銅纜物理瓶頸，提出全光學互連架構藍圖，推動矽光子與 CPO 技術演進（DigiTimes）。</a:t>
+              <a:t>巴可 (Barco)、極米 (XGIMI)、當貝 (Dangbei)、明基 (BenQ)、愛普生 (Epson)、索尼 (Sony)、台積電 (TSMC)、Nebula (Anker)、海信 (Hisense)、JVC</a:t>
             </a:r>
           </a:p>
         </p:txBody>
@@ -8646,7 +7916,7 @@
                 </a:solidFill>
                 <a:latin typeface="Arial"/>
               </a:rPr>
-              <a:t>增強現實與動態投影（羿飛教育）</a:t>
+              <a:t>核心技術與趨勢</a:t>
             </a:r>
           </a:p>
         </p:txBody>
@@ -8685,7 +7955,7 @@
                 </a:solidFill>
                 <a:latin typeface="Arial"/>
               </a:rPr>
-              <a:t>於山東教育博覽會展示結合即時增強現實（AR）的地理沙盤與古戰場動態模擬投影系統，推進數位化沉浸式教學應用（投影時代）。</a:t>
+              <a:t>三色雷射 (Tri-Chroma Laser)、RGB純雷射、4K/8K 3DLP、一體式雲台、AI光互連/磷化銦(InP)晶片、ELSFP雷射模組、海外市場轉型 (Outbound Expansion)</a:t>
             </a:r>
           </a:p>
         </p:txBody>

--- a/reports/2026-08.pptx
+++ b/reports/2026-08.pptx
@@ -4533,7 +4533,7 @@
               </a:lnSpc>
             </a:pPr>
             <a:r>
-              <a:rPr sz="1300">
+              <a:rPr sz="1200">
                 <a:solidFill>
                   <a:srgbClr val="F5F3EC"/>
                 </a:solidFill>
@@ -4655,7 +4655,7 @@
               </a:lnSpc>
             </a:pPr>
             <a:r>
-              <a:rPr sz="1300">
+              <a:rPr sz="1200">
                 <a:solidFill>
                   <a:srgbClr val="F5F3EC"/>
                 </a:solidFill>
@@ -4777,7 +4777,7 @@
               </a:lnSpc>
             </a:pPr>
             <a:r>
-              <a:rPr sz="1300">
+              <a:rPr sz="1200">
                 <a:solidFill>
                   <a:srgbClr val="F5F3EC"/>
                 </a:solidFill>
@@ -4899,7 +4899,7 @@
               </a:lnSpc>
             </a:pPr>
             <a:r>
-              <a:rPr sz="1300">
+              <a:rPr sz="1200">
                 <a:solidFill>
                   <a:srgbClr val="F5F3EC"/>
                 </a:solidFill>
@@ -5021,7 +5021,7 @@
               </a:lnSpc>
             </a:pPr>
             <a:r>
-              <a:rPr sz="1300">
+              <a:rPr sz="1200">
                 <a:solidFill>
                   <a:srgbClr val="F5F3EC"/>
                 </a:solidFill>
@@ -5883,7 +5883,7 @@
               </a:lnSpc>
             </a:pPr>
             <a:r>
-              <a:rPr sz="1300">
+              <a:rPr sz="1200">
                 <a:solidFill>
                   <a:srgbClr val="F5F3EC"/>
                 </a:solidFill>
@@ -6005,7 +6005,7 @@
               </a:lnSpc>
             </a:pPr>
             <a:r>
-              <a:rPr sz="1300">
+              <a:rPr sz="1200">
                 <a:solidFill>
                   <a:srgbClr val="F5F3EC"/>
                 </a:solidFill>
@@ -6127,7 +6127,7 @@
               </a:lnSpc>
             </a:pPr>
             <a:r>
-              <a:rPr sz="1300">
+              <a:rPr sz="1200">
                 <a:solidFill>
                   <a:srgbClr val="F5F3EC"/>
                 </a:solidFill>
@@ -6249,7 +6249,7 @@
               </a:lnSpc>
             </a:pPr>
             <a:r>
-              <a:rPr sz="1300">
+              <a:rPr sz="1200">
                 <a:solidFill>
                   <a:srgbClr val="F5F3EC"/>
                 </a:solidFill>
@@ -6371,7 +6371,7 @@
               </a:lnSpc>
             </a:pPr>
             <a:r>
-              <a:rPr sz="1300">
+              <a:rPr sz="1200">
                 <a:solidFill>
                   <a:srgbClr val="F5F3EC"/>
                 </a:solidFill>
@@ -6493,7 +6493,7 @@
               </a:lnSpc>
             </a:pPr>
             <a:r>
-              <a:rPr sz="1300">
+              <a:rPr sz="1200">
                 <a:solidFill>
                   <a:srgbClr val="F5F3EC"/>
                 </a:solidFill>
@@ -7121,7 +7121,7 @@
               </a:lnSpc>
             </a:pPr>
             <a:r>
-              <a:rPr sz="1300">
+              <a:rPr sz="1200">
                 <a:solidFill>
                   <a:srgbClr val="F5F3EC"/>
                 </a:solidFill>
@@ -7243,7 +7243,7 @@
               </a:lnSpc>
             </a:pPr>
             <a:r>
-              <a:rPr sz="1300">
+              <a:rPr sz="1200">
                 <a:solidFill>
                   <a:srgbClr val="F5F3EC"/>
                 </a:solidFill>
@@ -7330,7 +7330,7 @@
               </a:lnSpc>
             </a:pPr>
             <a:r>
-              <a:rPr sz="1300">
+              <a:rPr sz="1200">
                 <a:solidFill>
                   <a:srgbClr val="F5F3EC"/>
                 </a:solidFill>
@@ -7452,7 +7452,7 @@
               </a:lnSpc>
             </a:pPr>
             <a:r>
-              <a:rPr sz="1300">
+              <a:rPr sz="1200">
                 <a:solidFill>
                   <a:srgbClr val="F5F3EC"/>
                 </a:solidFill>
@@ -7574,7 +7574,7 @@
               </a:lnSpc>
             </a:pPr>
             <a:r>
-              <a:rPr sz="1300">
+              <a:rPr sz="1200">
                 <a:solidFill>
                   <a:srgbClr val="F5F3EC"/>
                 </a:solidFill>
